--- a/Presentation/FUNGICIDE EXPLORATION.pptx
+++ b/Presentation/FUNGICIDE EXPLORATION.pptx
@@ -1,34 +1,35 @@
 
 <file path=ppt/presentation.xml><?xml version="1.0" encoding="utf-8"?>
-<p:presentation xmlns:a="http://schemas.openxmlformats.org/drawingml/2006/main" xmlns:r="http://schemas.openxmlformats.org/officeDocument/2006/relationships" xmlns:p="http://schemas.openxmlformats.org/presentationml/2006/main" saveSubsetFonts="1" embedTrueTypeFonts="true">
+<p:presentation xmlns:a="http://schemas.openxmlformats.org/drawingml/2006/main" xmlns:r="http://schemas.openxmlformats.org/officeDocument/2006/relationships" xmlns:p="http://schemas.openxmlformats.org/presentationml/2006/main" embedTrueTypeFonts="1" saveSubsetFonts="1">
   <p:sldMasterIdLst>
     <p:sldMasterId id="2147483648" r:id="rId1"/>
   </p:sldMasterIdLst>
   <p:sldIdLst>
-    <p:sldId id="256" r:id="rId6"/>
-    <p:sldId id="257" r:id="rId7"/>
-    <p:sldId id="258" r:id="rId8"/>
-    <p:sldId id="259" r:id="rId9"/>
-    <p:sldId id="260" r:id="rId10"/>
-    <p:sldId id="261" r:id="rId11"/>
-    <p:sldId id="262" r:id="rId12"/>
-    <p:sldId id="263" r:id="rId13"/>
-    <p:sldId id="264" r:id="rId14"/>
+    <p:sldId id="256" r:id="rId2"/>
+    <p:sldId id="257" r:id="rId3"/>
+    <p:sldId id="258" r:id="rId4"/>
+    <p:sldId id="259" r:id="rId5"/>
+    <p:sldId id="260" r:id="rId6"/>
+    <p:sldId id="262" r:id="rId7"/>
+    <p:sldId id="261" r:id="rId8"/>
+    <p:sldId id="263" r:id="rId9"/>
+    <p:sldId id="264" r:id="rId10"/>
   </p:sldIdLst>
   <p:sldSz cx="18288000" cy="10287000"/>
   <p:notesSz cx="6858000" cy="9144000"/>
   <p:embeddedFontLst>
     <p:embeddedFont>
-      <p:font typeface="Chau Philomene" charset="1" panose="02000806040000020003"/>
-      <p:regular r:id="rId15"/>
+      <p:font typeface="Chau Philomene" panose="02000806040000020003"/>
+      <p:regular r:id="rId11"/>
     </p:embeddedFont>
     <p:embeddedFont>
-      <p:font typeface="DM Sans" charset="1" panose="00000000000000000000"/>
-      <p:regular r:id="rId16"/>
+      <p:font typeface="DM Sans" pitchFamily="2" charset="77"/>
+      <p:regular r:id="rId12"/>
     </p:embeddedFont>
     <p:embeddedFont>
-      <p:font typeface="DM Sans Italics" charset="1" panose="00000000000000000000"/>
-      <p:regular r:id="rId17"/>
+      <p:font typeface="DM Sans Italics" pitchFamily="2" charset="77"/>
+      <p:regular r:id="rId13"/>
+      <p:italic r:id="rId14"/>
     </p:embeddedFont>
   </p:embeddedFontLst>
   <p:defaultTextStyle>
@@ -126,6 +127,22 @@
       </a:defRPr>
     </a:lvl9pPr>
   </p:defaultTextStyle>
+  <p:extLst>
+    <p:ext uri="{EFAFB233-063F-42B5-8137-9DF3F51BA10A}">
+      <p15:sldGuideLst xmlns:p15="http://schemas.microsoft.com/office/powerpoint/2012/main">
+        <p15:guide id="1" orient="horz" pos="2160">
+          <p15:clr>
+            <a:srgbClr val="A4A3A4"/>
+          </p15:clr>
+        </p15:guide>
+        <p15:guide id="2" pos="2880">
+          <p15:clr>
+            <a:srgbClr val="A4A3A4"/>
+          </p15:clr>
+        </p15:guide>
+      </p15:sldGuideLst>
+    </p:ext>
+  </p:extLst>
 </p:presentation>
 </file>
 
@@ -167,10 +184,9 @@
           <a:lstStyle/>
           <a:p>
             <a:r>
-              <a:rPr lang="en-US" smtClean="0"/>
+              <a:rPr lang="en-US"/>
               <a:t>Click to edit Master title style</a:t>
             </a:r>
-            <a:endParaRPr lang="en-US"/>
           </a:p>
         </p:txBody>
       </p:sp>
@@ -286,10 +302,9 @@
           </a:lstStyle>
           <a:p>
             <a:r>
-              <a:rPr lang="en-US" smtClean="0"/>
+              <a:rPr lang="en-US"/>
               <a:t>Click to edit Master subtitle style</a:t>
             </a:r>
-            <a:endParaRPr lang="en-US"/>
           </a:p>
         </p:txBody>
       </p:sp>
@@ -311,7 +326,7 @@
             <a:fld id="{1D8BD707-D9CF-40AE-B4C6-C98DA3205C09}" type="datetimeFigureOut">
               <a:rPr lang="en-US" smtClean="0"/>
               <a:pPr/>
-              <a:t>8/1/2011</a:t>
+              <a:t>3/12/26</a:t>
             </a:fld>
             <a:endParaRPr lang="en-US"/>
           </a:p>
@@ -401,10 +416,9 @@
           <a:lstStyle/>
           <a:p>
             <a:r>
-              <a:rPr lang="en-US" smtClean="0"/>
+              <a:rPr lang="en-US"/>
               <a:t>Click to edit Master title style</a:t>
             </a:r>
-            <a:endParaRPr lang="en-US"/>
           </a:p>
         </p:txBody>
       </p:sp>
@@ -425,38 +439,37 @@
           <a:p>
             <a:pPr lvl="0"/>
             <a:r>
-              <a:rPr lang="en-US" smtClean="0"/>
+              <a:rPr lang="en-US"/>
               <a:t>Click to edit Master text styles</a:t>
             </a:r>
           </a:p>
           <a:p>
             <a:pPr lvl="1"/>
             <a:r>
-              <a:rPr lang="en-US" smtClean="0"/>
+              <a:rPr lang="en-US"/>
               <a:t>Second level</a:t>
             </a:r>
           </a:p>
           <a:p>
             <a:pPr lvl="2"/>
             <a:r>
-              <a:rPr lang="en-US" smtClean="0"/>
+              <a:rPr lang="en-US"/>
               <a:t>Third level</a:t>
             </a:r>
           </a:p>
           <a:p>
             <a:pPr lvl="3"/>
             <a:r>
-              <a:rPr lang="en-US" smtClean="0"/>
+              <a:rPr lang="en-US"/>
               <a:t>Fourth level</a:t>
             </a:r>
           </a:p>
           <a:p>
             <a:pPr lvl="4"/>
             <a:r>
-              <a:rPr lang="en-US" smtClean="0"/>
+              <a:rPr lang="en-US"/>
               <a:t>Fifth level</a:t>
             </a:r>
-            <a:endParaRPr lang="en-US"/>
           </a:p>
         </p:txBody>
       </p:sp>
@@ -478,7 +491,7 @@
             <a:fld id="{1D8BD707-D9CF-40AE-B4C6-C98DA3205C09}" type="datetimeFigureOut">
               <a:rPr lang="en-US" smtClean="0"/>
               <a:pPr/>
-              <a:t>8/1/2011</a:t>
+              <a:t>3/12/26</a:t>
             </a:fld>
             <a:endParaRPr lang="en-US"/>
           </a:p>
@@ -573,10 +586,9 @@
           <a:lstStyle/>
           <a:p>
             <a:r>
-              <a:rPr lang="en-US" smtClean="0"/>
+              <a:rPr lang="en-US"/>
               <a:t>Click to edit Master title style</a:t>
             </a:r>
-            <a:endParaRPr lang="en-US"/>
           </a:p>
         </p:txBody>
       </p:sp>
@@ -602,38 +614,37 @@
           <a:p>
             <a:pPr lvl="0"/>
             <a:r>
-              <a:rPr lang="en-US" smtClean="0"/>
+              <a:rPr lang="en-US"/>
               <a:t>Click to edit Master text styles</a:t>
             </a:r>
           </a:p>
           <a:p>
             <a:pPr lvl="1"/>
             <a:r>
-              <a:rPr lang="en-US" smtClean="0"/>
+              <a:rPr lang="en-US"/>
               <a:t>Second level</a:t>
             </a:r>
           </a:p>
           <a:p>
             <a:pPr lvl="2"/>
             <a:r>
-              <a:rPr lang="en-US" smtClean="0"/>
+              <a:rPr lang="en-US"/>
               <a:t>Third level</a:t>
             </a:r>
           </a:p>
           <a:p>
             <a:pPr lvl="3"/>
             <a:r>
-              <a:rPr lang="en-US" smtClean="0"/>
+              <a:rPr lang="en-US"/>
               <a:t>Fourth level</a:t>
             </a:r>
           </a:p>
           <a:p>
             <a:pPr lvl="4"/>
             <a:r>
-              <a:rPr lang="en-US" smtClean="0"/>
+              <a:rPr lang="en-US"/>
               <a:t>Fifth level</a:t>
             </a:r>
-            <a:endParaRPr lang="en-US"/>
           </a:p>
         </p:txBody>
       </p:sp>
@@ -655,7 +666,7 @@
             <a:fld id="{1D8BD707-D9CF-40AE-B4C6-C98DA3205C09}" type="datetimeFigureOut">
               <a:rPr lang="en-US" smtClean="0"/>
               <a:pPr/>
-              <a:t>8/1/2011</a:t>
+              <a:t>3/12/26</a:t>
             </a:fld>
             <a:endParaRPr lang="en-US"/>
           </a:p>
@@ -745,10 +756,9 @@
           <a:lstStyle/>
           <a:p>
             <a:r>
-              <a:rPr lang="en-US" smtClean="0"/>
+              <a:rPr lang="en-US"/>
               <a:t>Click to edit Master title style</a:t>
             </a:r>
-            <a:endParaRPr lang="en-US"/>
           </a:p>
         </p:txBody>
       </p:sp>
@@ -769,38 +779,37 @@
           <a:p>
             <a:pPr lvl="0"/>
             <a:r>
-              <a:rPr lang="en-US" smtClean="0"/>
+              <a:rPr lang="en-US"/>
               <a:t>Click to edit Master text styles</a:t>
             </a:r>
           </a:p>
           <a:p>
             <a:pPr lvl="1"/>
             <a:r>
-              <a:rPr lang="en-US" smtClean="0"/>
+              <a:rPr lang="en-US"/>
               <a:t>Second level</a:t>
             </a:r>
           </a:p>
           <a:p>
             <a:pPr lvl="2"/>
             <a:r>
-              <a:rPr lang="en-US" smtClean="0"/>
+              <a:rPr lang="en-US"/>
               <a:t>Third level</a:t>
             </a:r>
           </a:p>
           <a:p>
             <a:pPr lvl="3"/>
             <a:r>
-              <a:rPr lang="en-US" smtClean="0"/>
+              <a:rPr lang="en-US"/>
               <a:t>Fourth level</a:t>
             </a:r>
           </a:p>
           <a:p>
             <a:pPr lvl="4"/>
             <a:r>
-              <a:rPr lang="en-US" smtClean="0"/>
+              <a:rPr lang="en-US"/>
               <a:t>Fifth level</a:t>
             </a:r>
-            <a:endParaRPr lang="en-US"/>
           </a:p>
         </p:txBody>
       </p:sp>
@@ -822,7 +831,7 @@
             <a:fld id="{1D8BD707-D9CF-40AE-B4C6-C98DA3205C09}" type="datetimeFigureOut">
               <a:rPr lang="en-US" smtClean="0"/>
               <a:pPr/>
-              <a:t>8/1/2011</a:t>
+              <a:t>3/12/26</a:t>
             </a:fld>
             <a:endParaRPr lang="en-US"/>
           </a:p>
@@ -921,10 +930,9 @@
           </a:lstStyle>
           <a:p>
             <a:r>
-              <a:rPr lang="en-US" smtClean="0"/>
+              <a:rPr lang="en-US"/>
               <a:t>Click to edit Master title style</a:t>
             </a:r>
-            <a:endParaRPr lang="en-US"/>
           </a:p>
         </p:txBody>
       </p:sp>
@@ -1041,7 +1049,7 @@
           <a:p>
             <a:pPr lvl="0"/>
             <a:r>
-              <a:rPr lang="en-US" smtClean="0"/>
+              <a:rPr lang="en-US"/>
               <a:t>Click to edit Master text styles</a:t>
             </a:r>
           </a:p>
@@ -1065,7 +1073,7 @@
             <a:fld id="{1D8BD707-D9CF-40AE-B4C6-C98DA3205C09}" type="datetimeFigureOut">
               <a:rPr lang="en-US" smtClean="0"/>
               <a:pPr/>
-              <a:t>8/1/2011</a:t>
+              <a:t>3/12/26</a:t>
             </a:fld>
             <a:endParaRPr lang="en-US"/>
           </a:p>
@@ -1155,10 +1163,9 @@
           <a:lstStyle/>
           <a:p>
             <a:r>
-              <a:rPr lang="en-US" smtClean="0"/>
+              <a:rPr lang="en-US"/>
               <a:t>Click to edit Master title style</a:t>
             </a:r>
-            <a:endParaRPr lang="en-US"/>
           </a:p>
         </p:txBody>
       </p:sp>
@@ -1212,38 +1219,37 @@
           <a:p>
             <a:pPr lvl="0"/>
             <a:r>
-              <a:rPr lang="en-US" smtClean="0"/>
+              <a:rPr lang="en-US"/>
               <a:t>Click to edit Master text styles</a:t>
             </a:r>
           </a:p>
           <a:p>
             <a:pPr lvl="1"/>
             <a:r>
-              <a:rPr lang="en-US" smtClean="0"/>
+              <a:rPr lang="en-US"/>
               <a:t>Second level</a:t>
             </a:r>
           </a:p>
           <a:p>
             <a:pPr lvl="2"/>
             <a:r>
-              <a:rPr lang="en-US" smtClean="0"/>
+              <a:rPr lang="en-US"/>
               <a:t>Third level</a:t>
             </a:r>
           </a:p>
           <a:p>
             <a:pPr lvl="3"/>
             <a:r>
-              <a:rPr lang="en-US" smtClean="0"/>
+              <a:rPr lang="en-US"/>
               <a:t>Fourth level</a:t>
             </a:r>
           </a:p>
           <a:p>
             <a:pPr lvl="4"/>
             <a:r>
-              <a:rPr lang="en-US" smtClean="0"/>
+              <a:rPr lang="en-US"/>
               <a:t>Fifth level</a:t>
             </a:r>
-            <a:endParaRPr lang="en-US"/>
           </a:p>
         </p:txBody>
       </p:sp>
@@ -1297,38 +1303,37 @@
           <a:p>
             <a:pPr lvl="0"/>
             <a:r>
-              <a:rPr lang="en-US" smtClean="0"/>
+              <a:rPr lang="en-US"/>
               <a:t>Click to edit Master text styles</a:t>
             </a:r>
           </a:p>
           <a:p>
             <a:pPr lvl="1"/>
             <a:r>
-              <a:rPr lang="en-US" smtClean="0"/>
+              <a:rPr lang="en-US"/>
               <a:t>Second level</a:t>
             </a:r>
           </a:p>
           <a:p>
             <a:pPr lvl="2"/>
             <a:r>
-              <a:rPr lang="en-US" smtClean="0"/>
+              <a:rPr lang="en-US"/>
               <a:t>Third level</a:t>
             </a:r>
           </a:p>
           <a:p>
             <a:pPr lvl="3"/>
             <a:r>
-              <a:rPr lang="en-US" smtClean="0"/>
+              <a:rPr lang="en-US"/>
               <a:t>Fourth level</a:t>
             </a:r>
           </a:p>
           <a:p>
             <a:pPr lvl="4"/>
             <a:r>
-              <a:rPr lang="en-US" smtClean="0"/>
+              <a:rPr lang="en-US"/>
               <a:t>Fifth level</a:t>
             </a:r>
-            <a:endParaRPr lang="en-US"/>
           </a:p>
         </p:txBody>
       </p:sp>
@@ -1350,7 +1355,7 @@
             <a:fld id="{1D8BD707-D9CF-40AE-B4C6-C98DA3205C09}" type="datetimeFigureOut">
               <a:rPr lang="en-US" smtClean="0"/>
               <a:pPr/>
-              <a:t>8/1/2011</a:t>
+              <a:t>3/12/26</a:t>
             </a:fld>
             <a:endParaRPr lang="en-US"/>
           </a:p>
@@ -1444,10 +1449,9 @@
           </a:lstStyle>
           <a:p>
             <a:r>
-              <a:rPr lang="en-US" smtClean="0"/>
+              <a:rPr lang="en-US"/>
               <a:t>Click to edit Master title style</a:t>
             </a:r>
-            <a:endParaRPr lang="en-US"/>
           </a:p>
         </p:txBody>
       </p:sp>
@@ -1510,7 +1514,7 @@
           <a:p>
             <a:pPr lvl="0"/>
             <a:r>
-              <a:rPr lang="en-US" smtClean="0"/>
+              <a:rPr lang="en-US"/>
               <a:t>Click to edit Master text styles</a:t>
             </a:r>
           </a:p>
@@ -1566,38 +1570,37 @@
           <a:p>
             <a:pPr lvl="0"/>
             <a:r>
-              <a:rPr lang="en-US" smtClean="0"/>
+              <a:rPr lang="en-US"/>
               <a:t>Click to edit Master text styles</a:t>
             </a:r>
           </a:p>
           <a:p>
             <a:pPr lvl="1"/>
             <a:r>
-              <a:rPr lang="en-US" smtClean="0"/>
+              <a:rPr lang="en-US"/>
               <a:t>Second level</a:t>
             </a:r>
           </a:p>
           <a:p>
             <a:pPr lvl="2"/>
             <a:r>
-              <a:rPr lang="en-US" smtClean="0"/>
+              <a:rPr lang="en-US"/>
               <a:t>Third level</a:t>
             </a:r>
           </a:p>
           <a:p>
             <a:pPr lvl="3"/>
             <a:r>
-              <a:rPr lang="en-US" smtClean="0"/>
+              <a:rPr lang="en-US"/>
               <a:t>Fourth level</a:t>
             </a:r>
           </a:p>
           <a:p>
             <a:pPr lvl="4"/>
             <a:r>
-              <a:rPr lang="en-US" smtClean="0"/>
+              <a:rPr lang="en-US"/>
               <a:t>Fifth level</a:t>
             </a:r>
-            <a:endParaRPr lang="en-US"/>
           </a:p>
         </p:txBody>
       </p:sp>
@@ -1660,7 +1663,7 @@
           <a:p>
             <a:pPr lvl="0"/>
             <a:r>
-              <a:rPr lang="en-US" smtClean="0"/>
+              <a:rPr lang="en-US"/>
               <a:t>Click to edit Master text styles</a:t>
             </a:r>
           </a:p>
@@ -1716,38 +1719,37 @@
           <a:p>
             <a:pPr lvl="0"/>
             <a:r>
-              <a:rPr lang="en-US" smtClean="0"/>
+              <a:rPr lang="en-US"/>
               <a:t>Click to edit Master text styles</a:t>
             </a:r>
           </a:p>
           <a:p>
             <a:pPr lvl="1"/>
             <a:r>
-              <a:rPr lang="en-US" smtClean="0"/>
+              <a:rPr lang="en-US"/>
               <a:t>Second level</a:t>
             </a:r>
           </a:p>
           <a:p>
             <a:pPr lvl="2"/>
             <a:r>
-              <a:rPr lang="en-US" smtClean="0"/>
+              <a:rPr lang="en-US"/>
               <a:t>Third level</a:t>
             </a:r>
           </a:p>
           <a:p>
             <a:pPr lvl="3"/>
             <a:r>
-              <a:rPr lang="en-US" smtClean="0"/>
+              <a:rPr lang="en-US"/>
               <a:t>Fourth level</a:t>
             </a:r>
           </a:p>
           <a:p>
             <a:pPr lvl="4"/>
             <a:r>
-              <a:rPr lang="en-US" smtClean="0"/>
+              <a:rPr lang="en-US"/>
               <a:t>Fifth level</a:t>
             </a:r>
-            <a:endParaRPr lang="en-US"/>
           </a:p>
         </p:txBody>
       </p:sp>
@@ -1769,7 +1771,7 @@
             <a:fld id="{1D8BD707-D9CF-40AE-B4C6-C98DA3205C09}" type="datetimeFigureOut">
               <a:rPr lang="en-US" smtClean="0"/>
               <a:pPr/>
-              <a:t>8/1/2011</a:t>
+              <a:t>3/12/26</a:t>
             </a:fld>
             <a:endParaRPr lang="en-US"/>
           </a:p>
@@ -1859,10 +1861,9 @@
           <a:lstStyle/>
           <a:p>
             <a:r>
-              <a:rPr lang="en-US" smtClean="0"/>
+              <a:rPr lang="en-US"/>
               <a:t>Click to edit Master title style</a:t>
             </a:r>
-            <a:endParaRPr lang="en-US"/>
           </a:p>
         </p:txBody>
       </p:sp>
@@ -1884,7 +1885,7 @@
             <a:fld id="{1D8BD707-D9CF-40AE-B4C6-C98DA3205C09}" type="datetimeFigureOut">
               <a:rPr lang="en-US" smtClean="0"/>
               <a:pPr/>
-              <a:t>8/1/2011</a:t>
+              <a:t>3/12/26</a:t>
             </a:fld>
             <a:endParaRPr lang="en-US"/>
           </a:p>
@@ -1976,7 +1977,7 @@
             <a:fld id="{1D8BD707-D9CF-40AE-B4C6-C98DA3205C09}" type="datetimeFigureOut">
               <a:rPr lang="en-US" smtClean="0"/>
               <a:pPr/>
-              <a:t>8/1/2011</a:t>
+              <a:t>3/12/26</a:t>
             </a:fld>
             <a:endParaRPr lang="en-US"/>
           </a:p>
@@ -2075,10 +2076,9 @@
           </a:lstStyle>
           <a:p>
             <a:r>
-              <a:rPr lang="en-US" smtClean="0"/>
+              <a:rPr lang="en-US"/>
               <a:t>Click to edit Master title style</a:t>
             </a:r>
-            <a:endParaRPr lang="en-US"/>
           </a:p>
         </p:txBody>
       </p:sp>
@@ -2132,38 +2132,37 @@
           <a:p>
             <a:pPr lvl="0"/>
             <a:r>
-              <a:rPr lang="en-US" smtClean="0"/>
+              <a:rPr lang="en-US"/>
               <a:t>Click to edit Master text styles</a:t>
             </a:r>
           </a:p>
           <a:p>
             <a:pPr lvl="1"/>
             <a:r>
-              <a:rPr lang="en-US" smtClean="0"/>
+              <a:rPr lang="en-US"/>
               <a:t>Second level</a:t>
             </a:r>
           </a:p>
           <a:p>
             <a:pPr lvl="2"/>
             <a:r>
-              <a:rPr lang="en-US" smtClean="0"/>
+              <a:rPr lang="en-US"/>
               <a:t>Third level</a:t>
             </a:r>
           </a:p>
           <a:p>
             <a:pPr lvl="3"/>
             <a:r>
-              <a:rPr lang="en-US" smtClean="0"/>
+              <a:rPr lang="en-US"/>
               <a:t>Fourth level</a:t>
             </a:r>
           </a:p>
           <a:p>
             <a:pPr lvl="4"/>
             <a:r>
-              <a:rPr lang="en-US" smtClean="0"/>
+              <a:rPr lang="en-US"/>
               <a:t>Fifth level</a:t>
             </a:r>
-            <a:endParaRPr lang="en-US"/>
           </a:p>
         </p:txBody>
       </p:sp>
@@ -2226,7 +2225,7 @@
           <a:p>
             <a:pPr lvl="0"/>
             <a:r>
-              <a:rPr lang="en-US" smtClean="0"/>
+              <a:rPr lang="en-US"/>
               <a:t>Click to edit Master text styles</a:t>
             </a:r>
           </a:p>
@@ -2250,7 +2249,7 @@
             <a:fld id="{1D8BD707-D9CF-40AE-B4C6-C98DA3205C09}" type="datetimeFigureOut">
               <a:rPr lang="en-US" smtClean="0"/>
               <a:pPr/>
-              <a:t>8/1/2011</a:t>
+              <a:t>3/12/26</a:t>
             </a:fld>
             <a:endParaRPr lang="en-US"/>
           </a:p>
@@ -2349,10 +2348,9 @@
           </a:lstStyle>
           <a:p>
             <a:r>
-              <a:rPr lang="en-US" smtClean="0"/>
+              <a:rPr lang="en-US"/>
               <a:t>Click to edit Master title style</a:t>
             </a:r>
-            <a:endParaRPr lang="en-US"/>
           </a:p>
         </p:txBody>
       </p:sp>
@@ -2476,7 +2474,7 @@
           <a:p>
             <a:pPr lvl="0"/>
             <a:r>
-              <a:rPr lang="en-US" smtClean="0"/>
+              <a:rPr lang="en-US"/>
               <a:t>Click to edit Master text styles</a:t>
             </a:r>
           </a:p>
@@ -2500,7 +2498,7 @@
             <a:fld id="{1D8BD707-D9CF-40AE-B4C6-C98DA3205C09}" type="datetimeFigureOut">
               <a:rPr lang="en-US" smtClean="0"/>
               <a:pPr/>
-              <a:t>8/1/2011</a:t>
+              <a:t>3/12/26</a:t>
             </a:fld>
             <a:endParaRPr lang="en-US"/>
           </a:p>
@@ -2605,10 +2603,9 @@
           <a:lstStyle/>
           <a:p>
             <a:r>
-              <a:rPr lang="en-US" smtClean="0"/>
+              <a:rPr lang="en-US"/>
               <a:t>Click to edit Master title style</a:t>
             </a:r>
-            <a:endParaRPr lang="en-US"/>
           </a:p>
         </p:txBody>
       </p:sp>
@@ -2639,38 +2636,37 @@
           <a:p>
             <a:pPr lvl="0"/>
             <a:r>
-              <a:rPr lang="en-US" smtClean="0"/>
+              <a:rPr lang="en-US"/>
               <a:t>Click to edit Master text styles</a:t>
             </a:r>
           </a:p>
           <a:p>
             <a:pPr lvl="1"/>
             <a:r>
-              <a:rPr lang="en-US" smtClean="0"/>
+              <a:rPr lang="en-US"/>
               <a:t>Second level</a:t>
             </a:r>
           </a:p>
           <a:p>
             <a:pPr lvl="2"/>
             <a:r>
-              <a:rPr lang="en-US" smtClean="0"/>
+              <a:rPr lang="en-US"/>
               <a:t>Third level</a:t>
             </a:r>
           </a:p>
           <a:p>
             <a:pPr lvl="3"/>
             <a:r>
-              <a:rPr lang="en-US" smtClean="0"/>
+              <a:rPr lang="en-US"/>
               <a:t>Fourth level</a:t>
             </a:r>
           </a:p>
           <a:p>
             <a:pPr lvl="4"/>
             <a:r>
-              <a:rPr lang="en-US" smtClean="0"/>
+              <a:rPr lang="en-US"/>
               <a:t>Fifth level</a:t>
             </a:r>
-            <a:endParaRPr lang="en-US"/>
           </a:p>
         </p:txBody>
       </p:sp>
@@ -2710,7 +2706,7 @@
             <a:fld id="{1D8BD707-D9CF-40AE-B4C6-C98DA3205C09}" type="datetimeFigureOut">
               <a:rPr lang="en-US" smtClean="0"/>
               <a:pPr/>
-              <a:t>8/1/2011</a:t>
+              <a:t>3/12/26</a:t>
             </a:fld>
             <a:endParaRPr lang="en-US"/>
           </a:p>
@@ -3065,13 +3061,14 @@
 </file>
 
 <file path=ppt/slides/slide1.xml><?xml version="1.0" encoding="utf-8"?>
-<p:sld xmlns:p="http://schemas.openxmlformats.org/presentationml/2006/main" xmlns:a="http://schemas.openxmlformats.org/drawingml/2006/main" xmlns:r="http://schemas.openxmlformats.org/officeDocument/2006/relationships">
+<p:sld xmlns:a="http://schemas.openxmlformats.org/drawingml/2006/main" xmlns:r="http://schemas.openxmlformats.org/officeDocument/2006/relationships" xmlns:p="http://schemas.openxmlformats.org/presentationml/2006/main">
   <p:cSld>
     <p:bg>
       <p:bgPr>
         <a:solidFill>
           <a:srgbClr val="FEF6F3"/>
         </a:solidFill>
+        <a:effectLst/>
       </p:bgPr>
     </p:bg>
     <p:spTree>
@@ -3090,12 +3087,12 @@
       </p:grpSpPr>
       <p:sp>
         <p:nvSpPr>
-          <p:cNvPr name="Freeform 2" id="2"/>
+          <p:cNvPr id="2" name="Freeform 2"/>
           <p:cNvSpPr/>
           <p:nvPr/>
         </p:nvSpPr>
         <p:spPr>
-          <a:xfrm flipH="false" flipV="false" rot="0">
+          <a:xfrm>
             <a:off x="-1591031" y="3162706"/>
             <a:ext cx="5647563" cy="8229600"/>
           </a:xfrm>
@@ -3104,9 +3101,9 @@
             <a:gdLst/>
             <a:ahLst/>
             <a:cxnLst/>
-            <a:rect r="r" b="b" t="t" l="l"/>
+            <a:rect l="l" t="t" r="r" b="b"/>
             <a:pathLst>
-              <a:path h="8229600" w="5647563">
+              <a:path w="5647563" h="8229600">
                 <a:moveTo>
                   <a:pt x="0" y="0"/>
                 </a:moveTo>
@@ -3129,19 +3126,19 @@
           <a:blipFill>
             <a:blip r:embed="rId2"/>
             <a:stretch>
-              <a:fillRect l="0" t="0" r="0" b="0"/>
+              <a:fillRect/>
             </a:stretch>
           </a:blipFill>
         </p:spPr>
       </p:sp>
       <p:sp>
         <p:nvSpPr>
-          <p:cNvPr name="TextBox 3" id="3"/>
-          <p:cNvSpPr txBox="true"/>
-          <p:nvPr/>
-        </p:nvSpPr>
-        <p:spPr>
-          <a:xfrm rot="0">
+          <p:cNvPr id="3" name="TextBox 3"/>
+          <p:cNvSpPr txBox="1"/>
+          <p:nvPr/>
+        </p:nvSpPr>
+        <p:spPr>
+          <a:xfrm>
             <a:off x="3402607" y="3100252"/>
             <a:ext cx="11482787" cy="3940840"/>
           </a:xfrm>
@@ -3150,7 +3147,7 @@
           </a:prstGeom>
         </p:spPr>
         <p:txBody>
-          <a:bodyPr anchor="t" rtlCol="false" tIns="0" lIns="0" bIns="0" rIns="0">
+          <a:bodyPr lIns="0" tIns="0" rIns="0" bIns="0" rtlCol="0" anchor="t">
             <a:spAutoFit/>
           </a:bodyPr>
           <a:lstStyle/>
@@ -3177,12 +3174,12 @@
       </p:sp>
       <p:sp>
         <p:nvSpPr>
-          <p:cNvPr name="Freeform 4" id="4"/>
+          <p:cNvPr id="4" name="Freeform 4"/>
           <p:cNvSpPr/>
           <p:nvPr/>
         </p:nvSpPr>
         <p:spPr>
-          <a:xfrm flipH="false" flipV="false" rot="0">
+          <a:xfrm>
             <a:off x="7570193" y="8939973"/>
             <a:ext cx="7315200" cy="3458095"/>
           </a:xfrm>
@@ -3191,9 +3188,9 @@
             <a:gdLst/>
             <a:ahLst/>
             <a:cxnLst/>
-            <a:rect r="r" b="b" t="t" l="l"/>
+            <a:rect l="l" t="t" r="r" b="b"/>
             <a:pathLst>
-              <a:path h="3458095" w="7315200">
+              <a:path w="7315200" h="3458095">
                 <a:moveTo>
                   <a:pt x="0" y="0"/>
                 </a:moveTo>
@@ -3214,8 +3211,60 @@
             </a:pathLst>
           </a:custGeom>
           <a:blipFill>
-            <a:blip r:embed="rId3">
+            <a:blip>
               <a:alphaModFix amt="37000"/>
+              <a:extLst>
+                <a:ext uri="{96DAC541-7B7A-43D3-8B79-37D633B846F1}">
+                  <asvg:svgBlip xmlns:asvg="http://schemas.microsoft.com/office/drawing/2016/SVG/main" r:embed="rId3"/>
+                </a:ext>
+              </a:extLst>
+            </a:blip>
+            <a:stretch>
+              <a:fillRect/>
+            </a:stretch>
+          </a:blipFill>
+        </p:spPr>
+      </p:sp>
+      <p:sp>
+        <p:nvSpPr>
+          <p:cNvPr id="5" name="Freeform 5"/>
+          <p:cNvSpPr/>
+          <p:nvPr/>
+        </p:nvSpPr>
+        <p:spPr>
+          <a:xfrm>
+            <a:off x="13966900" y="5423594"/>
+            <a:ext cx="6584800" cy="7103695"/>
+          </a:xfrm>
+          <a:custGeom>
+            <a:avLst/>
+            <a:gdLst/>
+            <a:ahLst/>
+            <a:cxnLst/>
+            <a:rect l="l" t="t" r="r" b="b"/>
+            <a:pathLst>
+              <a:path w="6584800" h="7103695">
+                <a:moveTo>
+                  <a:pt x="0" y="0"/>
+                </a:moveTo>
+                <a:lnTo>
+                  <a:pt x="6584800" y="0"/>
+                </a:lnTo>
+                <a:lnTo>
+                  <a:pt x="6584800" y="7103695"/>
+                </a:lnTo>
+                <a:lnTo>
+                  <a:pt x="0" y="7103695"/>
+                </a:lnTo>
+                <a:lnTo>
+                  <a:pt x="0" y="0"/>
+                </a:lnTo>
+                <a:close/>
+              </a:path>
+            </a:pathLst>
+          </a:custGeom>
+          <a:blipFill>
+            <a:blip>
               <a:extLst>
                 <a:ext uri="{96DAC541-7B7A-43D3-8B79-37D633B846F1}">
                   <asvg:svgBlip xmlns:asvg="http://schemas.microsoft.com/office/drawing/2016/SVG/main" r:embed="rId4"/>
@@ -3223,41 +3272,41 @@
               </a:extLst>
             </a:blip>
             <a:stretch>
-              <a:fillRect l="0" t="0" r="0" b="0"/>
+              <a:fillRect/>
             </a:stretch>
           </a:blipFill>
         </p:spPr>
       </p:sp>
       <p:sp>
         <p:nvSpPr>
-          <p:cNvPr name="Freeform 5" id="5"/>
+          <p:cNvPr id="6" name="Freeform 6"/>
           <p:cNvSpPr/>
           <p:nvPr/>
         </p:nvSpPr>
         <p:spPr>
-          <a:xfrm flipH="false" flipV="false" rot="0">
-            <a:off x="13966900" y="5423594"/>
-            <a:ext cx="6584800" cy="7103695"/>
+          <a:xfrm>
+            <a:off x="-122667" y="6554220"/>
+            <a:ext cx="5062953" cy="4114800"/>
           </a:xfrm>
           <a:custGeom>
             <a:avLst/>
             <a:gdLst/>
             <a:ahLst/>
             <a:cxnLst/>
-            <a:rect r="r" b="b" t="t" l="l"/>
+            <a:rect l="l" t="t" r="r" b="b"/>
             <a:pathLst>
-              <a:path h="7103695" w="6584800">
+              <a:path w="5062953" h="4114800">
                 <a:moveTo>
                   <a:pt x="0" y="0"/>
                 </a:moveTo>
                 <a:lnTo>
-                  <a:pt x="6584800" y="0"/>
-                </a:lnTo>
-                <a:lnTo>
-                  <a:pt x="6584800" y="7103695"/>
-                </a:lnTo>
-                <a:lnTo>
-                  <a:pt x="0" y="7103695"/>
+                  <a:pt x="5062953" y="0"/>
+                </a:lnTo>
+                <a:lnTo>
+                  <a:pt x="5062953" y="4114800"/>
+                </a:lnTo>
+                <a:lnTo>
+                  <a:pt x="0" y="4114800"/>
                 </a:lnTo>
                 <a:lnTo>
                   <a:pt x="0" y="0"/>
@@ -3267,49 +3316,49 @@
             </a:pathLst>
           </a:custGeom>
           <a:blipFill>
-            <a:blip r:embed="rId5">
+            <a:blip>
               <a:extLst>
                 <a:ext uri="{96DAC541-7B7A-43D3-8B79-37D633B846F1}">
-                  <asvg:svgBlip xmlns:asvg="http://schemas.microsoft.com/office/drawing/2016/SVG/main" r:embed="rId6"/>
+                  <asvg:svgBlip xmlns:asvg="http://schemas.microsoft.com/office/drawing/2016/SVG/main" r:embed="rId5"/>
                 </a:ext>
               </a:extLst>
             </a:blip>
             <a:stretch>
-              <a:fillRect l="0" t="0" r="0" b="0"/>
+              <a:fillRect/>
             </a:stretch>
           </a:blipFill>
         </p:spPr>
       </p:sp>
       <p:sp>
         <p:nvSpPr>
-          <p:cNvPr name="Freeform 6" id="6"/>
+          <p:cNvPr id="7" name="Freeform 7"/>
           <p:cNvSpPr/>
           <p:nvPr/>
         </p:nvSpPr>
         <p:spPr>
-          <a:xfrm flipH="false" flipV="false" rot="0">
-            <a:off x="-122667" y="6554220"/>
-            <a:ext cx="5062953" cy="4114800"/>
+          <a:xfrm rot="-3516996">
+            <a:off x="14320434" y="-2372404"/>
+            <a:ext cx="6669405" cy="8229600"/>
           </a:xfrm>
           <a:custGeom>
             <a:avLst/>
             <a:gdLst/>
             <a:ahLst/>
             <a:cxnLst/>
-            <a:rect r="r" b="b" t="t" l="l"/>
+            <a:rect l="l" t="t" r="r" b="b"/>
             <a:pathLst>
-              <a:path h="4114800" w="5062953">
+              <a:path w="6669405" h="8229600">
                 <a:moveTo>
                   <a:pt x="0" y="0"/>
                 </a:moveTo>
                 <a:lnTo>
-                  <a:pt x="5062953" y="0"/>
-                </a:lnTo>
-                <a:lnTo>
-                  <a:pt x="5062953" y="4114800"/>
-                </a:lnTo>
-                <a:lnTo>
-                  <a:pt x="0" y="4114800"/>
+                  <a:pt x="6669405" y="0"/>
+                </a:lnTo>
+                <a:lnTo>
+                  <a:pt x="6669405" y="8229600"/>
+                </a:lnTo>
+                <a:lnTo>
+                  <a:pt x="0" y="8229600"/>
                 </a:lnTo>
                 <a:lnTo>
                   <a:pt x="0" y="0"/>
@@ -3319,7 +3368,106 @@
             </a:pathLst>
           </a:custGeom>
           <a:blipFill>
-            <a:blip r:embed="rId7">
+            <a:blip r:embed="rId6"/>
+            <a:stretch>
+              <a:fillRect/>
+            </a:stretch>
+          </a:blipFill>
+        </p:spPr>
+      </p:sp>
+      <p:sp>
+        <p:nvSpPr>
+          <p:cNvPr id="8" name="Freeform 8"/>
+          <p:cNvSpPr/>
+          <p:nvPr/>
+        </p:nvSpPr>
+        <p:spPr>
+          <a:xfrm>
+            <a:off x="3234023" y="7277506"/>
+            <a:ext cx="4816697" cy="4114800"/>
+          </a:xfrm>
+          <a:custGeom>
+            <a:avLst/>
+            <a:gdLst/>
+            <a:ahLst/>
+            <a:cxnLst/>
+            <a:rect l="l" t="t" r="r" b="b"/>
+            <a:pathLst>
+              <a:path w="4816697" h="4114800">
+                <a:moveTo>
+                  <a:pt x="0" y="0"/>
+                </a:moveTo>
+                <a:lnTo>
+                  <a:pt x="4816697" y="0"/>
+                </a:lnTo>
+                <a:lnTo>
+                  <a:pt x="4816697" y="4114800"/>
+                </a:lnTo>
+                <a:lnTo>
+                  <a:pt x="0" y="4114800"/>
+                </a:lnTo>
+                <a:lnTo>
+                  <a:pt x="0" y="0"/>
+                </a:lnTo>
+                <a:close/>
+              </a:path>
+            </a:pathLst>
+          </a:custGeom>
+          <a:blipFill>
+            <a:blip>
+              <a:extLst>
+                <a:ext uri="{96DAC541-7B7A-43D3-8B79-37D633B846F1}">
+                  <asvg:svgBlip xmlns:asvg="http://schemas.microsoft.com/office/drawing/2016/SVG/main" r:embed="rId7"/>
+                </a:ext>
+              </a:extLst>
+            </a:blip>
+            <a:stretch>
+              <a:fillRect/>
+            </a:stretch>
+          </a:blipFill>
+        </p:spPr>
+      </p:sp>
+      <p:sp>
+        <p:nvSpPr>
+          <p:cNvPr id="9" name="Freeform 9"/>
+          <p:cNvSpPr/>
+          <p:nvPr/>
+        </p:nvSpPr>
+        <p:spPr>
+          <a:xfrm rot="6309934">
+            <a:off x="7417961" y="-2077549"/>
+            <a:ext cx="2687667" cy="4737875"/>
+          </a:xfrm>
+          <a:custGeom>
+            <a:avLst/>
+            <a:gdLst/>
+            <a:ahLst/>
+            <a:cxnLst/>
+            <a:rect l="l" t="t" r="r" b="b"/>
+            <a:pathLst>
+              <a:path w="2687667" h="4737875">
+                <a:moveTo>
+                  <a:pt x="0" y="0"/>
+                </a:moveTo>
+                <a:lnTo>
+                  <a:pt x="2687667" y="0"/>
+                </a:lnTo>
+                <a:lnTo>
+                  <a:pt x="2687667" y="4737875"/>
+                </a:lnTo>
+                <a:lnTo>
+                  <a:pt x="0" y="4737875"/>
+                </a:lnTo>
+                <a:lnTo>
+                  <a:pt x="0" y="0"/>
+                </a:lnTo>
+                <a:close/>
+              </a:path>
+            </a:pathLst>
+          </a:custGeom>
+          <a:blipFill>
+            <a:blip>
+              <a:alphaModFix amt="38000"/>
               <a:extLst>
                 <a:ext uri="{96DAC541-7B7A-43D3-8B79-37D633B846F1}">
                   <asvg:svgBlip xmlns:asvg="http://schemas.microsoft.com/office/drawing/2016/SVG/main" r:embed="rId8"/>
@@ -3327,41 +3475,41 @@
               </a:extLst>
             </a:blip>
             <a:stretch>
-              <a:fillRect l="0" t="0" r="0" b="0"/>
+              <a:fillRect/>
             </a:stretch>
           </a:blipFill>
         </p:spPr>
       </p:sp>
       <p:sp>
         <p:nvSpPr>
-          <p:cNvPr name="Freeform 7" id="7"/>
+          <p:cNvPr id="10" name="Freeform 10"/>
           <p:cNvSpPr/>
           <p:nvPr/>
         </p:nvSpPr>
         <p:spPr>
-          <a:xfrm flipH="false" flipV="false" rot="-3516996">
-            <a:off x="14320434" y="-2372404"/>
-            <a:ext cx="6669405" cy="8229600"/>
+          <a:xfrm>
+            <a:off x="-1591031" y="-1137320"/>
+            <a:ext cx="6774834" cy="3985579"/>
           </a:xfrm>
           <a:custGeom>
             <a:avLst/>
             <a:gdLst/>
             <a:ahLst/>
             <a:cxnLst/>
-            <a:rect r="r" b="b" t="t" l="l"/>
+            <a:rect l="l" t="t" r="r" b="b"/>
             <a:pathLst>
-              <a:path h="8229600" w="6669405">
+              <a:path w="6774834" h="3985579">
                 <a:moveTo>
                   <a:pt x="0" y="0"/>
                 </a:moveTo>
                 <a:lnTo>
-                  <a:pt x="6669405" y="0"/>
-                </a:lnTo>
-                <a:lnTo>
-                  <a:pt x="6669405" y="8229600"/>
-                </a:lnTo>
-                <a:lnTo>
-                  <a:pt x="0" y="8229600"/>
+                  <a:pt x="6774834" y="0"/>
+                </a:lnTo>
+                <a:lnTo>
+                  <a:pt x="6774834" y="3985579"/>
+                </a:lnTo>
+                <a:lnTo>
+                  <a:pt x="0" y="3985579"/>
                 </a:lnTo>
                 <a:lnTo>
                   <a:pt x="0" y="0"/>
@@ -3373,170 +3521,19 @@
           <a:blipFill>
             <a:blip r:embed="rId9"/>
             <a:stretch>
-              <a:fillRect l="0" t="0" r="0" b="0"/>
+              <a:fillRect/>
             </a:stretch>
           </a:blipFill>
         </p:spPr>
       </p:sp>
       <p:sp>
         <p:nvSpPr>
-          <p:cNvPr name="Freeform 8" id="8"/>
-          <p:cNvSpPr/>
-          <p:nvPr/>
-        </p:nvSpPr>
-        <p:spPr>
-          <a:xfrm flipH="false" flipV="false" rot="0">
-            <a:off x="3234023" y="7277506"/>
-            <a:ext cx="4816697" cy="4114800"/>
-          </a:xfrm>
-          <a:custGeom>
-            <a:avLst/>
-            <a:gdLst/>
-            <a:ahLst/>
-            <a:cxnLst/>
-            <a:rect r="r" b="b" t="t" l="l"/>
-            <a:pathLst>
-              <a:path h="4114800" w="4816697">
-                <a:moveTo>
-                  <a:pt x="0" y="0"/>
-                </a:moveTo>
-                <a:lnTo>
-                  <a:pt x="4816697" y="0"/>
-                </a:lnTo>
-                <a:lnTo>
-                  <a:pt x="4816697" y="4114800"/>
-                </a:lnTo>
-                <a:lnTo>
-                  <a:pt x="0" y="4114800"/>
-                </a:lnTo>
-                <a:lnTo>
-                  <a:pt x="0" y="0"/>
-                </a:lnTo>
-                <a:close/>
-              </a:path>
-            </a:pathLst>
-          </a:custGeom>
-          <a:blipFill>
-            <a:blip r:embed="rId10">
-              <a:extLst>
-                <a:ext uri="{96DAC541-7B7A-43D3-8B79-37D633B846F1}">
-                  <asvg:svgBlip xmlns:asvg="http://schemas.microsoft.com/office/drawing/2016/SVG/main" r:embed="rId11"/>
-                </a:ext>
-              </a:extLst>
-            </a:blip>
-            <a:stretch>
-              <a:fillRect l="0" t="0" r="0" b="0"/>
-            </a:stretch>
-          </a:blipFill>
-        </p:spPr>
-      </p:sp>
-      <p:sp>
-        <p:nvSpPr>
-          <p:cNvPr name="Freeform 9" id="9"/>
-          <p:cNvSpPr/>
-          <p:nvPr/>
-        </p:nvSpPr>
-        <p:spPr>
-          <a:xfrm flipH="false" flipV="false" rot="6309934">
-            <a:off x="7417961" y="-2077549"/>
-            <a:ext cx="2687667" cy="4737875"/>
-          </a:xfrm>
-          <a:custGeom>
-            <a:avLst/>
-            <a:gdLst/>
-            <a:ahLst/>
-            <a:cxnLst/>
-            <a:rect r="r" b="b" t="t" l="l"/>
-            <a:pathLst>
-              <a:path h="4737875" w="2687667">
-                <a:moveTo>
-                  <a:pt x="0" y="0"/>
-                </a:moveTo>
-                <a:lnTo>
-                  <a:pt x="2687667" y="0"/>
-                </a:lnTo>
-                <a:lnTo>
-                  <a:pt x="2687667" y="4737875"/>
-                </a:lnTo>
-                <a:lnTo>
-                  <a:pt x="0" y="4737875"/>
-                </a:lnTo>
-                <a:lnTo>
-                  <a:pt x="0" y="0"/>
-                </a:lnTo>
-                <a:close/>
-              </a:path>
-            </a:pathLst>
-          </a:custGeom>
-          <a:blipFill>
-            <a:blip r:embed="rId12">
-              <a:alphaModFix amt="38000"/>
-              <a:extLst>
-                <a:ext uri="{96DAC541-7B7A-43D3-8B79-37D633B846F1}">
-                  <asvg:svgBlip xmlns:asvg="http://schemas.microsoft.com/office/drawing/2016/SVG/main" r:embed="rId13"/>
-                </a:ext>
-              </a:extLst>
-            </a:blip>
-            <a:stretch>
-              <a:fillRect l="0" t="0" r="0" b="0"/>
-            </a:stretch>
-          </a:blipFill>
-        </p:spPr>
-      </p:sp>
-      <p:sp>
-        <p:nvSpPr>
-          <p:cNvPr name="Freeform 10" id="10"/>
-          <p:cNvSpPr/>
-          <p:nvPr/>
-        </p:nvSpPr>
-        <p:spPr>
-          <a:xfrm flipH="false" flipV="false" rot="0">
-            <a:off x="-1591031" y="-1137320"/>
-            <a:ext cx="6774834" cy="3985579"/>
-          </a:xfrm>
-          <a:custGeom>
-            <a:avLst/>
-            <a:gdLst/>
-            <a:ahLst/>
-            <a:cxnLst/>
-            <a:rect r="r" b="b" t="t" l="l"/>
-            <a:pathLst>
-              <a:path h="3985579" w="6774834">
-                <a:moveTo>
-                  <a:pt x="0" y="0"/>
-                </a:moveTo>
-                <a:lnTo>
-                  <a:pt x="6774834" y="0"/>
-                </a:lnTo>
-                <a:lnTo>
-                  <a:pt x="6774834" y="3985579"/>
-                </a:lnTo>
-                <a:lnTo>
-                  <a:pt x="0" y="3985579"/>
-                </a:lnTo>
-                <a:lnTo>
-                  <a:pt x="0" y="0"/>
-                </a:lnTo>
-                <a:close/>
-              </a:path>
-            </a:pathLst>
-          </a:custGeom>
-          <a:blipFill>
-            <a:blip r:embed="rId14"/>
-            <a:stretch>
-              <a:fillRect l="0" t="0" r="0" b="0"/>
-            </a:stretch>
-          </a:blipFill>
-        </p:spPr>
-      </p:sp>
-      <p:sp>
-        <p:nvSpPr>
-          <p:cNvPr name="TextBox 11" id="11"/>
-          <p:cNvSpPr txBox="true"/>
-          <p:nvPr/>
-        </p:nvSpPr>
-        <p:spPr>
-          <a:xfrm rot="0">
+          <p:cNvPr id="11" name="TextBox 11"/>
+          <p:cNvSpPr txBox="1"/>
+          <p:nvPr/>
+        </p:nvSpPr>
+        <p:spPr>
+          <a:xfrm>
             <a:off x="4729301" y="6791855"/>
             <a:ext cx="8829398" cy="1380477"/>
           </a:xfrm>
@@ -3545,7 +3542,7 @@
           </a:prstGeom>
         </p:spPr>
         <p:txBody>
-          <a:bodyPr anchor="t" rtlCol="false" tIns="0" lIns="0" bIns="0" rIns="0">
+          <a:bodyPr lIns="0" tIns="0" rIns="0" bIns="0" rtlCol="0" anchor="t">
             <a:spAutoFit/>
           </a:bodyPr>
           <a:lstStyle/>
@@ -3598,13 +3595,14 @@
 </file>
 
 <file path=ppt/slides/slide2.xml><?xml version="1.0" encoding="utf-8"?>
-<p:sld xmlns:p="http://schemas.openxmlformats.org/presentationml/2006/main" xmlns:a="http://schemas.openxmlformats.org/drawingml/2006/main" xmlns:r="http://schemas.openxmlformats.org/officeDocument/2006/relationships">
+<p:sld xmlns:a="http://schemas.openxmlformats.org/drawingml/2006/main" xmlns:r="http://schemas.openxmlformats.org/officeDocument/2006/relationships" xmlns:p="http://schemas.openxmlformats.org/presentationml/2006/main">
   <p:cSld>
     <p:bg>
       <p:bgPr>
         <a:solidFill>
           <a:srgbClr val="FEF6F3"/>
         </a:solidFill>
+        <a:effectLst/>
       </p:bgPr>
     </p:bg>
     <p:spTree>
@@ -3623,12 +3621,12 @@
       </p:grpSpPr>
       <p:sp>
         <p:nvSpPr>
-          <p:cNvPr name="TextBox 2" id="2"/>
-          <p:cNvSpPr txBox="true"/>
-          <p:nvPr/>
-        </p:nvSpPr>
-        <p:spPr>
-          <a:xfrm rot="0">
+          <p:cNvPr id="2" name="TextBox 2"/>
+          <p:cNvSpPr txBox="1"/>
+          <p:nvPr/>
+        </p:nvSpPr>
+        <p:spPr>
+          <a:xfrm>
             <a:off x="5871030" y="1484223"/>
             <a:ext cx="6545941" cy="895324"/>
           </a:xfrm>
@@ -3637,7 +3635,7 @@
           </a:prstGeom>
         </p:spPr>
         <p:txBody>
-          <a:bodyPr anchor="t" rtlCol="false" tIns="0" lIns="0" bIns="0" rIns="0">
+          <a:bodyPr lIns="0" tIns="0" rIns="0" bIns="0" rtlCol="0" anchor="t">
             <a:spAutoFit/>
           </a:bodyPr>
           <a:lstStyle/>
@@ -3664,12 +3662,12 @@
       </p:sp>
       <p:sp>
         <p:nvSpPr>
-          <p:cNvPr name="Freeform 3" id="3"/>
+          <p:cNvPr id="3" name="Freeform 3"/>
           <p:cNvSpPr/>
           <p:nvPr/>
         </p:nvSpPr>
         <p:spPr>
-          <a:xfrm flipH="false" flipV="false" rot="0">
+          <a:xfrm>
             <a:off x="-1591031" y="5423594"/>
             <a:ext cx="4096029" cy="5968712"/>
           </a:xfrm>
@@ -3678,9 +3676,9 @@
             <a:gdLst/>
             <a:ahLst/>
             <a:cxnLst/>
-            <a:rect r="r" b="b" t="t" l="l"/>
+            <a:rect l="l" t="t" r="r" b="b"/>
             <a:pathLst>
-              <a:path h="5968712" w="4096029">
+              <a:path w="4096029" h="5968712">
                 <a:moveTo>
                   <a:pt x="0" y="0"/>
                 </a:moveTo>
@@ -3703,19 +3701,19 @@
           <a:blipFill>
             <a:blip r:embed="rId2"/>
             <a:stretch>
-              <a:fillRect l="0" t="0" r="0" b="0"/>
+              <a:fillRect/>
             </a:stretch>
           </a:blipFill>
         </p:spPr>
       </p:sp>
       <p:sp>
         <p:nvSpPr>
-          <p:cNvPr name="Freeform 4" id="4"/>
+          <p:cNvPr id="4" name="Freeform 4"/>
           <p:cNvSpPr/>
           <p:nvPr/>
         </p:nvSpPr>
         <p:spPr>
-          <a:xfrm flipH="false" flipV="false" rot="0">
+          <a:xfrm>
             <a:off x="-122667" y="8153273"/>
             <a:ext cx="3095439" cy="2515748"/>
           </a:xfrm>
@@ -3724,9 +3722,9 @@
             <a:gdLst/>
             <a:ahLst/>
             <a:cxnLst/>
-            <a:rect r="r" b="b" t="t" l="l"/>
+            <a:rect l="l" t="t" r="r" b="b"/>
             <a:pathLst>
-              <a:path h="2515748" w="3095439">
+              <a:path w="3095439" h="2515748">
                 <a:moveTo>
                   <a:pt x="0" y="0"/>
                 </a:moveTo>
@@ -3747,7 +3745,59 @@
             </a:pathLst>
           </a:custGeom>
           <a:blipFill>
-            <a:blip r:embed="rId3">
+            <a:blip>
+              <a:extLst>
+                <a:ext uri="{96DAC541-7B7A-43D3-8B79-37D633B846F1}">
+                  <asvg:svgBlip xmlns:asvg="http://schemas.microsoft.com/office/drawing/2016/SVG/main" r:embed="rId3"/>
+                </a:ext>
+              </a:extLst>
+            </a:blip>
+            <a:stretch>
+              <a:fillRect/>
+            </a:stretch>
+          </a:blipFill>
+        </p:spPr>
+      </p:sp>
+      <p:sp>
+        <p:nvSpPr>
+          <p:cNvPr id="5" name="Freeform 5"/>
+          <p:cNvSpPr/>
+          <p:nvPr/>
+        </p:nvSpPr>
+        <p:spPr>
+          <a:xfrm>
+            <a:off x="13815563" y="5647976"/>
+            <a:ext cx="6085715" cy="5198895"/>
+          </a:xfrm>
+          <a:custGeom>
+            <a:avLst/>
+            <a:gdLst/>
+            <a:ahLst/>
+            <a:cxnLst/>
+            <a:rect l="l" t="t" r="r" b="b"/>
+            <a:pathLst>
+              <a:path w="6085715" h="5198895">
+                <a:moveTo>
+                  <a:pt x="0" y="0"/>
+                </a:moveTo>
+                <a:lnTo>
+                  <a:pt x="6085715" y="0"/>
+                </a:lnTo>
+                <a:lnTo>
+                  <a:pt x="6085715" y="5198894"/>
+                </a:lnTo>
+                <a:lnTo>
+                  <a:pt x="0" y="5198894"/>
+                </a:lnTo>
+                <a:lnTo>
+                  <a:pt x="0" y="0"/>
+                </a:lnTo>
+                <a:close/>
+              </a:path>
+            </a:pathLst>
+          </a:custGeom>
+          <a:blipFill>
+            <a:blip>
               <a:extLst>
                 <a:ext uri="{96DAC541-7B7A-43D3-8B79-37D633B846F1}">
                   <asvg:svgBlip xmlns:asvg="http://schemas.microsoft.com/office/drawing/2016/SVG/main" r:embed="rId4"/>
@@ -3755,41 +3805,41 @@
               </a:extLst>
             </a:blip>
             <a:stretch>
-              <a:fillRect l="0" t="0" r="0" b="0"/>
+              <a:fillRect/>
             </a:stretch>
           </a:blipFill>
         </p:spPr>
       </p:sp>
       <p:sp>
         <p:nvSpPr>
-          <p:cNvPr name="Freeform 5" id="5"/>
+          <p:cNvPr id="6" name="Freeform 6"/>
           <p:cNvSpPr/>
           <p:nvPr/>
         </p:nvSpPr>
         <p:spPr>
-          <a:xfrm flipH="false" flipV="false" rot="0">
-            <a:off x="13815563" y="5647976"/>
-            <a:ext cx="6085715" cy="5198895"/>
+          <a:xfrm>
+            <a:off x="8417238" y="8579079"/>
+            <a:ext cx="8842062" cy="4179884"/>
           </a:xfrm>
           <a:custGeom>
             <a:avLst/>
             <a:gdLst/>
             <a:ahLst/>
             <a:cxnLst/>
-            <a:rect r="r" b="b" t="t" l="l"/>
+            <a:rect l="l" t="t" r="r" b="b"/>
             <a:pathLst>
-              <a:path h="5198895" w="6085715">
+              <a:path w="8842062" h="4179884">
                 <a:moveTo>
                   <a:pt x="0" y="0"/>
                 </a:moveTo>
                 <a:lnTo>
-                  <a:pt x="6085715" y="0"/>
-                </a:lnTo>
-                <a:lnTo>
-                  <a:pt x="6085715" y="5198894"/>
-                </a:lnTo>
-                <a:lnTo>
-                  <a:pt x="0" y="5198894"/>
+                  <a:pt x="8842062" y="0"/>
+                </a:lnTo>
+                <a:lnTo>
+                  <a:pt x="8842062" y="4179883"/>
+                </a:lnTo>
+                <a:lnTo>
+                  <a:pt x="0" y="4179883"/>
                 </a:lnTo>
                 <a:lnTo>
                   <a:pt x="0" y="0"/>
@@ -3799,7 +3849,60 @@
             </a:pathLst>
           </a:custGeom>
           <a:blipFill>
-            <a:blip r:embed="rId5">
+            <a:blip>
+              <a:extLst>
+                <a:ext uri="{96DAC541-7B7A-43D3-8B79-37D633B846F1}">
+                  <asvg:svgBlip xmlns:asvg="http://schemas.microsoft.com/office/drawing/2016/SVG/main" r:embed="rId5"/>
+                </a:ext>
+              </a:extLst>
+            </a:blip>
+            <a:stretch>
+              <a:fillRect/>
+            </a:stretch>
+          </a:blipFill>
+        </p:spPr>
+      </p:sp>
+      <p:sp>
+        <p:nvSpPr>
+          <p:cNvPr id="7" name="Freeform 7"/>
+          <p:cNvSpPr/>
+          <p:nvPr/>
+        </p:nvSpPr>
+        <p:spPr>
+          <a:xfrm rot="6309934">
+            <a:off x="4472616" y="6610800"/>
+            <a:ext cx="2444779" cy="4309706"/>
+          </a:xfrm>
+          <a:custGeom>
+            <a:avLst/>
+            <a:gdLst/>
+            <a:ahLst/>
+            <a:cxnLst/>
+            <a:rect l="l" t="t" r="r" b="b"/>
+            <a:pathLst>
+              <a:path w="2444779" h="4309706">
+                <a:moveTo>
+                  <a:pt x="0" y="0"/>
+                </a:moveTo>
+                <a:lnTo>
+                  <a:pt x="2444779" y="0"/>
+                </a:lnTo>
+                <a:lnTo>
+                  <a:pt x="2444779" y="4309707"/>
+                </a:lnTo>
+                <a:lnTo>
+                  <a:pt x="0" y="4309707"/>
+                </a:lnTo>
+                <a:lnTo>
+                  <a:pt x="0" y="0"/>
+                </a:lnTo>
+                <a:close/>
+              </a:path>
+            </a:pathLst>
+          </a:custGeom>
+          <a:blipFill>
+            <a:blip>
+              <a:alphaModFix amt="38000"/>
               <a:extLst>
                 <a:ext uri="{96DAC541-7B7A-43D3-8B79-37D633B846F1}">
                   <asvg:svgBlip xmlns:asvg="http://schemas.microsoft.com/office/drawing/2016/SVG/main" r:embed="rId6"/>
@@ -3807,41 +3910,41 @@
               </a:extLst>
             </a:blip>
             <a:stretch>
-              <a:fillRect l="0" t="0" r="0" b="0"/>
+              <a:fillRect/>
             </a:stretch>
           </a:blipFill>
         </p:spPr>
       </p:sp>
       <p:sp>
         <p:nvSpPr>
-          <p:cNvPr name="Freeform 6" id="6"/>
+          <p:cNvPr id="8" name="Freeform 8"/>
           <p:cNvSpPr/>
           <p:nvPr/>
         </p:nvSpPr>
         <p:spPr>
-          <a:xfrm flipH="false" flipV="false" rot="0">
-            <a:off x="8417238" y="8579079"/>
-            <a:ext cx="8842062" cy="4179884"/>
+          <a:xfrm>
+            <a:off x="-1591031" y="-1137320"/>
+            <a:ext cx="6774834" cy="3985579"/>
           </a:xfrm>
           <a:custGeom>
             <a:avLst/>
             <a:gdLst/>
             <a:ahLst/>
             <a:cxnLst/>
-            <a:rect r="r" b="b" t="t" l="l"/>
+            <a:rect l="l" t="t" r="r" b="b"/>
             <a:pathLst>
-              <a:path h="4179884" w="8842062">
+              <a:path w="6774834" h="3985579">
                 <a:moveTo>
                   <a:pt x="0" y="0"/>
                 </a:moveTo>
                 <a:lnTo>
-                  <a:pt x="8842062" y="0"/>
-                </a:lnTo>
-                <a:lnTo>
-                  <a:pt x="8842062" y="4179883"/>
-                </a:lnTo>
-                <a:lnTo>
-                  <a:pt x="0" y="4179883"/>
+                  <a:pt x="6774834" y="0"/>
+                </a:lnTo>
+                <a:lnTo>
+                  <a:pt x="6774834" y="3985579"/>
+                </a:lnTo>
+                <a:lnTo>
+                  <a:pt x="0" y="3985579"/>
                 </a:lnTo>
                 <a:lnTo>
                   <a:pt x="0" y="0"/>
@@ -3851,7 +3954,53 @@
             </a:pathLst>
           </a:custGeom>
           <a:blipFill>
-            <a:blip r:embed="rId7">
+            <a:blip r:embed="rId7"/>
+            <a:stretch>
+              <a:fillRect/>
+            </a:stretch>
+          </a:blipFill>
+        </p:spPr>
+      </p:sp>
+      <p:sp>
+        <p:nvSpPr>
+          <p:cNvPr id="9" name="Freeform 9"/>
+          <p:cNvSpPr/>
+          <p:nvPr/>
+        </p:nvSpPr>
+        <p:spPr>
+          <a:xfrm rot="-2157287">
+            <a:off x="15856494" y="-206848"/>
+            <a:ext cx="6584800" cy="7103695"/>
+          </a:xfrm>
+          <a:custGeom>
+            <a:avLst/>
+            <a:gdLst/>
+            <a:ahLst/>
+            <a:cxnLst/>
+            <a:rect l="l" t="t" r="r" b="b"/>
+            <a:pathLst>
+              <a:path w="6584800" h="7103695">
+                <a:moveTo>
+                  <a:pt x="0" y="0"/>
+                </a:moveTo>
+                <a:lnTo>
+                  <a:pt x="6584800" y="0"/>
+                </a:lnTo>
+                <a:lnTo>
+                  <a:pt x="6584800" y="7103695"/>
+                </a:lnTo>
+                <a:lnTo>
+                  <a:pt x="0" y="7103695"/>
+                </a:lnTo>
+                <a:lnTo>
+                  <a:pt x="0" y="0"/>
+                </a:lnTo>
+                <a:close/>
+              </a:path>
+            </a:pathLst>
+          </a:custGeom>
+          <a:blipFill>
+            <a:blip>
               <a:extLst>
                 <a:ext uri="{96DAC541-7B7A-43D3-8B79-37D633B846F1}">
                   <asvg:svgBlip xmlns:asvg="http://schemas.microsoft.com/office/drawing/2016/SVG/main" r:embed="rId8"/>
@@ -3859,20 +4008,20 @@
               </a:extLst>
             </a:blip>
             <a:stretch>
-              <a:fillRect l="0" t="0" r="0" b="0"/>
+              <a:fillRect/>
             </a:stretch>
           </a:blipFill>
         </p:spPr>
       </p:sp>
       <p:sp>
         <p:nvSpPr>
-          <p:cNvPr name="Freeform 7" id="7"/>
+          <p:cNvPr id="10" name="Freeform 10"/>
           <p:cNvSpPr/>
           <p:nvPr/>
         </p:nvSpPr>
         <p:spPr>
-          <a:xfrm flipH="false" flipV="false" rot="6309934">
-            <a:off x="4472616" y="6610800"/>
+          <a:xfrm rot="-3055627">
+            <a:off x="12099560" y="-984956"/>
             <a:ext cx="2444779" cy="4309706"/>
           </a:xfrm>
           <a:custGeom>
@@ -3880,9 +4029,9 @@
             <a:gdLst/>
             <a:ahLst/>
             <a:cxnLst/>
-            <a:rect r="r" b="b" t="t" l="l"/>
+            <a:rect l="l" t="t" r="r" b="b"/>
             <a:pathLst>
-              <a:path h="4309706" w="2444779">
+              <a:path w="2444779" h="4309706">
                 <a:moveTo>
                   <a:pt x="0" y="0"/>
                 </a:moveTo>
@@ -3903,179 +4052,28 @@
             </a:pathLst>
           </a:custGeom>
           <a:blipFill>
-            <a:blip r:embed="rId9">
+            <a:blip>
               <a:alphaModFix amt="38000"/>
               <a:extLst>
                 <a:ext uri="{96DAC541-7B7A-43D3-8B79-37D633B846F1}">
-                  <asvg:svgBlip xmlns:asvg="http://schemas.microsoft.com/office/drawing/2016/SVG/main" r:embed="rId10"/>
+                  <asvg:svgBlip xmlns:asvg="http://schemas.microsoft.com/office/drawing/2016/SVG/main" r:embed="rId6"/>
                 </a:ext>
               </a:extLst>
             </a:blip>
             <a:stretch>
-              <a:fillRect l="0" t="0" r="0" b="0"/>
+              <a:fillRect/>
             </a:stretch>
           </a:blipFill>
         </p:spPr>
       </p:sp>
-      <p:sp>
-        <p:nvSpPr>
-          <p:cNvPr name="Freeform 8" id="8"/>
-          <p:cNvSpPr/>
-          <p:nvPr/>
-        </p:nvSpPr>
-        <p:spPr>
-          <a:xfrm flipH="false" flipV="false" rot="0">
-            <a:off x="-1591031" y="-1137320"/>
-            <a:ext cx="6774834" cy="3985579"/>
-          </a:xfrm>
-          <a:custGeom>
-            <a:avLst/>
-            <a:gdLst/>
-            <a:ahLst/>
-            <a:cxnLst/>
-            <a:rect r="r" b="b" t="t" l="l"/>
-            <a:pathLst>
-              <a:path h="3985579" w="6774834">
-                <a:moveTo>
-                  <a:pt x="0" y="0"/>
-                </a:moveTo>
-                <a:lnTo>
-                  <a:pt x="6774834" y="0"/>
-                </a:lnTo>
-                <a:lnTo>
-                  <a:pt x="6774834" y="3985579"/>
-                </a:lnTo>
-                <a:lnTo>
-                  <a:pt x="0" y="3985579"/>
-                </a:lnTo>
-                <a:lnTo>
-                  <a:pt x="0" y="0"/>
-                </a:lnTo>
-                <a:close/>
-              </a:path>
-            </a:pathLst>
-          </a:custGeom>
-          <a:blipFill>
-            <a:blip r:embed="rId11"/>
-            <a:stretch>
-              <a:fillRect l="0" t="0" r="0" b="0"/>
-            </a:stretch>
-          </a:blipFill>
-        </p:spPr>
-      </p:sp>
-      <p:sp>
-        <p:nvSpPr>
-          <p:cNvPr name="Freeform 9" id="9"/>
-          <p:cNvSpPr/>
-          <p:nvPr/>
-        </p:nvSpPr>
-        <p:spPr>
-          <a:xfrm flipH="false" flipV="false" rot="-2157287">
-            <a:off x="15856494" y="-206848"/>
-            <a:ext cx="6584800" cy="7103695"/>
-          </a:xfrm>
-          <a:custGeom>
-            <a:avLst/>
-            <a:gdLst/>
-            <a:ahLst/>
-            <a:cxnLst/>
-            <a:rect r="r" b="b" t="t" l="l"/>
-            <a:pathLst>
-              <a:path h="7103695" w="6584800">
-                <a:moveTo>
-                  <a:pt x="0" y="0"/>
-                </a:moveTo>
-                <a:lnTo>
-                  <a:pt x="6584800" y="0"/>
-                </a:lnTo>
-                <a:lnTo>
-                  <a:pt x="6584800" y="7103695"/>
-                </a:lnTo>
-                <a:lnTo>
-                  <a:pt x="0" y="7103695"/>
-                </a:lnTo>
-                <a:lnTo>
-                  <a:pt x="0" y="0"/>
-                </a:lnTo>
-                <a:close/>
-              </a:path>
-            </a:pathLst>
-          </a:custGeom>
-          <a:blipFill>
-            <a:blip r:embed="rId12">
-              <a:extLst>
-                <a:ext uri="{96DAC541-7B7A-43D3-8B79-37D633B846F1}">
-                  <asvg:svgBlip xmlns:asvg="http://schemas.microsoft.com/office/drawing/2016/SVG/main" r:embed="rId13"/>
-                </a:ext>
-              </a:extLst>
-            </a:blip>
-            <a:stretch>
-              <a:fillRect l="0" t="0" r="0" b="0"/>
-            </a:stretch>
-          </a:blipFill>
-        </p:spPr>
-      </p:sp>
-      <p:sp>
-        <p:nvSpPr>
-          <p:cNvPr name="Freeform 10" id="10"/>
-          <p:cNvSpPr/>
-          <p:nvPr/>
-        </p:nvSpPr>
-        <p:spPr>
-          <a:xfrm flipH="false" flipV="false" rot="-3055627">
-            <a:off x="12099560" y="-984956"/>
-            <a:ext cx="2444779" cy="4309706"/>
-          </a:xfrm>
-          <a:custGeom>
-            <a:avLst/>
-            <a:gdLst/>
-            <a:ahLst/>
-            <a:cxnLst/>
-            <a:rect r="r" b="b" t="t" l="l"/>
-            <a:pathLst>
-              <a:path h="4309706" w="2444779">
-                <a:moveTo>
-                  <a:pt x="0" y="0"/>
-                </a:moveTo>
-                <a:lnTo>
-                  <a:pt x="2444779" y="0"/>
-                </a:lnTo>
-                <a:lnTo>
-                  <a:pt x="2444779" y="4309707"/>
-                </a:lnTo>
-                <a:lnTo>
-                  <a:pt x="0" y="4309707"/>
-                </a:lnTo>
-                <a:lnTo>
-                  <a:pt x="0" y="0"/>
-                </a:lnTo>
-                <a:close/>
-              </a:path>
-            </a:pathLst>
-          </a:custGeom>
-          <a:blipFill>
-            <a:blip r:embed="rId9">
-              <a:alphaModFix amt="38000"/>
-              <a:extLst>
-                <a:ext uri="{96DAC541-7B7A-43D3-8B79-37D633B846F1}">
-                  <asvg:svgBlip xmlns:asvg="http://schemas.microsoft.com/office/drawing/2016/SVG/main" r:embed="rId10"/>
-                </a:ext>
-              </a:extLst>
-            </a:blip>
-            <a:stretch>
-              <a:fillRect l="0" t="0" r="0" b="0"/>
-            </a:stretch>
-          </a:blipFill>
-        </p:spPr>
-      </p:sp>
       <p:grpSp>
         <p:nvGrpSpPr>
-          <p:cNvPr name="Group 11" id="11"/>
+          <p:cNvPr id="11" name="Group 11"/>
           <p:cNvGrpSpPr/>
           <p:nvPr/>
         </p:nvGrpSpPr>
         <p:grpSpPr>
-          <a:xfrm rot="0">
+          <a:xfrm>
             <a:off x="3281798" y="2992509"/>
             <a:ext cx="11724404" cy="4301983"/>
             <a:chOff x="0" y="0"/>
@@ -4084,12 +4082,12 @@
         </p:grpSpPr>
         <p:sp>
           <p:nvSpPr>
-            <p:cNvPr name="TextBox 12" id="12"/>
-            <p:cNvSpPr txBox="true"/>
+            <p:cNvPr id="12" name="TextBox 12"/>
+            <p:cNvSpPr txBox="1"/>
             <p:nvPr/>
           </p:nvSpPr>
           <p:spPr>
-            <a:xfrm rot="0">
+            <a:xfrm>
               <a:off x="0" y="1898041"/>
               <a:ext cx="15632538" cy="1798318"/>
             </a:xfrm>
@@ -4098,7 +4096,7 @@
             </a:prstGeom>
           </p:spPr>
           <p:txBody>
-            <a:bodyPr anchor="t" rtlCol="false" tIns="0" lIns="0" bIns="0" rIns="0">
+            <a:bodyPr lIns="0" tIns="0" rIns="0" bIns="0" rtlCol="0" anchor="t">
               <a:spAutoFit/>
             </a:bodyPr>
             <a:lstStyle/>
@@ -4125,12 +4123,12 @@
         </p:sp>
         <p:sp>
           <p:nvSpPr>
-            <p:cNvPr name="TextBox 13" id="13"/>
-            <p:cNvSpPr txBox="true"/>
+            <p:cNvPr id="13" name="TextBox 13"/>
+            <p:cNvSpPr txBox="1"/>
             <p:nvPr/>
           </p:nvSpPr>
           <p:spPr>
-            <a:xfrm rot="0">
+            <a:xfrm>
               <a:off x="0" y="-152400"/>
               <a:ext cx="15632538" cy="1806209"/>
             </a:xfrm>
@@ -4139,7 +4137,7 @@
             </a:prstGeom>
           </p:spPr>
           <p:txBody>
-            <a:bodyPr anchor="t" rtlCol="false" tIns="0" lIns="0" bIns="0" rIns="0">
+            <a:bodyPr lIns="0" tIns="0" rIns="0" bIns="0" rtlCol="0" anchor="t">
               <a:spAutoFit/>
             </a:bodyPr>
             <a:lstStyle/>
@@ -4166,12 +4164,12 @@
         </p:sp>
         <p:sp>
           <p:nvSpPr>
-            <p:cNvPr name="TextBox 14" id="14"/>
-            <p:cNvSpPr txBox="true"/>
+            <p:cNvPr id="14" name="TextBox 14"/>
+            <p:cNvSpPr txBox="1"/>
             <p:nvPr/>
           </p:nvSpPr>
           <p:spPr>
-            <a:xfrm rot="0">
+            <a:xfrm>
               <a:off x="0" y="3937659"/>
               <a:ext cx="15632538" cy="1798318"/>
             </a:xfrm>
@@ -4180,7 +4178,7 @@
             </a:prstGeom>
           </p:spPr>
           <p:txBody>
-            <a:bodyPr anchor="t" rtlCol="false" tIns="0" lIns="0" bIns="0" rIns="0">
+            <a:bodyPr lIns="0" tIns="0" rIns="0" bIns="0" rtlCol="0" anchor="t">
               <a:spAutoFit/>
             </a:bodyPr>
             <a:lstStyle/>
@@ -4215,13 +4213,14 @@
 </file>
 
 <file path=ppt/slides/slide3.xml><?xml version="1.0" encoding="utf-8"?>
-<p:sld xmlns:p="http://schemas.openxmlformats.org/presentationml/2006/main" xmlns:a="http://schemas.openxmlformats.org/drawingml/2006/main" xmlns:r="http://schemas.openxmlformats.org/officeDocument/2006/relationships">
+<p:sld xmlns:a="http://schemas.openxmlformats.org/drawingml/2006/main" xmlns:r="http://schemas.openxmlformats.org/officeDocument/2006/relationships" xmlns:p="http://schemas.openxmlformats.org/presentationml/2006/main">
   <p:cSld>
     <p:bg>
       <p:bgPr>
         <a:solidFill>
           <a:srgbClr val="FEF6F3"/>
         </a:solidFill>
+        <a:effectLst/>
       </p:bgPr>
     </p:bg>
     <p:spTree>
@@ -4240,12 +4239,12 @@
       </p:grpSpPr>
       <p:sp>
         <p:nvSpPr>
-          <p:cNvPr name="TextBox 2" id="2"/>
-          <p:cNvSpPr txBox="true"/>
-          <p:nvPr/>
-        </p:nvSpPr>
-        <p:spPr>
-          <a:xfrm rot="0">
+          <p:cNvPr id="2" name="TextBox 2"/>
+          <p:cNvSpPr txBox="1"/>
+          <p:nvPr/>
+        </p:nvSpPr>
+        <p:spPr>
+          <a:xfrm>
             <a:off x="5871030" y="1175559"/>
             <a:ext cx="6545941" cy="895324"/>
           </a:xfrm>
@@ -4254,7 +4253,7 @@
           </a:prstGeom>
         </p:spPr>
         <p:txBody>
-          <a:bodyPr anchor="t" rtlCol="false" tIns="0" lIns="0" bIns="0" rIns="0">
+          <a:bodyPr lIns="0" tIns="0" rIns="0" bIns="0" rtlCol="0" anchor="t">
             <a:spAutoFit/>
           </a:bodyPr>
           <a:lstStyle/>
@@ -4281,12 +4280,12 @@
       </p:sp>
       <p:sp>
         <p:nvSpPr>
-          <p:cNvPr name="Freeform 3" id="3"/>
+          <p:cNvPr id="3" name="Freeform 3"/>
           <p:cNvSpPr/>
           <p:nvPr/>
         </p:nvSpPr>
         <p:spPr>
-          <a:xfrm flipH="false" flipV="false" rot="-1850127">
+          <a:xfrm rot="-1850127">
             <a:off x="16079385" y="1551784"/>
             <a:ext cx="4096029" cy="5968712"/>
           </a:xfrm>
@@ -4295,9 +4294,9 @@
             <a:gdLst/>
             <a:ahLst/>
             <a:cxnLst/>
-            <a:rect r="r" b="b" t="t" l="l"/>
+            <a:rect l="l" t="t" r="r" b="b"/>
             <a:pathLst>
-              <a:path h="5968712" w="4096029">
+              <a:path w="4096029" h="5968712">
                 <a:moveTo>
                   <a:pt x="0" y="0"/>
                 </a:moveTo>
@@ -4320,19 +4319,19 @@
           <a:blipFill>
             <a:blip r:embed="rId2"/>
             <a:stretch>
-              <a:fillRect l="0" t="0" r="0" b="0"/>
+              <a:fillRect/>
             </a:stretch>
           </a:blipFill>
         </p:spPr>
       </p:sp>
       <p:sp>
         <p:nvSpPr>
-          <p:cNvPr name="Freeform 4" id="4"/>
+          <p:cNvPr id="4" name="Freeform 4"/>
           <p:cNvSpPr/>
           <p:nvPr/>
         </p:nvSpPr>
         <p:spPr>
-          <a:xfrm flipH="false" flipV="false" rot="0">
+          <a:xfrm>
             <a:off x="-3147057" y="-920044"/>
             <a:ext cx="8842062" cy="4179884"/>
           </a:xfrm>
@@ -4341,9 +4340,9 @@
             <a:gdLst/>
             <a:ahLst/>
             <a:cxnLst/>
-            <a:rect r="r" b="b" t="t" l="l"/>
+            <a:rect l="l" t="t" r="r" b="b"/>
             <a:pathLst>
-              <a:path h="4179884" w="8842062">
+              <a:path w="8842062" h="4179884">
                 <a:moveTo>
                   <a:pt x="0" y="0"/>
                 </a:moveTo>
@@ -4364,7 +4363,60 @@
             </a:pathLst>
           </a:custGeom>
           <a:blipFill>
-            <a:blip r:embed="rId3">
+            <a:blip>
+              <a:extLst>
+                <a:ext uri="{96DAC541-7B7A-43D3-8B79-37D633B846F1}">
+                  <asvg:svgBlip xmlns:asvg="http://schemas.microsoft.com/office/drawing/2016/SVG/main" r:embed="rId3"/>
+                </a:ext>
+              </a:extLst>
+            </a:blip>
+            <a:stretch>
+              <a:fillRect/>
+            </a:stretch>
+          </a:blipFill>
+        </p:spPr>
+      </p:sp>
+      <p:sp>
+        <p:nvSpPr>
+          <p:cNvPr id="5" name="Freeform 5"/>
+          <p:cNvSpPr/>
+          <p:nvPr/>
+        </p:nvSpPr>
+        <p:spPr>
+          <a:xfrm rot="6309934">
+            <a:off x="6872212" y="7234794"/>
+            <a:ext cx="2444779" cy="4309706"/>
+          </a:xfrm>
+          <a:custGeom>
+            <a:avLst/>
+            <a:gdLst/>
+            <a:ahLst/>
+            <a:cxnLst/>
+            <a:rect l="l" t="t" r="r" b="b"/>
+            <a:pathLst>
+              <a:path w="2444779" h="4309706">
+                <a:moveTo>
+                  <a:pt x="0" y="0"/>
+                </a:moveTo>
+                <a:lnTo>
+                  <a:pt x="2444779" y="0"/>
+                </a:lnTo>
+                <a:lnTo>
+                  <a:pt x="2444779" y="4309706"/>
+                </a:lnTo>
+                <a:lnTo>
+                  <a:pt x="0" y="4309706"/>
+                </a:lnTo>
+                <a:lnTo>
+                  <a:pt x="0" y="0"/>
+                </a:lnTo>
+                <a:close/>
+              </a:path>
+            </a:pathLst>
+          </a:custGeom>
+          <a:blipFill>
+            <a:blip>
+              <a:alphaModFix amt="38000"/>
               <a:extLst>
                 <a:ext uri="{96DAC541-7B7A-43D3-8B79-37D633B846F1}">
                   <asvg:svgBlip xmlns:asvg="http://schemas.microsoft.com/office/drawing/2016/SVG/main" r:embed="rId4"/>
@@ -4372,41 +4424,41 @@
               </a:extLst>
             </a:blip>
             <a:stretch>
-              <a:fillRect l="0" t="0" r="0" b="0"/>
+              <a:fillRect/>
             </a:stretch>
           </a:blipFill>
         </p:spPr>
       </p:sp>
       <p:sp>
         <p:nvSpPr>
-          <p:cNvPr name="Freeform 5" id="5"/>
+          <p:cNvPr id="6" name="Freeform 6"/>
           <p:cNvSpPr/>
           <p:nvPr/>
         </p:nvSpPr>
         <p:spPr>
-          <a:xfrm flipH="false" flipV="false" rot="6309934">
-            <a:off x="6872212" y="7234794"/>
-            <a:ext cx="2444779" cy="4309706"/>
+          <a:xfrm>
+            <a:off x="14069971" y="7646099"/>
+            <a:ext cx="6774834" cy="3985579"/>
           </a:xfrm>
           <a:custGeom>
             <a:avLst/>
             <a:gdLst/>
             <a:ahLst/>
             <a:cxnLst/>
-            <a:rect r="r" b="b" t="t" l="l"/>
+            <a:rect l="l" t="t" r="r" b="b"/>
             <a:pathLst>
-              <a:path h="4309706" w="2444779">
+              <a:path w="6774834" h="3985579">
                 <a:moveTo>
                   <a:pt x="0" y="0"/>
                 </a:moveTo>
                 <a:lnTo>
-                  <a:pt x="2444779" y="0"/>
-                </a:lnTo>
-                <a:lnTo>
-                  <a:pt x="2444779" y="4309706"/>
-                </a:lnTo>
-                <a:lnTo>
-                  <a:pt x="0" y="4309706"/>
+                  <a:pt x="6774834" y="0"/>
+                </a:lnTo>
+                <a:lnTo>
+                  <a:pt x="6774834" y="3985579"/>
+                </a:lnTo>
+                <a:lnTo>
+                  <a:pt x="0" y="3985579"/>
                 </a:lnTo>
                 <a:lnTo>
                   <a:pt x="0" y="0"/>
@@ -4416,8 +4468,53 @@
             </a:pathLst>
           </a:custGeom>
           <a:blipFill>
-            <a:blip r:embed="rId5">
-              <a:alphaModFix amt="38000"/>
+            <a:blip r:embed="rId5"/>
+            <a:stretch>
+              <a:fillRect/>
+            </a:stretch>
+          </a:blipFill>
+        </p:spPr>
+      </p:sp>
+      <p:sp>
+        <p:nvSpPr>
+          <p:cNvPr id="7" name="Freeform 7"/>
+          <p:cNvSpPr/>
+          <p:nvPr/>
+        </p:nvSpPr>
+        <p:spPr>
+          <a:xfrm rot="701334">
+            <a:off x="-2704693" y="6087041"/>
+            <a:ext cx="6584800" cy="7103695"/>
+          </a:xfrm>
+          <a:custGeom>
+            <a:avLst/>
+            <a:gdLst/>
+            <a:ahLst/>
+            <a:cxnLst/>
+            <a:rect l="l" t="t" r="r" b="b"/>
+            <a:pathLst>
+              <a:path w="6584800" h="7103695">
+                <a:moveTo>
+                  <a:pt x="0" y="0"/>
+                </a:moveTo>
+                <a:lnTo>
+                  <a:pt x="6584800" y="0"/>
+                </a:lnTo>
+                <a:lnTo>
+                  <a:pt x="6584800" y="7103695"/>
+                </a:lnTo>
+                <a:lnTo>
+                  <a:pt x="0" y="7103695"/>
+                </a:lnTo>
+                <a:lnTo>
+                  <a:pt x="0" y="0"/>
+                </a:lnTo>
+                <a:close/>
+              </a:path>
+            </a:pathLst>
+          </a:custGeom>
+          <a:blipFill>
+            <a:blip>
               <a:extLst>
                 <a:ext uri="{96DAC541-7B7A-43D3-8B79-37D633B846F1}">
                   <asvg:svgBlip xmlns:asvg="http://schemas.microsoft.com/office/drawing/2016/SVG/main" r:embed="rId6"/>
@@ -4425,41 +4522,41 @@
               </a:extLst>
             </a:blip>
             <a:stretch>
-              <a:fillRect l="0" t="0" r="0" b="0"/>
+              <a:fillRect/>
             </a:stretch>
           </a:blipFill>
         </p:spPr>
       </p:sp>
       <p:sp>
         <p:nvSpPr>
-          <p:cNvPr name="Freeform 6" id="6"/>
+          <p:cNvPr id="8" name="Freeform 8"/>
           <p:cNvSpPr/>
           <p:nvPr/>
         </p:nvSpPr>
         <p:spPr>
-          <a:xfrm flipH="false" flipV="false" rot="0">
-            <a:off x="14069971" y="7646099"/>
-            <a:ext cx="6774834" cy="3985579"/>
+          <a:xfrm rot="-3055627">
+            <a:off x="12099560" y="-984956"/>
+            <a:ext cx="2444779" cy="4309706"/>
           </a:xfrm>
           <a:custGeom>
             <a:avLst/>
             <a:gdLst/>
             <a:ahLst/>
             <a:cxnLst/>
-            <a:rect r="r" b="b" t="t" l="l"/>
+            <a:rect l="l" t="t" r="r" b="b"/>
             <a:pathLst>
-              <a:path h="3985579" w="6774834">
+              <a:path w="2444779" h="4309706">
                 <a:moveTo>
                   <a:pt x="0" y="0"/>
                 </a:moveTo>
                 <a:lnTo>
-                  <a:pt x="6774834" y="0"/>
-                </a:lnTo>
-                <a:lnTo>
-                  <a:pt x="6774834" y="3985579"/>
-                </a:lnTo>
-                <a:lnTo>
-                  <a:pt x="0" y="3985579"/>
+                  <a:pt x="2444779" y="0"/>
+                </a:lnTo>
+                <a:lnTo>
+                  <a:pt x="2444779" y="4309707"/>
+                </a:lnTo>
+                <a:lnTo>
+                  <a:pt x="0" y="4309707"/>
                 </a:lnTo>
                 <a:lnTo>
                   <a:pt x="0" y="0"/>
@@ -4469,135 +4566,37 @@
             </a:pathLst>
           </a:custGeom>
           <a:blipFill>
-            <a:blip r:embed="rId7"/>
-            <a:stretch>
-              <a:fillRect l="0" t="0" r="0" b="0"/>
-            </a:stretch>
-          </a:blipFill>
-        </p:spPr>
-      </p:sp>
-      <p:sp>
-        <p:nvSpPr>
-          <p:cNvPr name="Freeform 7" id="7"/>
-          <p:cNvSpPr/>
-          <p:nvPr/>
-        </p:nvSpPr>
-        <p:spPr>
-          <a:xfrm flipH="false" flipV="false" rot="701334">
-            <a:off x="-2704693" y="6087041"/>
-            <a:ext cx="6584800" cy="7103695"/>
-          </a:xfrm>
-          <a:custGeom>
-            <a:avLst/>
-            <a:gdLst/>
-            <a:ahLst/>
-            <a:cxnLst/>
-            <a:rect r="r" b="b" t="t" l="l"/>
-            <a:pathLst>
-              <a:path h="7103695" w="6584800">
-                <a:moveTo>
-                  <a:pt x="0" y="0"/>
-                </a:moveTo>
-                <a:lnTo>
-                  <a:pt x="6584800" y="0"/>
-                </a:lnTo>
-                <a:lnTo>
-                  <a:pt x="6584800" y="7103695"/>
-                </a:lnTo>
-                <a:lnTo>
-                  <a:pt x="0" y="7103695"/>
-                </a:lnTo>
-                <a:lnTo>
-                  <a:pt x="0" y="0"/>
-                </a:lnTo>
-                <a:close/>
-              </a:path>
-            </a:pathLst>
-          </a:custGeom>
-          <a:blipFill>
-            <a:blip r:embed="rId8">
+            <a:blip>
+              <a:alphaModFix amt="38000"/>
               <a:extLst>
                 <a:ext uri="{96DAC541-7B7A-43D3-8B79-37D633B846F1}">
-                  <asvg:svgBlip xmlns:asvg="http://schemas.microsoft.com/office/drawing/2016/SVG/main" r:embed="rId9"/>
+                  <asvg:svgBlip xmlns:asvg="http://schemas.microsoft.com/office/drawing/2016/SVG/main" r:embed="rId4"/>
                 </a:ext>
               </a:extLst>
             </a:blip>
             <a:stretch>
-              <a:fillRect l="0" t="0" r="0" b="0"/>
+              <a:fillRect/>
             </a:stretch>
           </a:blipFill>
         </p:spPr>
       </p:sp>
       <p:sp>
         <p:nvSpPr>
-          <p:cNvPr name="Freeform 8" id="8"/>
-          <p:cNvSpPr/>
-          <p:nvPr/>
-        </p:nvSpPr>
-        <p:spPr>
-          <a:xfrm flipH="false" flipV="false" rot="-3055627">
-            <a:off x="12099560" y="-984956"/>
-            <a:ext cx="2444779" cy="4309706"/>
-          </a:xfrm>
-          <a:custGeom>
-            <a:avLst/>
-            <a:gdLst/>
-            <a:ahLst/>
-            <a:cxnLst/>
-            <a:rect r="r" b="b" t="t" l="l"/>
-            <a:pathLst>
-              <a:path h="4309706" w="2444779">
-                <a:moveTo>
-                  <a:pt x="0" y="0"/>
-                </a:moveTo>
-                <a:lnTo>
-                  <a:pt x="2444779" y="0"/>
-                </a:lnTo>
-                <a:lnTo>
-                  <a:pt x="2444779" y="4309707"/>
-                </a:lnTo>
-                <a:lnTo>
-                  <a:pt x="0" y="4309707"/>
-                </a:lnTo>
-                <a:lnTo>
-                  <a:pt x="0" y="0"/>
-                </a:lnTo>
-                <a:close/>
-              </a:path>
-            </a:pathLst>
-          </a:custGeom>
-          <a:blipFill>
-            <a:blip r:embed="rId5">
-              <a:alphaModFix amt="38000"/>
-              <a:extLst>
-                <a:ext uri="{96DAC541-7B7A-43D3-8B79-37D633B846F1}">
-                  <asvg:svgBlip xmlns:asvg="http://schemas.microsoft.com/office/drawing/2016/SVG/main" r:embed="rId6"/>
-                </a:ext>
-              </a:extLst>
-            </a:blip>
-            <a:stretch>
-              <a:fillRect l="0" t="0" r="0" b="0"/>
-            </a:stretch>
-          </a:blipFill>
-        </p:spPr>
-      </p:sp>
-      <p:sp>
-        <p:nvSpPr>
-          <p:cNvPr name="TextBox 9" id="9"/>
-          <p:cNvSpPr txBox="true"/>
-          <p:nvPr/>
-        </p:nvSpPr>
-        <p:spPr>
-          <a:xfrm rot="0">
-            <a:off x="3604383" y="2390663"/>
-            <a:ext cx="11079234" cy="5458049"/>
+          <p:cNvPr id="9" name="TextBox 9"/>
+          <p:cNvSpPr txBox="1"/>
+          <p:nvPr/>
+        </p:nvSpPr>
+        <p:spPr>
+          <a:xfrm>
+            <a:off x="3604383" y="2070883"/>
+            <a:ext cx="11079234" cy="5945858"/>
           </a:xfrm>
           <a:prstGeom prst="rect">
             <a:avLst/>
           </a:prstGeom>
         </p:spPr>
         <p:txBody>
-          <a:bodyPr anchor="t" rtlCol="false" tIns="0" lIns="0" bIns="0" rIns="0">
+          <a:bodyPr lIns="0" tIns="0" rIns="0" bIns="0" rtlCol="0" anchor="t">
             <a:spAutoFit/>
           </a:bodyPr>
           <a:lstStyle/>
@@ -4608,7 +4607,7 @@
               </a:lnSpc>
             </a:pPr>
             <a:r>
-              <a:rPr lang="en-US" sz="2241" i="true" spc="24">
+              <a:rPr lang="en-US" sz="2241" i="1" spc="24" dirty="0">
                 <a:solidFill>
                   <a:srgbClr val="000000"/>
                 </a:solidFill>
@@ -4620,7 +4619,7 @@
               <a:t>Meta-analysis of yield response of foliar fungicide-treated hybrid corn in the United States and Ontario, Canada </a:t>
             </a:r>
             <a:r>
-              <a:rPr lang="en-US" sz="2241" spc="24">
+              <a:rPr lang="en-US" sz="2241" spc="24" dirty="0">
                 <a:solidFill>
                   <a:srgbClr val="000000"/>
                 </a:solidFill>
@@ -4629,7 +4628,7 @@
                 <a:cs typeface="DM Sans"/>
                 <a:sym typeface="DM Sans"/>
               </a:rPr>
-              <a:t>- Research conducted by Kiersten A. Wise et al. This research explores the effectiveness of different brands of fungicides on corn crops across the south midwestern U.S. and Ontario, Canada. </a:t>
+              <a:t>- Research conducted by Kiersten A. Wise et al. This research explores the effectiveness of different brands and application methods of fungicides on corn crops across the south midwestern U.S. and Ontario, Canada. </a:t>
             </a:r>
           </a:p>
           <a:p>
@@ -4638,6 +4637,15 @@
                 <a:spcPts val="3137"/>
               </a:lnSpc>
             </a:pPr>
+            <a:endParaRPr lang="en-US" sz="2241" spc="24" dirty="0">
+              <a:solidFill>
+                <a:srgbClr val="000000"/>
+              </a:solidFill>
+              <a:latin typeface="DM Sans"/>
+              <a:ea typeface="DM Sans"/>
+              <a:cs typeface="DM Sans"/>
+              <a:sym typeface="DM Sans"/>
+            </a:endParaRPr>
           </a:p>
           <a:p>
             <a:pPr algn="l">
@@ -4646,7 +4654,7 @@
               </a:lnSpc>
             </a:pPr>
             <a:r>
-              <a:rPr lang="en-US" sz="2241" spc="24">
+              <a:rPr lang="en-US" sz="2241" spc="24" dirty="0">
                 <a:solidFill>
                   <a:srgbClr val="000000"/>
                 </a:solidFill>
@@ -4664,6 +4672,15 @@
                 <a:spcPts val="3137"/>
               </a:lnSpc>
             </a:pPr>
+            <a:endParaRPr lang="en-US" sz="2241" spc="24" dirty="0">
+              <a:solidFill>
+                <a:srgbClr val="000000"/>
+              </a:solidFill>
+              <a:latin typeface="DM Sans"/>
+              <a:ea typeface="DM Sans"/>
+              <a:cs typeface="DM Sans"/>
+              <a:sym typeface="DM Sans"/>
+            </a:endParaRPr>
           </a:p>
           <a:p>
             <a:pPr algn="l">
@@ -4672,7 +4689,7 @@
               </a:lnSpc>
             </a:pPr>
             <a:r>
-              <a:rPr lang="en-US" sz="2241" spc="24">
+              <a:rPr lang="en-US" sz="2241" spc="24" dirty="0">
                 <a:solidFill>
                   <a:srgbClr val="000000"/>
                 </a:solidFill>
@@ -4681,7 +4698,7 @@
                 <a:cs typeface="DM Sans"/>
                 <a:sym typeface="DM Sans"/>
               </a:rPr>
-              <a:t>Limitations of this study and our exploration include the locations, as only 13 US states and one Canadian province are tested. The data is also limited to only two years, so there is a chance for new, more effective fungicides to hae come to the market, and also for fungicide-resistant strains of fungi to have risen and continue to affect crops despite fungicide use.</a:t>
+              <a:t>Limitations of this study and our exploration include the locations, as only 13 US states and one Canadian province are tested. The data is also limited to only two years, so there is a chance for new, more effective fungicides to have come to the market, and also for fungicide-resistant strains of fungi to have risen and continue to affect crops despite fungicide use.</a:t>
             </a:r>
           </a:p>
         </p:txBody>
@@ -4695,13 +4712,14 @@
 </file>
 
 <file path=ppt/slides/slide4.xml><?xml version="1.0" encoding="utf-8"?>
-<p:sld xmlns:p="http://schemas.openxmlformats.org/presentationml/2006/main" xmlns:a="http://schemas.openxmlformats.org/drawingml/2006/main" xmlns:r="http://schemas.openxmlformats.org/officeDocument/2006/relationships">
+<p:sld xmlns:a="http://schemas.openxmlformats.org/drawingml/2006/main" xmlns:r="http://schemas.openxmlformats.org/officeDocument/2006/relationships" xmlns:p="http://schemas.openxmlformats.org/presentationml/2006/main">
   <p:cSld>
     <p:bg>
       <p:bgPr>
         <a:solidFill>
           <a:srgbClr val="FEF6F3"/>
         </a:solidFill>
+        <a:effectLst/>
       </p:bgPr>
     </p:bg>
     <p:spTree>
@@ -4720,12 +4738,12 @@
       </p:grpSpPr>
       <p:sp>
         <p:nvSpPr>
-          <p:cNvPr name="TextBox 2" id="2"/>
-          <p:cNvSpPr txBox="true"/>
-          <p:nvPr/>
-        </p:nvSpPr>
-        <p:spPr>
-          <a:xfrm rot="0">
+          <p:cNvPr id="2" name="TextBox 2"/>
+          <p:cNvSpPr txBox="1"/>
+          <p:nvPr/>
+        </p:nvSpPr>
+        <p:spPr>
+          <a:xfrm>
             <a:off x="3885241" y="1175559"/>
             <a:ext cx="10517519" cy="895324"/>
           </a:xfrm>
@@ -4734,7 +4752,7 @@
           </a:prstGeom>
         </p:spPr>
         <p:txBody>
-          <a:bodyPr anchor="t" rtlCol="false" tIns="0" lIns="0" bIns="0" rIns="0">
+          <a:bodyPr lIns="0" tIns="0" rIns="0" bIns="0" rtlCol="0" anchor="t">
             <a:spAutoFit/>
           </a:bodyPr>
           <a:lstStyle/>
@@ -4761,12 +4779,12 @@
       </p:sp>
       <p:sp>
         <p:nvSpPr>
-          <p:cNvPr name="Freeform 3" id="3"/>
+          <p:cNvPr id="3" name="Freeform 3"/>
           <p:cNvSpPr/>
           <p:nvPr/>
         </p:nvSpPr>
         <p:spPr>
-          <a:xfrm flipH="false" flipV="false" rot="0">
+          <a:xfrm>
             <a:off x="7600880" y="7022105"/>
             <a:ext cx="6085715" cy="5198895"/>
           </a:xfrm>
@@ -4775,9 +4793,9 @@
             <a:gdLst/>
             <a:ahLst/>
             <a:cxnLst/>
-            <a:rect r="r" b="b" t="t" l="l"/>
+            <a:rect l="l" t="t" r="r" b="b"/>
             <a:pathLst>
-              <a:path h="5198895" w="6085715">
+              <a:path w="6085715" h="5198895">
                 <a:moveTo>
                   <a:pt x="0" y="0"/>
                 </a:moveTo>
@@ -4798,7 +4816,59 @@
             </a:pathLst>
           </a:custGeom>
           <a:blipFill>
-            <a:blip r:embed="rId2">
+            <a:blip>
+              <a:extLst>
+                <a:ext uri="{96DAC541-7B7A-43D3-8B79-37D633B846F1}">
+                  <asvg:svgBlip xmlns:asvg="http://schemas.microsoft.com/office/drawing/2016/SVG/main" r:embed="rId2"/>
+                </a:ext>
+              </a:extLst>
+            </a:blip>
+            <a:stretch>
+              <a:fillRect/>
+            </a:stretch>
+          </a:blipFill>
+        </p:spPr>
+      </p:sp>
+      <p:sp>
+        <p:nvSpPr>
+          <p:cNvPr id="4" name="Freeform 4"/>
+          <p:cNvSpPr/>
+          <p:nvPr/>
+        </p:nvSpPr>
+        <p:spPr>
+          <a:xfrm>
+            <a:off x="-3949981" y="-1057258"/>
+            <a:ext cx="8842062" cy="4179884"/>
+          </a:xfrm>
+          <a:custGeom>
+            <a:avLst/>
+            <a:gdLst/>
+            <a:ahLst/>
+            <a:cxnLst/>
+            <a:rect l="l" t="t" r="r" b="b"/>
+            <a:pathLst>
+              <a:path w="8842062" h="4179884">
+                <a:moveTo>
+                  <a:pt x="0" y="0"/>
+                </a:moveTo>
+                <a:lnTo>
+                  <a:pt x="8842061" y="0"/>
+                </a:lnTo>
+                <a:lnTo>
+                  <a:pt x="8842061" y="4179884"/>
+                </a:lnTo>
+                <a:lnTo>
+                  <a:pt x="0" y="4179884"/>
+                </a:lnTo>
+                <a:lnTo>
+                  <a:pt x="0" y="0"/>
+                </a:lnTo>
+                <a:close/>
+              </a:path>
+            </a:pathLst>
+          </a:custGeom>
+          <a:blipFill>
+            <a:blip>
               <a:extLst>
                 <a:ext uri="{96DAC541-7B7A-43D3-8B79-37D633B846F1}">
                   <asvg:svgBlip xmlns:asvg="http://schemas.microsoft.com/office/drawing/2016/SVG/main" r:embed="rId3"/>
@@ -4806,41 +4876,41 @@
               </a:extLst>
             </a:blip>
             <a:stretch>
-              <a:fillRect l="0" t="0" r="0" b="0"/>
+              <a:fillRect/>
             </a:stretch>
           </a:blipFill>
         </p:spPr>
       </p:sp>
       <p:sp>
         <p:nvSpPr>
-          <p:cNvPr name="Freeform 4" id="4"/>
+          <p:cNvPr id="5" name="Freeform 5"/>
           <p:cNvSpPr/>
           <p:nvPr/>
         </p:nvSpPr>
         <p:spPr>
-          <a:xfrm flipH="false" flipV="false" rot="0">
-            <a:off x="-3949981" y="-1057258"/>
-            <a:ext cx="8842062" cy="4179884"/>
+          <a:xfrm rot="6309934">
+            <a:off x="-482499" y="2571256"/>
+            <a:ext cx="2444779" cy="4309706"/>
           </a:xfrm>
           <a:custGeom>
             <a:avLst/>
             <a:gdLst/>
             <a:ahLst/>
             <a:cxnLst/>
-            <a:rect r="r" b="b" t="t" l="l"/>
+            <a:rect l="l" t="t" r="r" b="b"/>
             <a:pathLst>
-              <a:path h="4179884" w="8842062">
+              <a:path w="2444779" h="4309706">
                 <a:moveTo>
                   <a:pt x="0" y="0"/>
                 </a:moveTo>
                 <a:lnTo>
-                  <a:pt x="8842061" y="0"/>
-                </a:lnTo>
-                <a:lnTo>
-                  <a:pt x="8842061" y="4179884"/>
-                </a:lnTo>
-                <a:lnTo>
-                  <a:pt x="0" y="4179884"/>
+                  <a:pt x="2444778" y="0"/>
+                </a:lnTo>
+                <a:lnTo>
+                  <a:pt x="2444778" y="4309707"/>
+                </a:lnTo>
+                <a:lnTo>
+                  <a:pt x="0" y="4309707"/>
                 </a:lnTo>
                 <a:lnTo>
                   <a:pt x="0" y="0"/>
@@ -4850,49 +4920,50 @@
             </a:pathLst>
           </a:custGeom>
           <a:blipFill>
-            <a:blip r:embed="rId4">
+            <a:blip>
+              <a:alphaModFix amt="38000"/>
               <a:extLst>
                 <a:ext uri="{96DAC541-7B7A-43D3-8B79-37D633B846F1}">
-                  <asvg:svgBlip xmlns:asvg="http://schemas.microsoft.com/office/drawing/2016/SVG/main" r:embed="rId5"/>
+                  <asvg:svgBlip xmlns:asvg="http://schemas.microsoft.com/office/drawing/2016/SVG/main" r:embed="rId4"/>
                 </a:ext>
               </a:extLst>
             </a:blip>
             <a:stretch>
-              <a:fillRect l="0" t="0" r="0" b="0"/>
+              <a:fillRect/>
             </a:stretch>
           </a:blipFill>
         </p:spPr>
       </p:sp>
       <p:sp>
         <p:nvSpPr>
-          <p:cNvPr name="Freeform 5" id="5"/>
+          <p:cNvPr id="6" name="Freeform 6"/>
           <p:cNvSpPr/>
           <p:nvPr/>
         </p:nvSpPr>
         <p:spPr>
-          <a:xfrm flipH="false" flipV="false" rot="6309934">
-            <a:off x="-482499" y="2571256"/>
-            <a:ext cx="2444779" cy="4309706"/>
+          <a:xfrm>
+            <a:off x="-2647527" y="6861291"/>
+            <a:ext cx="6774834" cy="3985579"/>
           </a:xfrm>
           <a:custGeom>
             <a:avLst/>
             <a:gdLst/>
             <a:ahLst/>
             <a:cxnLst/>
-            <a:rect r="r" b="b" t="t" l="l"/>
+            <a:rect l="l" t="t" r="r" b="b"/>
             <a:pathLst>
-              <a:path h="4309706" w="2444779">
+              <a:path w="6774834" h="3985579">
                 <a:moveTo>
                   <a:pt x="0" y="0"/>
                 </a:moveTo>
                 <a:lnTo>
-                  <a:pt x="2444778" y="0"/>
-                </a:lnTo>
-                <a:lnTo>
-                  <a:pt x="2444778" y="4309707"/>
-                </a:lnTo>
-                <a:lnTo>
-                  <a:pt x="0" y="4309707"/>
+                  <a:pt x="6774834" y="0"/>
+                </a:lnTo>
+                <a:lnTo>
+                  <a:pt x="6774834" y="3985579"/>
+                </a:lnTo>
+                <a:lnTo>
+                  <a:pt x="0" y="3985579"/>
                 </a:lnTo>
                 <a:lnTo>
                   <a:pt x="0" y="0"/>
@@ -4902,50 +4973,43 @@
             </a:pathLst>
           </a:custGeom>
           <a:blipFill>
-            <a:blip r:embed="rId6">
-              <a:alphaModFix amt="38000"/>
-              <a:extLst>
-                <a:ext uri="{96DAC541-7B7A-43D3-8B79-37D633B846F1}">
-                  <asvg:svgBlip xmlns:asvg="http://schemas.microsoft.com/office/drawing/2016/SVG/main" r:embed="rId7"/>
-                </a:ext>
-              </a:extLst>
-            </a:blip>
+            <a:blip r:embed="rId5"/>
             <a:stretch>
-              <a:fillRect l="0" t="0" r="0" b="0"/>
+              <a:fillRect/>
             </a:stretch>
           </a:blipFill>
         </p:spPr>
       </p:sp>
       <p:sp>
         <p:nvSpPr>
-          <p:cNvPr name="Freeform 6" id="6"/>
+          <p:cNvPr id="7" name="Freeform 7"/>
           <p:cNvSpPr/>
           <p:nvPr/>
         </p:nvSpPr>
         <p:spPr>
-          <a:xfrm flipH="false" flipV="false" rot="0">
-            <a:off x="-2647527" y="6861291"/>
-            <a:ext cx="6774834" cy="3985579"/>
+          <a:xfrm rot="-2157287">
+            <a:off x="15442182" y="5706453"/>
+            <a:ext cx="6584800" cy="7103695"/>
           </a:xfrm>
           <a:custGeom>
             <a:avLst/>
             <a:gdLst/>
             <a:ahLst/>
             <a:cxnLst/>
-            <a:rect r="r" b="b" t="t" l="l"/>
+            <a:rect l="l" t="t" r="r" b="b"/>
             <a:pathLst>
-              <a:path h="3985579" w="6774834">
+              <a:path w="6584800" h="7103695">
                 <a:moveTo>
                   <a:pt x="0" y="0"/>
                 </a:moveTo>
                 <a:lnTo>
-                  <a:pt x="6774834" y="0"/>
-                </a:lnTo>
-                <a:lnTo>
-                  <a:pt x="6774834" y="3985579"/>
-                </a:lnTo>
-                <a:lnTo>
-                  <a:pt x="0" y="3985579"/>
+                  <a:pt x="6584800" y="0"/>
+                </a:lnTo>
+                <a:lnTo>
+                  <a:pt x="6584800" y="7103694"/>
+                </a:lnTo>
+                <a:lnTo>
+                  <a:pt x="0" y="7103694"/>
                 </a:lnTo>
                 <a:lnTo>
                   <a:pt x="0" y="0"/>
@@ -4955,43 +5019,49 @@
             </a:pathLst>
           </a:custGeom>
           <a:blipFill>
-            <a:blip r:embed="rId8"/>
+            <a:blip>
+              <a:extLst>
+                <a:ext uri="{96DAC541-7B7A-43D3-8B79-37D633B846F1}">
+                  <asvg:svgBlip xmlns:asvg="http://schemas.microsoft.com/office/drawing/2016/SVG/main" r:embed="rId6"/>
+                </a:ext>
+              </a:extLst>
+            </a:blip>
             <a:stretch>
-              <a:fillRect l="0" t="0" r="0" b="0"/>
+              <a:fillRect/>
             </a:stretch>
           </a:blipFill>
         </p:spPr>
       </p:sp>
       <p:sp>
         <p:nvSpPr>
-          <p:cNvPr name="Freeform 7" id="7"/>
+          <p:cNvPr id="8" name="Freeform 8"/>
           <p:cNvSpPr/>
           <p:nvPr/>
         </p:nvSpPr>
         <p:spPr>
-          <a:xfrm flipH="false" flipV="false" rot="-2157287">
-            <a:off x="15442182" y="5706453"/>
-            <a:ext cx="6584800" cy="7103695"/>
+          <a:xfrm rot="-3055627">
+            <a:off x="15623761" y="-603070"/>
+            <a:ext cx="2444779" cy="4309706"/>
           </a:xfrm>
           <a:custGeom>
             <a:avLst/>
             <a:gdLst/>
             <a:ahLst/>
             <a:cxnLst/>
-            <a:rect r="r" b="b" t="t" l="l"/>
+            <a:rect l="l" t="t" r="r" b="b"/>
             <a:pathLst>
-              <a:path h="7103695" w="6584800">
+              <a:path w="2444779" h="4309706">
                 <a:moveTo>
                   <a:pt x="0" y="0"/>
                 </a:moveTo>
                 <a:lnTo>
-                  <a:pt x="6584800" y="0"/>
-                </a:lnTo>
-                <a:lnTo>
-                  <a:pt x="6584800" y="7103694"/>
-                </a:lnTo>
-                <a:lnTo>
-                  <a:pt x="0" y="7103694"/>
+                  <a:pt x="2444779" y="0"/>
+                </a:lnTo>
+                <a:lnTo>
+                  <a:pt x="2444779" y="4309707"/>
+                </a:lnTo>
+                <a:lnTo>
+                  <a:pt x="0" y="4309707"/>
                 </a:lnTo>
                 <a:lnTo>
                   <a:pt x="0" y="0"/>
@@ -5001,49 +5071,50 @@
             </a:pathLst>
           </a:custGeom>
           <a:blipFill>
-            <a:blip r:embed="rId9">
+            <a:blip>
+              <a:alphaModFix amt="38000"/>
               <a:extLst>
                 <a:ext uri="{96DAC541-7B7A-43D3-8B79-37D633B846F1}">
-                  <asvg:svgBlip xmlns:asvg="http://schemas.microsoft.com/office/drawing/2016/SVG/main" r:embed="rId10"/>
+                  <asvg:svgBlip xmlns:asvg="http://schemas.microsoft.com/office/drawing/2016/SVG/main" r:embed="rId4"/>
                 </a:ext>
               </a:extLst>
             </a:blip>
             <a:stretch>
-              <a:fillRect l="0" t="0" r="0" b="0"/>
+              <a:fillRect/>
             </a:stretch>
           </a:blipFill>
         </p:spPr>
       </p:sp>
       <p:sp>
         <p:nvSpPr>
-          <p:cNvPr name="Freeform 8" id="8"/>
+          <p:cNvPr id="9" name="Freeform 9"/>
           <p:cNvSpPr/>
           <p:nvPr/>
         </p:nvSpPr>
         <p:spPr>
-          <a:xfrm flipH="false" flipV="false" rot="-3055627">
-            <a:off x="15623761" y="-603070"/>
-            <a:ext cx="2444779" cy="4309706"/>
+          <a:xfrm>
+            <a:off x="8131247" y="2417651"/>
+            <a:ext cx="9128053" cy="5762083"/>
           </a:xfrm>
           <a:custGeom>
             <a:avLst/>
             <a:gdLst/>
             <a:ahLst/>
             <a:cxnLst/>
-            <a:rect r="r" b="b" t="t" l="l"/>
+            <a:rect l="l" t="t" r="r" b="b"/>
             <a:pathLst>
-              <a:path h="4309706" w="2444779">
+              <a:path w="9128053" h="5762083">
                 <a:moveTo>
                   <a:pt x="0" y="0"/>
                 </a:moveTo>
                 <a:lnTo>
-                  <a:pt x="2444779" y="0"/>
-                </a:lnTo>
-                <a:lnTo>
-                  <a:pt x="2444779" y="4309707"/>
-                </a:lnTo>
-                <a:lnTo>
-                  <a:pt x="0" y="4309707"/>
+                  <a:pt x="9128053" y="0"/>
+                </a:lnTo>
+                <a:lnTo>
+                  <a:pt x="9128053" y="5762084"/>
+                </a:lnTo>
+                <a:lnTo>
+                  <a:pt x="0" y="5762084"/>
                 </a:lnTo>
                 <a:lnTo>
                   <a:pt x="0" y="0"/>
@@ -5053,74 +5124,21 @@
             </a:pathLst>
           </a:custGeom>
           <a:blipFill>
-            <a:blip r:embed="rId6">
-              <a:alphaModFix amt="38000"/>
-              <a:extLst>
-                <a:ext uri="{96DAC541-7B7A-43D3-8B79-37D633B846F1}">
-                  <asvg:svgBlip xmlns:asvg="http://schemas.microsoft.com/office/drawing/2016/SVG/main" r:embed="rId7"/>
-                </a:ext>
-              </a:extLst>
-            </a:blip>
+            <a:blip r:embed="rId7"/>
             <a:stretch>
-              <a:fillRect l="0" t="0" r="0" b="0"/>
+              <a:fillRect/>
             </a:stretch>
           </a:blipFill>
         </p:spPr>
       </p:sp>
       <p:sp>
         <p:nvSpPr>
-          <p:cNvPr name="Freeform 9" id="9"/>
-          <p:cNvSpPr/>
-          <p:nvPr/>
-        </p:nvSpPr>
-        <p:spPr>
-          <a:xfrm flipH="false" flipV="false" rot="0">
-            <a:off x="8131247" y="2417651"/>
-            <a:ext cx="9128053" cy="5762083"/>
-          </a:xfrm>
-          <a:custGeom>
-            <a:avLst/>
-            <a:gdLst/>
-            <a:ahLst/>
-            <a:cxnLst/>
-            <a:rect r="r" b="b" t="t" l="l"/>
-            <a:pathLst>
-              <a:path h="5762083" w="9128053">
-                <a:moveTo>
-                  <a:pt x="0" y="0"/>
-                </a:moveTo>
-                <a:lnTo>
-                  <a:pt x="9128053" y="0"/>
-                </a:lnTo>
-                <a:lnTo>
-                  <a:pt x="9128053" y="5762084"/>
-                </a:lnTo>
-                <a:lnTo>
-                  <a:pt x="0" y="5762084"/>
-                </a:lnTo>
-                <a:lnTo>
-                  <a:pt x="0" y="0"/>
-                </a:lnTo>
-                <a:close/>
-              </a:path>
-            </a:pathLst>
-          </a:custGeom>
-          <a:blipFill>
-            <a:blip r:embed="rId11"/>
-            <a:stretch>
-              <a:fillRect l="0" t="0" r="0" b="0"/>
-            </a:stretch>
-          </a:blipFill>
-        </p:spPr>
-      </p:sp>
-      <p:sp>
-        <p:nvSpPr>
-          <p:cNvPr name="TextBox 10" id="10"/>
-          <p:cNvSpPr txBox="true"/>
-          <p:nvPr/>
-        </p:nvSpPr>
-        <p:spPr>
-          <a:xfrm rot="0">
+          <p:cNvPr id="10" name="TextBox 10"/>
+          <p:cNvSpPr txBox="1"/>
+          <p:nvPr/>
+        </p:nvSpPr>
+        <p:spPr>
+          <a:xfrm>
             <a:off x="1968525" y="2889764"/>
             <a:ext cx="5632355" cy="4459848"/>
           </a:xfrm>
@@ -5129,12 +5147,12 @@
           </a:prstGeom>
         </p:spPr>
         <p:txBody>
-          <a:bodyPr anchor="t" rtlCol="false" tIns="0" lIns="0" bIns="0" rIns="0">
+          <a:bodyPr lIns="0" tIns="0" rIns="0" bIns="0" rtlCol="0" anchor="t">
             <a:spAutoFit/>
           </a:bodyPr>
           <a:lstStyle/>
           <a:p>
-            <a:pPr algn="l" marL="548480" indent="-274240" lvl="1">
+            <a:pPr marL="548480" lvl="1" indent="-274240" algn="l">
               <a:lnSpc>
                 <a:spcPts val="3556"/>
               </a:lnSpc>
@@ -5155,7 +5173,7 @@
             </a:r>
           </a:p>
           <a:p>
-            <a:pPr algn="l" marL="1096961" indent="-365654" lvl="2">
+            <a:pPr marL="1096961" lvl="2" indent="-365654" algn="l">
               <a:lnSpc>
                 <a:spcPts val="3556"/>
               </a:lnSpc>
@@ -5176,7 +5194,7 @@
             </a:r>
           </a:p>
           <a:p>
-            <a:pPr algn="l" marL="1096961" indent="-365654" lvl="2">
+            <a:pPr marL="1096961" lvl="2" indent="-365654" algn="l">
               <a:lnSpc>
                 <a:spcPts val="3556"/>
               </a:lnSpc>
@@ -5193,19 +5211,7 @@
                 <a:cs typeface="DM Sans"/>
                 <a:sym typeface="DM Sans"/>
               </a:rPr>
-              <a:t>We see that MD, SD, and ND have almost no effective treatments, and all states except AR, GA, and LA have at least one fungicide that does not work</a:t>
-            </a:r>
-            <a:r>
-              <a:rPr lang="en-US" sz="2540" spc="27">
-                <a:solidFill>
-                  <a:srgbClr val="000000"/>
-                </a:solidFill>
-                <a:latin typeface="DM Sans"/>
-                <a:ea typeface="DM Sans"/>
-                <a:cs typeface="DM Sans"/>
-                <a:sym typeface="DM Sans"/>
-              </a:rPr>
-              <a:t> </a:t>
+              <a:t>We see that MD, SD, and ND have almost no effective treatments, and all states except AR, GA, and LA have at least one fungicide that does not work </a:t>
             </a:r>
           </a:p>
         </p:txBody>
@@ -5219,13 +5225,14 @@
 </file>
 
 <file path=ppt/slides/slide5.xml><?xml version="1.0" encoding="utf-8"?>
-<p:sld xmlns:p="http://schemas.openxmlformats.org/presentationml/2006/main" xmlns:a="http://schemas.openxmlformats.org/drawingml/2006/main" xmlns:r="http://schemas.openxmlformats.org/officeDocument/2006/relationships">
+<p:sld xmlns:a="http://schemas.openxmlformats.org/drawingml/2006/main" xmlns:r="http://schemas.openxmlformats.org/officeDocument/2006/relationships" xmlns:p="http://schemas.openxmlformats.org/presentationml/2006/main">
   <p:cSld>
     <p:bg>
       <p:bgPr>
         <a:solidFill>
           <a:srgbClr val="FEF6F3"/>
         </a:solidFill>
+        <a:effectLst/>
       </p:bgPr>
     </p:bg>
     <p:spTree>
@@ -5244,12 +5251,12 @@
       </p:grpSpPr>
       <p:sp>
         <p:nvSpPr>
-          <p:cNvPr name="TextBox 2" id="2"/>
-          <p:cNvSpPr txBox="true"/>
-          <p:nvPr/>
-        </p:nvSpPr>
-        <p:spPr>
-          <a:xfrm rot="0">
+          <p:cNvPr id="2" name="TextBox 2"/>
+          <p:cNvSpPr txBox="1"/>
+          <p:nvPr/>
+        </p:nvSpPr>
+        <p:spPr>
+          <a:xfrm>
             <a:off x="5871030" y="1175559"/>
             <a:ext cx="6545941" cy="895324"/>
           </a:xfrm>
@@ -5258,7 +5265,7 @@
           </a:prstGeom>
         </p:spPr>
         <p:txBody>
-          <a:bodyPr anchor="t" rtlCol="false" tIns="0" lIns="0" bIns="0" rIns="0">
+          <a:bodyPr lIns="0" tIns="0" rIns="0" bIns="0" rtlCol="0" anchor="t">
             <a:spAutoFit/>
           </a:bodyPr>
           <a:lstStyle/>
@@ -5285,12 +5292,12 @@
       </p:sp>
       <p:sp>
         <p:nvSpPr>
-          <p:cNvPr name="Freeform 3" id="3"/>
+          <p:cNvPr id="3" name="Freeform 3"/>
           <p:cNvSpPr/>
           <p:nvPr/>
         </p:nvSpPr>
         <p:spPr>
-          <a:xfrm flipH="false" flipV="false" rot="2245136">
+          <a:xfrm rot="2245136">
             <a:off x="-1744725" y="-335865"/>
             <a:ext cx="4096029" cy="5968712"/>
           </a:xfrm>
@@ -5299,9 +5306,9 @@
             <a:gdLst/>
             <a:ahLst/>
             <a:cxnLst/>
-            <a:rect r="r" b="b" t="t" l="l"/>
+            <a:rect l="l" t="t" r="r" b="b"/>
             <a:pathLst>
-              <a:path h="5968712" w="4096029">
+              <a:path w="4096029" h="5968712">
                 <a:moveTo>
                   <a:pt x="0" y="0"/>
                 </a:moveTo>
@@ -5324,19 +5331,19 @@
           <a:blipFill>
             <a:blip r:embed="rId2"/>
             <a:stretch>
-              <a:fillRect l="0" t="0" r="0" b="0"/>
+              <a:fillRect/>
             </a:stretch>
           </a:blipFill>
         </p:spPr>
       </p:sp>
       <p:sp>
         <p:nvSpPr>
-          <p:cNvPr name="Freeform 4" id="4"/>
+          <p:cNvPr id="4" name="Freeform 4"/>
           <p:cNvSpPr/>
           <p:nvPr/>
         </p:nvSpPr>
         <p:spPr>
-          <a:xfrm flipH="false" flipV="false" rot="0">
+          <a:xfrm>
             <a:off x="14691439" y="-441006"/>
             <a:ext cx="6774834" cy="3985579"/>
           </a:xfrm>
@@ -5345,9 +5352,9 @@
             <a:gdLst/>
             <a:ahLst/>
             <a:cxnLst/>
-            <a:rect r="r" b="b" t="t" l="l"/>
+            <a:rect l="l" t="t" r="r" b="b"/>
             <a:pathLst>
-              <a:path h="3985579" w="6774834">
+              <a:path w="6774834" h="3985579">
                 <a:moveTo>
                   <a:pt x="0" y="0"/>
                 </a:moveTo>
@@ -5370,19 +5377,19 @@
           <a:blipFill>
             <a:blip r:embed="rId3"/>
             <a:stretch>
-              <a:fillRect l="0" t="0" r="0" b="0"/>
+              <a:fillRect/>
             </a:stretch>
           </a:blipFill>
         </p:spPr>
       </p:sp>
       <p:sp>
         <p:nvSpPr>
-          <p:cNvPr name="Freeform 5" id="5"/>
+          <p:cNvPr id="5" name="Freeform 5"/>
           <p:cNvSpPr/>
           <p:nvPr/>
         </p:nvSpPr>
         <p:spPr>
-          <a:xfrm flipH="false" flipV="false" rot="-3055627">
+          <a:xfrm rot="-3055627">
             <a:off x="12099560" y="-984956"/>
             <a:ext cx="2444779" cy="4309706"/>
           </a:xfrm>
@@ -5391,9 +5398,9 @@
             <a:gdLst/>
             <a:ahLst/>
             <a:cxnLst/>
-            <a:rect r="r" b="b" t="t" l="l"/>
+            <a:rect l="l" t="t" r="r" b="b"/>
             <a:pathLst>
-              <a:path h="4309706" w="2444779">
+              <a:path w="2444779" h="4309706">
                 <a:moveTo>
                   <a:pt x="0" y="0"/>
                 </a:moveTo>
@@ -5414,28 +5421,28 @@
             </a:pathLst>
           </a:custGeom>
           <a:blipFill>
-            <a:blip r:embed="rId4">
+            <a:blip>
               <a:alphaModFix amt="38000"/>
               <a:extLst>
                 <a:ext uri="{96DAC541-7B7A-43D3-8B79-37D633B846F1}">
-                  <asvg:svgBlip xmlns:asvg="http://schemas.microsoft.com/office/drawing/2016/SVG/main" r:embed="rId5"/>
+                  <asvg:svgBlip xmlns:asvg="http://schemas.microsoft.com/office/drawing/2016/SVG/main" r:embed="rId4"/>
                 </a:ext>
               </a:extLst>
             </a:blip>
             <a:stretch>
-              <a:fillRect l="0" t="0" r="0" b="0"/>
+              <a:fillRect/>
             </a:stretch>
           </a:blipFill>
         </p:spPr>
       </p:sp>
       <p:sp>
         <p:nvSpPr>
-          <p:cNvPr name="TextBox 6" id="6"/>
-          <p:cNvSpPr txBox="true"/>
-          <p:nvPr/>
-        </p:nvSpPr>
-        <p:spPr>
-          <a:xfrm rot="0">
+          <p:cNvPr id="6" name="TextBox 6"/>
+          <p:cNvSpPr txBox="1"/>
+          <p:nvPr/>
+        </p:nvSpPr>
+        <p:spPr>
+          <a:xfrm>
             <a:off x="1893619" y="2438965"/>
             <a:ext cx="14500762" cy="1207378"/>
           </a:xfrm>
@@ -5444,12 +5451,12 @@
           </a:prstGeom>
         </p:spPr>
         <p:txBody>
-          <a:bodyPr anchor="t" rtlCol="false" tIns="0" lIns="0" bIns="0" rIns="0">
+          <a:bodyPr lIns="0" tIns="0" rIns="0" bIns="0" rtlCol="0" anchor="t">
             <a:spAutoFit/>
           </a:bodyPr>
           <a:lstStyle/>
           <a:p>
-            <a:pPr algn="l" marL="505302" indent="-252651" lvl="1">
+            <a:pPr marL="505302" lvl="1" indent="-252651" algn="l">
               <a:lnSpc>
                 <a:spcPts val="3276"/>
               </a:lnSpc>
@@ -5470,7 +5477,7 @@
             </a:r>
           </a:p>
           <a:p>
-            <a:pPr algn="l" marL="1010603" indent="-336868" lvl="2">
+            <a:pPr marL="1010603" lvl="2" indent="-336868" algn="l">
               <a:lnSpc>
                 <a:spcPts val="3276"/>
               </a:lnSpc>
@@ -5494,12 +5501,12 @@
       </p:sp>
       <p:sp>
         <p:nvSpPr>
-          <p:cNvPr name="TextBox 7" id="7"/>
-          <p:cNvSpPr txBox="true"/>
-          <p:nvPr/>
-        </p:nvSpPr>
-        <p:spPr>
-          <a:xfrm rot="0">
+          <p:cNvPr id="7" name="TextBox 7"/>
+          <p:cNvSpPr txBox="1"/>
+          <p:nvPr/>
+        </p:nvSpPr>
+        <p:spPr>
+          <a:xfrm>
             <a:off x="1893619" y="9678175"/>
             <a:ext cx="14500762" cy="348223"/>
           </a:xfrm>
@@ -5508,7 +5515,7 @@
           </a:prstGeom>
         </p:spPr>
         <p:txBody>
-          <a:bodyPr anchor="t" rtlCol="false" tIns="0" lIns="0" bIns="0" rIns="0">
+          <a:bodyPr lIns="0" tIns="0" rIns="0" bIns="0" rtlCol="0" anchor="t">
             <a:spAutoFit/>
           </a:bodyPr>
           <a:lstStyle/>
@@ -5535,12 +5542,12 @@
       </p:sp>
       <p:grpSp>
         <p:nvGrpSpPr>
-          <p:cNvPr name="Group 8" id="8"/>
+          <p:cNvPr id="8" name="Group 8"/>
           <p:cNvGrpSpPr/>
           <p:nvPr/>
         </p:nvGrpSpPr>
         <p:grpSpPr>
-          <a:xfrm rot="0">
+          <a:xfrm>
             <a:off x="596264" y="3912743"/>
             <a:ext cx="17095472" cy="5066208"/>
             <a:chOff x="0" y="0"/>
@@ -5549,12 +5556,12 @@
         </p:grpSpPr>
         <p:sp>
           <p:nvSpPr>
-            <p:cNvPr name="Freeform 9" id="9"/>
+            <p:cNvPr id="9" name="Freeform 9"/>
             <p:cNvSpPr/>
             <p:nvPr/>
           </p:nvSpPr>
           <p:spPr>
-            <a:xfrm flipH="false" flipV="false" rot="0">
+            <a:xfrm>
               <a:off x="12453003" y="0"/>
               <a:ext cx="10340959" cy="6744235"/>
             </a:xfrm>
@@ -5563,9 +5570,9 @@
               <a:gdLst/>
               <a:ahLst/>
               <a:cxnLst/>
-              <a:rect r="r" b="b" t="t" l="l"/>
+              <a:rect l="l" t="t" r="r" b="b"/>
               <a:pathLst>
-                <a:path h="6744235" w="10340959">
+                <a:path w="10340959" h="6744235">
                   <a:moveTo>
                     <a:pt x="0" y="0"/>
                   </a:moveTo>
@@ -5586,21 +5593,21 @@
               </a:pathLst>
             </a:custGeom>
             <a:blipFill>
-              <a:blip r:embed="rId6"/>
+              <a:blip r:embed="rId5"/>
               <a:stretch>
-                <a:fillRect l="0" t="0" r="-8697" b="0"/>
+                <a:fillRect r="-8697"/>
               </a:stretch>
             </a:blipFill>
           </p:spPr>
         </p:sp>
         <p:sp>
           <p:nvSpPr>
-            <p:cNvPr name="Freeform 10" id="10"/>
+            <p:cNvPr id="10" name="Freeform 10"/>
             <p:cNvSpPr/>
             <p:nvPr/>
           </p:nvSpPr>
           <p:spPr>
-            <a:xfrm flipH="false" flipV="false" rot="0">
+            <a:xfrm>
               <a:off x="0" y="0"/>
               <a:ext cx="10508658" cy="6754944"/>
             </a:xfrm>
@@ -5609,9 +5616,9 @@
               <a:gdLst/>
               <a:ahLst/>
               <a:cxnLst/>
-              <a:rect r="r" b="b" t="t" l="l"/>
+              <a:rect l="l" t="t" r="r" b="b"/>
               <a:pathLst>
-                <a:path h="6754944" w="10508658">
+                <a:path w="10508658" h="6754944">
                   <a:moveTo>
                     <a:pt x="0" y="0"/>
                   </a:moveTo>
@@ -5632,9 +5639,9 @@
               </a:pathLst>
             </a:custGeom>
             <a:blipFill>
-              <a:blip r:embed="rId7"/>
+              <a:blip r:embed="rId6"/>
               <a:stretch>
-                <a:fillRect l="0" t="0" r="-3468" b="0"/>
+                <a:fillRect r="-3468"/>
               </a:stretch>
             </a:blipFill>
           </p:spPr>
@@ -5642,12 +5649,12 @@
       </p:grpSp>
       <p:grpSp>
         <p:nvGrpSpPr>
-          <p:cNvPr name="Group 11" id="11"/>
+          <p:cNvPr id="11" name="Group 11"/>
           <p:cNvGrpSpPr/>
           <p:nvPr/>
         </p:nvGrpSpPr>
         <p:grpSpPr>
-          <a:xfrm rot="0">
+          <a:xfrm>
             <a:off x="3324993" y="9281552"/>
             <a:ext cx="11638015" cy="434723"/>
             <a:chOff x="0" y="0"/>
@@ -5656,12 +5663,12 @@
         </p:grpSpPr>
         <p:sp>
           <p:nvSpPr>
-            <p:cNvPr name="TextBox 12" id="12"/>
-            <p:cNvSpPr txBox="true"/>
+            <p:cNvPr id="12" name="TextBox 12"/>
+            <p:cNvSpPr txBox="1"/>
             <p:nvPr/>
           </p:nvSpPr>
           <p:spPr>
-            <a:xfrm rot="0">
+            <a:xfrm>
               <a:off x="0" y="-57150"/>
               <a:ext cx="1345441" cy="636781"/>
             </a:xfrm>
@@ -5670,7 +5677,7 @@
             </a:prstGeom>
           </p:spPr>
           <p:txBody>
-            <a:bodyPr anchor="t" rtlCol="false" tIns="0" lIns="0" bIns="0" rIns="0">
+            <a:bodyPr lIns="0" tIns="0" rIns="0" bIns="0" rtlCol="0" anchor="t">
               <a:spAutoFit/>
             </a:bodyPr>
             <a:lstStyle/>
@@ -5697,12 +5704,12 @@
         </p:sp>
         <p:sp>
           <p:nvSpPr>
-            <p:cNvPr name="TextBox 13" id="13"/>
-            <p:cNvSpPr txBox="true"/>
+            <p:cNvPr id="13" name="TextBox 13"/>
+            <p:cNvSpPr txBox="1"/>
             <p:nvPr/>
           </p:nvSpPr>
           <p:spPr>
-            <a:xfrm rot="0">
+            <a:xfrm>
               <a:off x="14171912" y="-57150"/>
               <a:ext cx="1345441" cy="636781"/>
             </a:xfrm>
@@ -5711,7 +5718,7 @@
             </a:prstGeom>
           </p:spPr>
           <p:txBody>
-            <a:bodyPr anchor="t" rtlCol="false" tIns="0" lIns="0" bIns="0" rIns="0">
+            <a:bodyPr lIns="0" tIns="0" rIns="0" bIns="0" rtlCol="0" anchor="t">
               <a:spAutoFit/>
             </a:bodyPr>
             <a:lstStyle/>
@@ -5746,13 +5753,14 @@
 </file>
 
 <file path=ppt/slides/slide6.xml><?xml version="1.0" encoding="utf-8"?>
-<p:sld xmlns:p="http://schemas.openxmlformats.org/presentationml/2006/main" xmlns:a="http://schemas.openxmlformats.org/drawingml/2006/main" xmlns:r="http://schemas.openxmlformats.org/officeDocument/2006/relationships">
+<p:sld xmlns:a="http://schemas.openxmlformats.org/drawingml/2006/main" xmlns:r="http://schemas.openxmlformats.org/officeDocument/2006/relationships" xmlns:p="http://schemas.openxmlformats.org/presentationml/2006/main">
   <p:cSld>
     <p:bg>
       <p:bgPr>
         <a:solidFill>
           <a:srgbClr val="FEF6F3"/>
         </a:solidFill>
+        <a:effectLst/>
       </p:bgPr>
     </p:bg>
     <p:spTree>
@@ -5771,12 +5779,12 @@
       </p:grpSpPr>
       <p:sp>
         <p:nvSpPr>
-          <p:cNvPr name="TextBox 2" id="2"/>
-          <p:cNvSpPr txBox="true"/>
-          <p:nvPr/>
-        </p:nvSpPr>
-        <p:spPr>
-          <a:xfrm rot="0">
+          <p:cNvPr id="2" name="TextBox 2"/>
+          <p:cNvSpPr txBox="1"/>
+          <p:nvPr/>
+        </p:nvSpPr>
+        <p:spPr>
+          <a:xfrm>
             <a:off x="5871030" y="1175559"/>
             <a:ext cx="6545941" cy="895324"/>
           </a:xfrm>
@@ -5785,7 +5793,7 @@
           </a:prstGeom>
         </p:spPr>
         <p:txBody>
-          <a:bodyPr anchor="t" rtlCol="false" tIns="0" lIns="0" bIns="0" rIns="0">
+          <a:bodyPr lIns="0" tIns="0" rIns="0" bIns="0" rtlCol="0" anchor="t">
             <a:spAutoFit/>
           </a:bodyPr>
           <a:lstStyle/>
@@ -5812,34 +5820,34 @@
       </p:sp>
       <p:sp>
         <p:nvSpPr>
-          <p:cNvPr name="Freeform 3" id="3"/>
+          <p:cNvPr id="3" name="Freeform 3"/>
           <p:cNvSpPr/>
           <p:nvPr/>
         </p:nvSpPr>
         <p:spPr>
-          <a:xfrm flipH="false" flipV="false" rot="1128197">
-            <a:off x="-3432716" y="3242221"/>
-            <a:ext cx="5568916" cy="8114996"/>
+          <a:xfrm>
+            <a:off x="15437201" y="5168917"/>
+            <a:ext cx="4096029" cy="5968712"/>
           </a:xfrm>
           <a:custGeom>
             <a:avLst/>
             <a:gdLst/>
             <a:ahLst/>
             <a:cxnLst/>
-            <a:rect r="r" b="b" t="t" l="l"/>
+            <a:rect l="l" t="t" r="r" b="b"/>
             <a:pathLst>
-              <a:path h="8114996" w="5568916">
+              <a:path w="4096029" h="5968712">
                 <a:moveTo>
                   <a:pt x="0" y="0"/>
                 </a:moveTo>
                 <a:lnTo>
-                  <a:pt x="5568916" y="0"/>
-                </a:lnTo>
-                <a:lnTo>
-                  <a:pt x="5568916" y="8114997"/>
-                </a:lnTo>
-                <a:lnTo>
-                  <a:pt x="0" y="8114997"/>
+                  <a:pt x="4096029" y="0"/>
+                </a:lnTo>
+                <a:lnTo>
+                  <a:pt x="4096029" y="5968712"/>
+                </a:lnTo>
+                <a:lnTo>
+                  <a:pt x="0" y="5968712"/>
                 </a:lnTo>
                 <a:lnTo>
                   <a:pt x="0" y="0"/>
@@ -5851,51 +5859,104 @@
           <a:blipFill>
             <a:blip r:embed="rId2"/>
             <a:stretch>
-              <a:fillRect l="0" t="0" r="0" b="0"/>
+              <a:fillRect/>
             </a:stretch>
           </a:blipFill>
         </p:spPr>
       </p:sp>
       <p:sp>
         <p:nvSpPr>
-          <p:cNvPr name="Freeform 4" id="4"/>
+          <p:cNvPr id="4" name="Freeform 4"/>
           <p:cNvSpPr/>
           <p:nvPr/>
         </p:nvSpPr>
         <p:spPr>
-          <a:xfrm flipH="true" flipV="false" rot="0">
-            <a:off x="13815563" y="5647976"/>
-            <a:ext cx="6085715" cy="5198895"/>
+          <a:xfrm>
+            <a:off x="15192561" y="7993454"/>
+            <a:ext cx="3095439" cy="2515748"/>
           </a:xfrm>
           <a:custGeom>
             <a:avLst/>
             <a:gdLst/>
             <a:ahLst/>
             <a:cxnLst/>
-            <a:rect r="r" b="b" t="t" l="l"/>
+            <a:rect l="l" t="t" r="r" b="b"/>
             <a:pathLst>
-              <a:path h="5198895" w="6085715">
+              <a:path w="3095439" h="2515748">
                 <a:moveTo>
-                  <a:pt x="6085715" y="0"/>
+                  <a:pt x="0" y="0"/>
                 </a:moveTo>
                 <a:lnTo>
-                  <a:pt x="0" y="0"/>
-                </a:lnTo>
-                <a:lnTo>
-                  <a:pt x="0" y="5198894"/>
-                </a:lnTo>
-                <a:lnTo>
-                  <a:pt x="6085715" y="5198894"/>
-                </a:lnTo>
-                <a:lnTo>
-                  <a:pt x="6085715" y="0"/>
+                  <a:pt x="3095439" y="0"/>
+                </a:lnTo>
+                <a:lnTo>
+                  <a:pt x="3095439" y="2515748"/>
+                </a:lnTo>
+                <a:lnTo>
+                  <a:pt x="0" y="2515748"/>
+                </a:lnTo>
+                <a:lnTo>
+                  <a:pt x="0" y="0"/>
                 </a:lnTo>
                 <a:close/>
               </a:path>
             </a:pathLst>
           </a:custGeom>
           <a:blipFill>
-            <a:blip r:embed="rId3">
+            <a:blip>
+              <a:extLst>
+                <a:ext uri="{96DAC541-7B7A-43D3-8B79-37D633B846F1}">
+                  <asvg:svgBlip xmlns:asvg="http://schemas.microsoft.com/office/drawing/2016/SVG/main" r:embed="rId3"/>
+                </a:ext>
+              </a:extLst>
+            </a:blip>
+            <a:stretch>
+              <a:fillRect/>
+            </a:stretch>
+          </a:blipFill>
+        </p:spPr>
+      </p:sp>
+      <p:sp>
+        <p:nvSpPr>
+          <p:cNvPr id="5" name="Freeform 5"/>
+          <p:cNvSpPr/>
+          <p:nvPr/>
+        </p:nvSpPr>
+        <p:spPr>
+          <a:xfrm rot="6309934">
+            <a:off x="-706287" y="2736981"/>
+            <a:ext cx="2444779" cy="4309706"/>
+          </a:xfrm>
+          <a:custGeom>
+            <a:avLst/>
+            <a:gdLst/>
+            <a:ahLst/>
+            <a:cxnLst/>
+            <a:rect l="l" t="t" r="r" b="b"/>
+            <a:pathLst>
+              <a:path w="2444779" h="4309706">
+                <a:moveTo>
+                  <a:pt x="0" y="0"/>
+                </a:moveTo>
+                <a:lnTo>
+                  <a:pt x="2444779" y="0"/>
+                </a:lnTo>
+                <a:lnTo>
+                  <a:pt x="2444779" y="4309707"/>
+                </a:lnTo>
+                <a:lnTo>
+                  <a:pt x="0" y="4309707"/>
+                </a:lnTo>
+                <a:lnTo>
+                  <a:pt x="0" y="0"/>
+                </a:lnTo>
+                <a:close/>
+              </a:path>
+            </a:pathLst>
+          </a:custGeom>
+          <a:blipFill>
+            <a:blip>
+              <a:alphaModFix amt="38000"/>
               <a:extLst>
                 <a:ext uri="{96DAC541-7B7A-43D3-8B79-37D633B846F1}">
                   <asvg:svgBlip xmlns:asvg="http://schemas.microsoft.com/office/drawing/2016/SVG/main" r:embed="rId4"/>
@@ -5903,41 +5964,41 @@
               </a:extLst>
             </a:blip>
             <a:stretch>
-              <a:fillRect l="0" t="0" r="0" b="0"/>
+              <a:fillRect/>
             </a:stretch>
           </a:blipFill>
         </p:spPr>
       </p:sp>
       <p:sp>
         <p:nvSpPr>
-          <p:cNvPr name="Freeform 5" id="5"/>
+          <p:cNvPr id="6" name="Freeform 6"/>
           <p:cNvSpPr/>
           <p:nvPr/>
         </p:nvSpPr>
         <p:spPr>
-          <a:xfrm flipH="false" flipV="false" rot="0">
-            <a:off x="15192561" y="8153273"/>
-            <a:ext cx="3095439" cy="2515748"/>
+          <a:xfrm>
+            <a:off x="-1591031" y="-1137320"/>
+            <a:ext cx="6774834" cy="3985579"/>
           </a:xfrm>
           <a:custGeom>
             <a:avLst/>
             <a:gdLst/>
             <a:ahLst/>
             <a:cxnLst/>
-            <a:rect r="r" b="b" t="t" l="l"/>
+            <a:rect l="l" t="t" r="r" b="b"/>
             <a:pathLst>
-              <a:path h="2515748" w="3095439">
+              <a:path w="6774834" h="3985579">
                 <a:moveTo>
                   <a:pt x="0" y="0"/>
                 </a:moveTo>
                 <a:lnTo>
-                  <a:pt x="3095439" y="0"/>
-                </a:lnTo>
-                <a:lnTo>
-                  <a:pt x="3095439" y="2515747"/>
-                </a:lnTo>
-                <a:lnTo>
-                  <a:pt x="0" y="2515747"/>
+                  <a:pt x="6774834" y="0"/>
+                </a:lnTo>
+                <a:lnTo>
+                  <a:pt x="6774834" y="3985579"/>
+                </a:lnTo>
+                <a:lnTo>
+                  <a:pt x="0" y="3985579"/>
                 </a:lnTo>
                 <a:lnTo>
                   <a:pt x="0" y="0"/>
@@ -5947,7 +6008,53 @@
             </a:pathLst>
           </a:custGeom>
           <a:blipFill>
-            <a:blip r:embed="rId5">
+            <a:blip r:embed="rId5"/>
+            <a:stretch>
+              <a:fillRect/>
+            </a:stretch>
+          </a:blipFill>
+        </p:spPr>
+      </p:sp>
+      <p:sp>
+        <p:nvSpPr>
+          <p:cNvPr id="7" name="Freeform 7"/>
+          <p:cNvSpPr/>
+          <p:nvPr/>
+        </p:nvSpPr>
+        <p:spPr>
+          <a:xfrm rot="943891">
+            <a:off x="-2171960" y="6735153"/>
+            <a:ext cx="6584800" cy="7103695"/>
+          </a:xfrm>
+          <a:custGeom>
+            <a:avLst/>
+            <a:gdLst/>
+            <a:ahLst/>
+            <a:cxnLst/>
+            <a:rect l="l" t="t" r="r" b="b"/>
+            <a:pathLst>
+              <a:path w="6584800" h="7103695">
+                <a:moveTo>
+                  <a:pt x="0" y="0"/>
+                </a:moveTo>
+                <a:lnTo>
+                  <a:pt x="6584800" y="0"/>
+                </a:lnTo>
+                <a:lnTo>
+                  <a:pt x="6584800" y="7103694"/>
+                </a:lnTo>
+                <a:lnTo>
+                  <a:pt x="0" y="7103694"/>
+                </a:lnTo>
+                <a:lnTo>
+                  <a:pt x="0" y="0"/>
+                </a:lnTo>
+                <a:close/>
+              </a:path>
+            </a:pathLst>
+          </a:custGeom>
+          <a:blipFill>
+            <a:blip>
               <a:extLst>
                 <a:ext uri="{96DAC541-7B7A-43D3-8B79-37D633B846F1}">
                   <asvg:svgBlip xmlns:asvg="http://schemas.microsoft.com/office/drawing/2016/SVG/main" r:embed="rId6"/>
@@ -5955,20 +6062,20 @@
               </a:extLst>
             </a:blip>
             <a:stretch>
-              <a:fillRect l="0" t="0" r="0" b="0"/>
+              <a:fillRect/>
             </a:stretch>
           </a:blipFill>
         </p:spPr>
       </p:sp>
       <p:sp>
         <p:nvSpPr>
-          <p:cNvPr name="Freeform 6" id="6"/>
+          <p:cNvPr id="8" name="Freeform 8"/>
           <p:cNvSpPr/>
           <p:nvPr/>
         </p:nvSpPr>
         <p:spPr>
-          <a:xfrm flipH="false" flipV="false" rot="6309934">
-            <a:off x="-413824" y="-1482130"/>
+          <a:xfrm rot="-3055627">
+            <a:off x="12099560" y="-984956"/>
             <a:ext cx="2444779" cy="4309706"/>
           </a:xfrm>
           <a:custGeom>
@@ -5976,9 +6083,9 @@
             <a:gdLst/>
             <a:ahLst/>
             <a:cxnLst/>
-            <a:rect r="r" b="b" t="t" l="l"/>
+            <a:rect l="l" t="t" r="r" b="b"/>
             <a:pathLst>
-              <a:path h="4309706" w="2444779">
+              <a:path w="2444779" h="4309706">
                 <a:moveTo>
                   <a:pt x="0" y="0"/>
                 </a:moveTo>
@@ -5986,10 +6093,10 @@
                   <a:pt x="2444779" y="0"/>
                 </a:lnTo>
                 <a:lnTo>
-                  <a:pt x="2444779" y="4309706"/>
-                </a:lnTo>
-                <a:lnTo>
-                  <a:pt x="0" y="4309706"/>
+                  <a:pt x="2444779" y="4309707"/>
+                </a:lnTo>
+                <a:lnTo>
+                  <a:pt x="0" y="4309707"/>
                 </a:lnTo>
                 <a:lnTo>
                   <a:pt x="0" y="0"/>
@@ -5999,50 +6106,50 @@
             </a:pathLst>
           </a:custGeom>
           <a:blipFill>
-            <a:blip r:embed="rId7">
+            <a:blip>
               <a:alphaModFix amt="38000"/>
               <a:extLst>
                 <a:ext uri="{96DAC541-7B7A-43D3-8B79-37D633B846F1}">
-                  <asvg:svgBlip xmlns:asvg="http://schemas.microsoft.com/office/drawing/2016/SVG/main" r:embed="rId8"/>
+                  <asvg:svgBlip xmlns:asvg="http://schemas.microsoft.com/office/drawing/2016/SVG/main" r:embed="rId4"/>
                 </a:ext>
               </a:extLst>
             </a:blip>
             <a:stretch>
-              <a:fillRect l="0" t="0" r="0" b="0"/>
+              <a:fillRect/>
             </a:stretch>
           </a:blipFill>
         </p:spPr>
       </p:sp>
       <p:sp>
         <p:nvSpPr>
-          <p:cNvPr name="Freeform 7" id="7"/>
+          <p:cNvPr id="9" name="Freeform 9"/>
           <p:cNvSpPr/>
           <p:nvPr/>
         </p:nvSpPr>
         <p:spPr>
-          <a:xfrm flipH="false" flipV="false" rot="0">
-            <a:off x="14900583" y="2070883"/>
-            <a:ext cx="6774834" cy="3985579"/>
+          <a:xfrm rot="6309934">
+            <a:off x="9122475" y="8132147"/>
+            <a:ext cx="2444779" cy="4309706"/>
           </a:xfrm>
           <a:custGeom>
             <a:avLst/>
             <a:gdLst/>
             <a:ahLst/>
             <a:cxnLst/>
-            <a:rect r="r" b="b" t="t" l="l"/>
+            <a:rect l="l" t="t" r="r" b="b"/>
             <a:pathLst>
-              <a:path h="3985579" w="6774834">
+              <a:path w="2444779" h="4309706">
                 <a:moveTo>
                   <a:pt x="0" y="0"/>
                 </a:moveTo>
                 <a:lnTo>
-                  <a:pt x="6774834" y="0"/>
-                </a:lnTo>
-                <a:lnTo>
-                  <a:pt x="6774834" y="3985579"/>
-                </a:lnTo>
-                <a:lnTo>
-                  <a:pt x="0" y="3985579"/>
+                  <a:pt x="2444779" y="0"/>
+                </a:lnTo>
+                <a:lnTo>
+                  <a:pt x="2444779" y="4309706"/>
+                </a:lnTo>
+                <a:lnTo>
+                  <a:pt x="0" y="4309706"/>
                 </a:lnTo>
                 <a:lnTo>
                   <a:pt x="0" y="0"/>
@@ -6052,43 +6159,50 @@
             </a:pathLst>
           </a:custGeom>
           <a:blipFill>
-            <a:blip r:embed="rId9"/>
+            <a:blip>
+              <a:alphaModFix amt="38000"/>
+              <a:extLst>
+                <a:ext uri="{96DAC541-7B7A-43D3-8B79-37D633B846F1}">
+                  <asvg:svgBlip xmlns:asvg="http://schemas.microsoft.com/office/drawing/2016/SVG/main" r:embed="rId4"/>
+                </a:ext>
+              </a:extLst>
+            </a:blip>
             <a:stretch>
-              <a:fillRect l="0" t="0" r="0" b="0"/>
+              <a:fillRect/>
             </a:stretch>
           </a:blipFill>
         </p:spPr>
       </p:sp>
       <p:sp>
         <p:nvSpPr>
-          <p:cNvPr name="Freeform 8" id="8"/>
+          <p:cNvPr id="10" name="Freeform 10"/>
           <p:cNvSpPr/>
           <p:nvPr/>
         </p:nvSpPr>
         <p:spPr>
-          <a:xfrm flipH="false" flipV="false" rot="-366772">
-            <a:off x="609721" y="7872240"/>
-            <a:ext cx="6584800" cy="7103695"/>
+          <a:xfrm>
+            <a:off x="4414226" y="2848259"/>
+            <a:ext cx="9459549" cy="5711202"/>
           </a:xfrm>
           <a:custGeom>
             <a:avLst/>
             <a:gdLst/>
             <a:ahLst/>
             <a:cxnLst/>
-            <a:rect r="r" b="b" t="t" l="l"/>
+            <a:rect l="l" t="t" r="r" b="b"/>
             <a:pathLst>
-              <a:path h="7103695" w="6584800">
+              <a:path w="9459549" h="5711202">
                 <a:moveTo>
                   <a:pt x="0" y="0"/>
                 </a:moveTo>
                 <a:lnTo>
-                  <a:pt x="6584800" y="0"/>
-                </a:lnTo>
-                <a:lnTo>
-                  <a:pt x="6584800" y="7103695"/>
-                </a:lnTo>
-                <a:lnTo>
-                  <a:pt x="0" y="7103695"/>
+                  <a:pt x="9459548" y="0"/>
+                </a:lnTo>
+                <a:lnTo>
+                  <a:pt x="9459548" y="5711202"/>
+                </a:lnTo>
+                <a:lnTo>
+                  <a:pt x="0" y="5711202"/>
                 </a:lnTo>
                 <a:lnTo>
                   <a:pt x="0" y="0"/>
@@ -6098,102 +6212,43 @@
             </a:pathLst>
           </a:custGeom>
           <a:blipFill>
-            <a:blip r:embed="rId10">
-              <a:extLst>
-                <a:ext uri="{96DAC541-7B7A-43D3-8B79-37D633B846F1}">
-                  <asvg:svgBlip xmlns:asvg="http://schemas.microsoft.com/office/drawing/2016/SVG/main" r:embed="rId11"/>
-                </a:ext>
-              </a:extLst>
-            </a:blip>
+            <a:blip r:embed="rId7"/>
             <a:stretch>
-              <a:fillRect l="0" t="0" r="0" b="0"/>
+              <a:fillRect/>
             </a:stretch>
           </a:blipFill>
         </p:spPr>
       </p:sp>
       <p:sp>
         <p:nvSpPr>
-          <p:cNvPr name="Freeform 9" id="9"/>
-          <p:cNvSpPr/>
-          <p:nvPr/>
-        </p:nvSpPr>
-        <p:spPr>
-          <a:xfrm flipH="false" flipV="false" rot="-3055627">
-            <a:off x="13192640" y="-1482130"/>
-            <a:ext cx="2444779" cy="4309706"/>
-          </a:xfrm>
-          <a:custGeom>
-            <a:avLst/>
-            <a:gdLst/>
-            <a:ahLst/>
-            <a:cxnLst/>
-            <a:rect r="r" b="b" t="t" l="l"/>
-            <a:pathLst>
-              <a:path h="4309706" w="2444779">
-                <a:moveTo>
-                  <a:pt x="0" y="0"/>
-                </a:moveTo>
-                <a:lnTo>
-                  <a:pt x="2444778" y="0"/>
-                </a:lnTo>
-                <a:lnTo>
-                  <a:pt x="2444778" y="4309706"/>
-                </a:lnTo>
-                <a:lnTo>
-                  <a:pt x="0" y="4309706"/>
-                </a:lnTo>
-                <a:lnTo>
-                  <a:pt x="0" y="0"/>
-                </a:lnTo>
-                <a:close/>
-              </a:path>
-            </a:pathLst>
-          </a:custGeom>
-          <a:blipFill>
-            <a:blip r:embed="rId7">
-              <a:alphaModFix amt="38000"/>
-              <a:extLst>
-                <a:ext uri="{96DAC541-7B7A-43D3-8B79-37D633B846F1}">
-                  <asvg:svgBlip xmlns:asvg="http://schemas.microsoft.com/office/drawing/2016/SVG/main" r:embed="rId8"/>
-                </a:ext>
-              </a:extLst>
-            </a:blip>
-            <a:stretch>
-              <a:fillRect l="0" t="0" r="0" b="0"/>
-            </a:stretch>
-          </a:blipFill>
-        </p:spPr>
-      </p:sp>
-      <p:sp>
-        <p:nvSpPr>
-          <p:cNvPr name="TextBox 10" id="10"/>
-          <p:cNvSpPr txBox="true"/>
-          <p:nvPr/>
-        </p:nvSpPr>
-        <p:spPr>
-          <a:xfrm rot="0">
-            <a:off x="4251698" y="2364636"/>
-            <a:ext cx="9692596" cy="355189"/>
+          <p:cNvPr id="11" name="TextBox 11"/>
+          <p:cNvSpPr txBox="1"/>
+          <p:nvPr/>
+        </p:nvSpPr>
+        <p:spPr>
+          <a:xfrm>
+            <a:off x="2815287" y="2201975"/>
+            <a:ext cx="12657426" cy="446807"/>
           </a:xfrm>
           <a:prstGeom prst="rect">
             <a:avLst/>
           </a:prstGeom>
         </p:spPr>
         <p:txBody>
-          <a:bodyPr anchor="t" rtlCol="false" tIns="0" lIns="0" bIns="0" rIns="0">
+          <a:bodyPr lIns="0" tIns="0" rIns="0" bIns="0" rtlCol="0" anchor="t">
             <a:spAutoFit/>
           </a:bodyPr>
           <a:lstStyle/>
           <a:p>
-            <a:pPr algn="l" marL="462283" indent="-231141" lvl="1">
+            <a:pPr marL="574115" lvl="1" indent="-287057" algn="ctr">
               <a:lnSpc>
-                <a:spcPts val="2997"/>
+                <a:spcPts val="3722"/>
               </a:lnSpc>
               <a:buFont typeface="Arial"/>
               <a:buChar char="•"/>
             </a:pPr>
             <a:r>
-              <a:rPr lang="en-US" sz="2141" spc="23">
+              <a:rPr lang="en-US" sz="2659" spc="29">
                 <a:solidFill>
                   <a:srgbClr val="000000"/>
                 </a:solidFill>
@@ -6202,56 +6257,10 @@
                 <a:cs typeface="DM Sans"/>
                 <a:sym typeface="DM Sans"/>
               </a:rPr>
-              <a:t>Overall, which fungicide provides us with the highest yield of corn?</a:t>
+              <a:t>Overall, which fungicide treats the highest amount of diseases/fungi?</a:t>
             </a:r>
           </a:p>
         </p:txBody>
-      </p:sp>
-      <p:sp>
-        <p:nvSpPr>
-          <p:cNvPr name="Freeform 11" id="11"/>
-          <p:cNvSpPr/>
-          <p:nvPr/>
-        </p:nvSpPr>
-        <p:spPr>
-          <a:xfrm flipH="false" flipV="false" rot="0">
-            <a:off x="3969139" y="2929633"/>
-            <a:ext cx="10349722" cy="6481514"/>
-          </a:xfrm>
-          <a:custGeom>
-            <a:avLst/>
-            <a:gdLst/>
-            <a:ahLst/>
-            <a:cxnLst/>
-            <a:rect r="r" b="b" t="t" l="l"/>
-            <a:pathLst>
-              <a:path h="6481514" w="10349722">
-                <a:moveTo>
-                  <a:pt x="0" y="0"/>
-                </a:moveTo>
-                <a:lnTo>
-                  <a:pt x="10349722" y="0"/>
-                </a:lnTo>
-                <a:lnTo>
-                  <a:pt x="10349722" y="6481513"/>
-                </a:lnTo>
-                <a:lnTo>
-                  <a:pt x="0" y="6481513"/>
-                </a:lnTo>
-                <a:lnTo>
-                  <a:pt x="0" y="0"/>
-                </a:lnTo>
-                <a:close/>
-              </a:path>
-            </a:pathLst>
-          </a:custGeom>
-          <a:blipFill>
-            <a:blip r:embed="rId12"/>
-            <a:stretch>
-              <a:fillRect l="0" t="0" r="0" b="0"/>
-            </a:stretch>
-          </a:blipFill>
-        </p:spPr>
       </p:sp>
     </p:spTree>
   </p:cSld>
@@ -6262,13 +6271,14 @@
 </file>
 
 <file path=ppt/slides/slide7.xml><?xml version="1.0" encoding="utf-8"?>
-<p:sld xmlns:p="http://schemas.openxmlformats.org/presentationml/2006/main" xmlns:a="http://schemas.openxmlformats.org/drawingml/2006/main" xmlns:r="http://schemas.openxmlformats.org/officeDocument/2006/relationships">
+<p:sld xmlns:a="http://schemas.openxmlformats.org/drawingml/2006/main" xmlns:r="http://schemas.openxmlformats.org/officeDocument/2006/relationships" xmlns:p="http://schemas.openxmlformats.org/presentationml/2006/main">
   <p:cSld>
     <p:bg>
       <p:bgPr>
         <a:solidFill>
           <a:srgbClr val="FEF6F3"/>
         </a:solidFill>
+        <a:effectLst/>
       </p:bgPr>
     </p:bg>
     <p:spTree>
@@ -6287,12 +6297,12 @@
       </p:grpSpPr>
       <p:sp>
         <p:nvSpPr>
-          <p:cNvPr name="TextBox 2" id="2"/>
-          <p:cNvSpPr txBox="true"/>
-          <p:nvPr/>
-        </p:nvSpPr>
-        <p:spPr>
-          <a:xfrm rot="0">
+          <p:cNvPr id="2" name="TextBox 2"/>
+          <p:cNvSpPr txBox="1"/>
+          <p:nvPr/>
+        </p:nvSpPr>
+        <p:spPr>
+          <a:xfrm>
             <a:off x="5871030" y="1175559"/>
             <a:ext cx="6545941" cy="895324"/>
           </a:xfrm>
@@ -6301,7 +6311,7 @@
           </a:prstGeom>
         </p:spPr>
         <p:txBody>
-          <a:bodyPr anchor="t" rtlCol="false" tIns="0" lIns="0" bIns="0" rIns="0">
+          <a:bodyPr lIns="0" tIns="0" rIns="0" bIns="0" rtlCol="0" anchor="t">
             <a:spAutoFit/>
           </a:bodyPr>
           <a:lstStyle/>
@@ -6328,34 +6338,34 @@
       </p:sp>
       <p:sp>
         <p:nvSpPr>
-          <p:cNvPr name="Freeform 3" id="3"/>
+          <p:cNvPr id="3" name="Freeform 3"/>
           <p:cNvSpPr/>
           <p:nvPr/>
         </p:nvSpPr>
         <p:spPr>
-          <a:xfrm flipH="false" flipV="false" rot="0">
-            <a:off x="15437201" y="5168917"/>
-            <a:ext cx="4096029" cy="5968712"/>
+          <a:xfrm rot="1128197">
+            <a:off x="-3432716" y="3242221"/>
+            <a:ext cx="5568916" cy="8114996"/>
           </a:xfrm>
           <a:custGeom>
             <a:avLst/>
             <a:gdLst/>
             <a:ahLst/>
             <a:cxnLst/>
-            <a:rect r="r" b="b" t="t" l="l"/>
+            <a:rect l="l" t="t" r="r" b="b"/>
             <a:pathLst>
-              <a:path h="5968712" w="4096029">
+              <a:path w="5568916" h="8114996">
                 <a:moveTo>
                   <a:pt x="0" y="0"/>
                 </a:moveTo>
                 <a:lnTo>
-                  <a:pt x="4096029" y="0"/>
-                </a:lnTo>
-                <a:lnTo>
-                  <a:pt x="4096029" y="5968712"/>
-                </a:lnTo>
-                <a:lnTo>
-                  <a:pt x="0" y="5968712"/>
+                  <a:pt x="5568916" y="0"/>
+                </a:lnTo>
+                <a:lnTo>
+                  <a:pt x="5568916" y="8114997"/>
+                </a:lnTo>
+                <a:lnTo>
+                  <a:pt x="0" y="8114997"/>
                 </a:lnTo>
                 <a:lnTo>
                   <a:pt x="0" y="0"/>
@@ -6367,51 +6377,103 @@
           <a:blipFill>
             <a:blip r:embed="rId2"/>
             <a:stretch>
-              <a:fillRect l="0" t="0" r="0" b="0"/>
+              <a:fillRect/>
             </a:stretch>
           </a:blipFill>
         </p:spPr>
       </p:sp>
       <p:sp>
         <p:nvSpPr>
-          <p:cNvPr name="Freeform 4" id="4"/>
+          <p:cNvPr id="4" name="Freeform 4"/>
           <p:cNvSpPr/>
           <p:nvPr/>
         </p:nvSpPr>
         <p:spPr>
-          <a:xfrm flipH="false" flipV="false" rot="0">
-            <a:off x="15192561" y="7993454"/>
-            <a:ext cx="3095439" cy="2515748"/>
+          <a:xfrm flipH="1">
+            <a:off x="13815563" y="5647976"/>
+            <a:ext cx="6085715" cy="5198895"/>
           </a:xfrm>
           <a:custGeom>
             <a:avLst/>
             <a:gdLst/>
             <a:ahLst/>
             <a:cxnLst/>
-            <a:rect r="r" b="b" t="t" l="l"/>
+            <a:rect l="l" t="t" r="r" b="b"/>
             <a:pathLst>
-              <a:path h="2515748" w="3095439">
+              <a:path w="6085715" h="5198895">
                 <a:moveTo>
-                  <a:pt x="0" y="0"/>
+                  <a:pt x="6085715" y="0"/>
                 </a:moveTo>
                 <a:lnTo>
-                  <a:pt x="3095439" y="0"/>
-                </a:lnTo>
-                <a:lnTo>
-                  <a:pt x="3095439" y="2515748"/>
-                </a:lnTo>
-                <a:lnTo>
-                  <a:pt x="0" y="2515748"/>
-                </a:lnTo>
-                <a:lnTo>
-                  <a:pt x="0" y="0"/>
+                  <a:pt x="0" y="0"/>
+                </a:lnTo>
+                <a:lnTo>
+                  <a:pt x="0" y="5198894"/>
+                </a:lnTo>
+                <a:lnTo>
+                  <a:pt x="6085715" y="5198894"/>
+                </a:lnTo>
+                <a:lnTo>
+                  <a:pt x="6085715" y="0"/>
                 </a:lnTo>
                 <a:close/>
               </a:path>
             </a:pathLst>
           </a:custGeom>
           <a:blipFill>
-            <a:blip r:embed="rId3">
+            <a:blip>
+              <a:extLst>
+                <a:ext uri="{96DAC541-7B7A-43D3-8B79-37D633B846F1}">
+                  <asvg:svgBlip xmlns:asvg="http://schemas.microsoft.com/office/drawing/2016/SVG/main" r:embed="rId3"/>
+                </a:ext>
+              </a:extLst>
+            </a:blip>
+            <a:stretch>
+              <a:fillRect/>
+            </a:stretch>
+          </a:blipFill>
+        </p:spPr>
+      </p:sp>
+      <p:sp>
+        <p:nvSpPr>
+          <p:cNvPr id="5" name="Freeform 5"/>
+          <p:cNvSpPr/>
+          <p:nvPr/>
+        </p:nvSpPr>
+        <p:spPr>
+          <a:xfrm>
+            <a:off x="15192561" y="8153273"/>
+            <a:ext cx="3095439" cy="2515748"/>
+          </a:xfrm>
+          <a:custGeom>
+            <a:avLst/>
+            <a:gdLst/>
+            <a:ahLst/>
+            <a:cxnLst/>
+            <a:rect l="l" t="t" r="r" b="b"/>
+            <a:pathLst>
+              <a:path w="3095439" h="2515748">
+                <a:moveTo>
+                  <a:pt x="0" y="0"/>
+                </a:moveTo>
+                <a:lnTo>
+                  <a:pt x="3095439" y="0"/>
+                </a:lnTo>
+                <a:lnTo>
+                  <a:pt x="3095439" y="2515747"/>
+                </a:lnTo>
+                <a:lnTo>
+                  <a:pt x="0" y="2515747"/>
+                </a:lnTo>
+                <a:lnTo>
+                  <a:pt x="0" y="0"/>
+                </a:lnTo>
+                <a:close/>
+              </a:path>
+            </a:pathLst>
+          </a:custGeom>
+          <a:blipFill>
+            <a:blip>
               <a:extLst>
                 <a:ext uri="{96DAC541-7B7A-43D3-8B79-37D633B846F1}">
                   <asvg:svgBlip xmlns:asvg="http://schemas.microsoft.com/office/drawing/2016/SVG/main" r:embed="rId4"/>
@@ -6419,20 +6481,20 @@
               </a:extLst>
             </a:blip>
             <a:stretch>
-              <a:fillRect l="0" t="0" r="0" b="0"/>
+              <a:fillRect/>
             </a:stretch>
           </a:blipFill>
         </p:spPr>
       </p:sp>
       <p:sp>
         <p:nvSpPr>
-          <p:cNvPr name="Freeform 5" id="5"/>
+          <p:cNvPr id="6" name="Freeform 6"/>
           <p:cNvSpPr/>
           <p:nvPr/>
         </p:nvSpPr>
         <p:spPr>
-          <a:xfrm flipH="false" flipV="false" rot="6309934">
-            <a:off x="-706287" y="2736981"/>
+          <a:xfrm rot="6309934">
+            <a:off x="-413824" y="-1482130"/>
             <a:ext cx="2444779" cy="4309706"/>
           </a:xfrm>
           <a:custGeom>
@@ -6440,9 +6502,9 @@
             <a:gdLst/>
             <a:ahLst/>
             <a:cxnLst/>
-            <a:rect r="r" b="b" t="t" l="l"/>
+            <a:rect l="l" t="t" r="r" b="b"/>
             <a:pathLst>
-              <a:path h="4309706" w="2444779">
+              <a:path w="2444779" h="4309706">
                 <a:moveTo>
                   <a:pt x="0" y="0"/>
                 </a:moveTo>
@@ -6450,10 +6512,10 @@
                   <a:pt x="2444779" y="0"/>
                 </a:lnTo>
                 <a:lnTo>
-                  <a:pt x="2444779" y="4309707"/>
-                </a:lnTo>
-                <a:lnTo>
-                  <a:pt x="0" y="4309707"/>
+                  <a:pt x="2444779" y="4309706"/>
+                </a:lnTo>
+                <a:lnTo>
+                  <a:pt x="0" y="4309706"/>
                 </a:lnTo>
                 <a:lnTo>
                   <a:pt x="0" y="0"/>
@@ -6463,29 +6525,29 @@
             </a:pathLst>
           </a:custGeom>
           <a:blipFill>
-            <a:blip r:embed="rId5">
+            <a:blip>
               <a:alphaModFix amt="38000"/>
               <a:extLst>
                 <a:ext uri="{96DAC541-7B7A-43D3-8B79-37D633B846F1}">
-                  <asvg:svgBlip xmlns:asvg="http://schemas.microsoft.com/office/drawing/2016/SVG/main" r:embed="rId6"/>
+                  <asvg:svgBlip xmlns:asvg="http://schemas.microsoft.com/office/drawing/2016/SVG/main" r:embed="rId5"/>
                 </a:ext>
               </a:extLst>
             </a:blip>
             <a:stretch>
-              <a:fillRect l="0" t="0" r="0" b="0"/>
+              <a:fillRect/>
             </a:stretch>
           </a:blipFill>
         </p:spPr>
       </p:sp>
       <p:sp>
         <p:nvSpPr>
-          <p:cNvPr name="Freeform 6" id="6"/>
+          <p:cNvPr id="7" name="Freeform 7"/>
           <p:cNvSpPr/>
           <p:nvPr/>
         </p:nvSpPr>
         <p:spPr>
-          <a:xfrm flipH="false" flipV="false" rot="0">
-            <a:off x="-1591031" y="-1137320"/>
+          <a:xfrm>
+            <a:off x="14900583" y="2070883"/>
             <a:ext cx="6774834" cy="3985579"/>
           </a:xfrm>
           <a:custGeom>
@@ -6493,9 +6555,9 @@
             <a:gdLst/>
             <a:ahLst/>
             <a:cxnLst/>
-            <a:rect r="r" b="b" t="t" l="l"/>
+            <a:rect l="l" t="t" r="r" b="b"/>
             <a:pathLst>
-              <a:path h="3985579" w="6774834">
+              <a:path w="6774834" h="3985579">
                 <a:moveTo>
                   <a:pt x="0" y="0"/>
                 </a:moveTo>
@@ -6516,22 +6578,22 @@
             </a:pathLst>
           </a:custGeom>
           <a:blipFill>
-            <a:blip r:embed="rId7"/>
+            <a:blip r:embed="rId6"/>
             <a:stretch>
-              <a:fillRect l="0" t="0" r="0" b="0"/>
+              <a:fillRect/>
             </a:stretch>
           </a:blipFill>
         </p:spPr>
       </p:sp>
       <p:sp>
         <p:nvSpPr>
-          <p:cNvPr name="Freeform 7" id="7"/>
+          <p:cNvPr id="8" name="Freeform 8"/>
           <p:cNvSpPr/>
           <p:nvPr/>
         </p:nvSpPr>
         <p:spPr>
-          <a:xfrm flipH="false" flipV="false" rot="943891">
-            <a:off x="-2171960" y="6735153"/>
+          <a:xfrm rot="-366772">
+            <a:off x="609721" y="7872240"/>
             <a:ext cx="6584800" cy="7103695"/>
           </a:xfrm>
           <a:custGeom>
@@ -6539,9 +6601,9 @@
             <a:gdLst/>
             <a:ahLst/>
             <a:cxnLst/>
-            <a:rect r="r" b="b" t="t" l="l"/>
+            <a:rect l="l" t="t" r="r" b="b"/>
             <a:pathLst>
-              <a:path h="7103695" w="6584800">
+              <a:path w="6584800" h="7103695">
                 <a:moveTo>
                   <a:pt x="0" y="0"/>
                 </a:moveTo>
@@ -6549,10 +6611,10 @@
                   <a:pt x="6584800" y="0"/>
                 </a:lnTo>
                 <a:lnTo>
-                  <a:pt x="6584800" y="7103694"/>
-                </a:lnTo>
-                <a:lnTo>
-                  <a:pt x="0" y="7103694"/>
+                  <a:pt x="6584800" y="7103695"/>
+                </a:lnTo>
+                <a:lnTo>
+                  <a:pt x="0" y="7103695"/>
                 </a:lnTo>
                 <a:lnTo>
                   <a:pt x="0" y="0"/>
@@ -6562,28 +6624,28 @@
             </a:pathLst>
           </a:custGeom>
           <a:blipFill>
-            <a:blip r:embed="rId8">
+            <a:blip>
               <a:extLst>
                 <a:ext uri="{96DAC541-7B7A-43D3-8B79-37D633B846F1}">
-                  <asvg:svgBlip xmlns:asvg="http://schemas.microsoft.com/office/drawing/2016/SVG/main" r:embed="rId9"/>
+                  <asvg:svgBlip xmlns:asvg="http://schemas.microsoft.com/office/drawing/2016/SVG/main" r:embed="rId7"/>
                 </a:ext>
               </a:extLst>
             </a:blip>
             <a:stretch>
-              <a:fillRect l="0" t="0" r="0" b="0"/>
+              <a:fillRect/>
             </a:stretch>
           </a:blipFill>
         </p:spPr>
       </p:sp>
       <p:sp>
         <p:nvSpPr>
-          <p:cNvPr name="Freeform 8" id="8"/>
+          <p:cNvPr id="9" name="Freeform 9"/>
           <p:cNvSpPr/>
           <p:nvPr/>
         </p:nvSpPr>
         <p:spPr>
-          <a:xfrm flipH="false" flipV="false" rot="-3055627">
-            <a:off x="12099560" y="-984956"/>
+          <a:xfrm rot="-3055627">
+            <a:off x="13192640" y="-1482130"/>
             <a:ext cx="2444779" cy="4309706"/>
           </a:xfrm>
           <a:custGeom>
@@ -6591,20 +6653,20 @@
             <a:gdLst/>
             <a:ahLst/>
             <a:cxnLst/>
-            <a:rect r="r" b="b" t="t" l="l"/>
+            <a:rect l="l" t="t" r="r" b="b"/>
             <a:pathLst>
-              <a:path h="4309706" w="2444779">
+              <a:path w="2444779" h="4309706">
                 <a:moveTo>
                   <a:pt x="0" y="0"/>
                 </a:moveTo>
                 <a:lnTo>
-                  <a:pt x="2444779" y="0"/>
-                </a:lnTo>
-                <a:lnTo>
-                  <a:pt x="2444779" y="4309707"/>
-                </a:lnTo>
-                <a:lnTo>
-                  <a:pt x="0" y="4309707"/>
+                  <a:pt x="2444778" y="0"/>
+                </a:lnTo>
+                <a:lnTo>
+                  <a:pt x="2444778" y="4309706"/>
+                </a:lnTo>
+                <a:lnTo>
+                  <a:pt x="0" y="4309706"/>
                 </a:lnTo>
                 <a:lnTo>
                   <a:pt x="0" y="0"/>
@@ -6614,149 +6676,50 @@
             </a:pathLst>
           </a:custGeom>
           <a:blipFill>
-            <a:blip r:embed="rId5">
+            <a:blip>
               <a:alphaModFix amt="38000"/>
               <a:extLst>
                 <a:ext uri="{96DAC541-7B7A-43D3-8B79-37D633B846F1}">
-                  <asvg:svgBlip xmlns:asvg="http://schemas.microsoft.com/office/drawing/2016/SVG/main" r:embed="rId6"/>
+                  <asvg:svgBlip xmlns:asvg="http://schemas.microsoft.com/office/drawing/2016/SVG/main" r:embed="rId5"/>
                 </a:ext>
               </a:extLst>
             </a:blip>
             <a:stretch>
-              <a:fillRect l="0" t="0" r="0" b="0"/>
+              <a:fillRect/>
             </a:stretch>
           </a:blipFill>
         </p:spPr>
       </p:sp>
       <p:sp>
         <p:nvSpPr>
-          <p:cNvPr name="Freeform 9" id="9"/>
-          <p:cNvSpPr/>
-          <p:nvPr/>
-        </p:nvSpPr>
-        <p:spPr>
-          <a:xfrm flipH="false" flipV="false" rot="6309934">
-            <a:off x="9122475" y="8132147"/>
-            <a:ext cx="2444779" cy="4309706"/>
-          </a:xfrm>
-          <a:custGeom>
-            <a:avLst/>
-            <a:gdLst/>
-            <a:ahLst/>
-            <a:cxnLst/>
-            <a:rect r="r" b="b" t="t" l="l"/>
-            <a:pathLst>
-              <a:path h="4309706" w="2444779">
-                <a:moveTo>
-                  <a:pt x="0" y="0"/>
-                </a:moveTo>
-                <a:lnTo>
-                  <a:pt x="2444779" y="0"/>
-                </a:lnTo>
-                <a:lnTo>
-                  <a:pt x="2444779" y="4309706"/>
-                </a:lnTo>
-                <a:lnTo>
-                  <a:pt x="0" y="4309706"/>
-                </a:lnTo>
-                <a:lnTo>
-                  <a:pt x="0" y="0"/>
-                </a:lnTo>
-                <a:close/>
-              </a:path>
-            </a:pathLst>
-          </a:custGeom>
-          <a:blipFill>
-            <a:blip r:embed="rId5">
-              <a:alphaModFix amt="38000"/>
-              <a:extLst>
-                <a:ext uri="{96DAC541-7B7A-43D3-8B79-37D633B846F1}">
-                  <asvg:svgBlip xmlns:asvg="http://schemas.microsoft.com/office/drawing/2016/SVG/main" r:embed="rId6"/>
-                </a:ext>
-              </a:extLst>
-            </a:blip>
-            <a:stretch>
-              <a:fillRect l="0" t="0" r="0" b="0"/>
-            </a:stretch>
-          </a:blipFill>
-        </p:spPr>
-      </p:sp>
-      <p:sp>
-        <p:nvSpPr>
-          <p:cNvPr name="Freeform 10" id="10"/>
-          <p:cNvSpPr/>
-          <p:nvPr/>
-        </p:nvSpPr>
-        <p:spPr>
-          <a:xfrm flipH="false" flipV="false" rot="0">
-            <a:off x="4414226" y="2848259"/>
-            <a:ext cx="9459549" cy="5711202"/>
-          </a:xfrm>
-          <a:custGeom>
-            <a:avLst/>
-            <a:gdLst/>
-            <a:ahLst/>
-            <a:cxnLst/>
-            <a:rect r="r" b="b" t="t" l="l"/>
-            <a:pathLst>
-              <a:path h="5711202" w="9459549">
-                <a:moveTo>
-                  <a:pt x="0" y="0"/>
-                </a:moveTo>
-                <a:lnTo>
-                  <a:pt x="9459548" y="0"/>
-                </a:lnTo>
-                <a:lnTo>
-                  <a:pt x="9459548" y="5711202"/>
-                </a:lnTo>
-                <a:lnTo>
-                  <a:pt x="0" y="5711202"/>
-                </a:lnTo>
-                <a:lnTo>
-                  <a:pt x="0" y="0"/>
-                </a:lnTo>
-                <a:close/>
-              </a:path>
-            </a:pathLst>
-          </a:custGeom>
-          <a:blipFill>
-            <a:blip r:embed="rId10"/>
-            <a:stretch>
-              <a:fillRect l="0" t="0" r="0" b="0"/>
-            </a:stretch>
-          </a:blipFill>
-        </p:spPr>
-      </p:sp>
-      <p:sp>
-        <p:nvSpPr>
-          <p:cNvPr name="TextBox 11" id="11"/>
-          <p:cNvSpPr txBox="true"/>
-          <p:nvPr/>
-        </p:nvSpPr>
-        <p:spPr>
-          <a:xfrm rot="0">
-            <a:off x="2815287" y="2201975"/>
-            <a:ext cx="12657426" cy="446807"/>
+          <p:cNvPr id="10" name="TextBox 10"/>
+          <p:cNvSpPr txBox="1"/>
+          <p:nvPr/>
+        </p:nvSpPr>
+        <p:spPr>
+          <a:xfrm>
+            <a:off x="4251698" y="2364636"/>
+            <a:ext cx="9692596" cy="355189"/>
           </a:xfrm>
           <a:prstGeom prst="rect">
             <a:avLst/>
           </a:prstGeom>
         </p:spPr>
         <p:txBody>
-          <a:bodyPr anchor="t" rtlCol="false" tIns="0" lIns="0" bIns="0" rIns="0">
+          <a:bodyPr lIns="0" tIns="0" rIns="0" bIns="0" rtlCol="0" anchor="t">
             <a:spAutoFit/>
           </a:bodyPr>
           <a:lstStyle/>
           <a:p>
-            <a:pPr algn="ctr" marL="574115" indent="-287057" lvl="1">
+            <a:pPr marL="462283" lvl="1" indent="-231141" algn="l">
               <a:lnSpc>
-                <a:spcPts val="3722"/>
+                <a:spcPts val="2997"/>
               </a:lnSpc>
               <a:buFont typeface="Arial"/>
               <a:buChar char="•"/>
             </a:pPr>
             <a:r>
-              <a:rPr lang="en-US" sz="2659" spc="29">
+              <a:rPr lang="en-US" sz="2141" spc="23">
                 <a:solidFill>
                   <a:srgbClr val="000000"/>
                 </a:solidFill>
@@ -6765,10 +6728,56 @@
                 <a:cs typeface="DM Sans"/>
                 <a:sym typeface="DM Sans"/>
               </a:rPr>
-              <a:t>Overall, which fungicide treats the highest amount of diseases/fungi?</a:t>
+              <a:t>Overall, which fungicide provides us with the highest yield of corn?</a:t>
             </a:r>
           </a:p>
         </p:txBody>
+      </p:sp>
+      <p:sp>
+        <p:nvSpPr>
+          <p:cNvPr id="11" name="Freeform 11"/>
+          <p:cNvSpPr/>
+          <p:nvPr/>
+        </p:nvSpPr>
+        <p:spPr>
+          <a:xfrm>
+            <a:off x="3969139" y="2929633"/>
+            <a:ext cx="10349722" cy="6481514"/>
+          </a:xfrm>
+          <a:custGeom>
+            <a:avLst/>
+            <a:gdLst/>
+            <a:ahLst/>
+            <a:cxnLst/>
+            <a:rect l="l" t="t" r="r" b="b"/>
+            <a:pathLst>
+              <a:path w="10349722" h="6481514">
+                <a:moveTo>
+                  <a:pt x="0" y="0"/>
+                </a:moveTo>
+                <a:lnTo>
+                  <a:pt x="10349722" y="0"/>
+                </a:lnTo>
+                <a:lnTo>
+                  <a:pt x="10349722" y="6481513"/>
+                </a:lnTo>
+                <a:lnTo>
+                  <a:pt x="0" y="6481513"/>
+                </a:lnTo>
+                <a:lnTo>
+                  <a:pt x="0" y="0"/>
+                </a:lnTo>
+                <a:close/>
+              </a:path>
+            </a:pathLst>
+          </a:custGeom>
+          <a:blipFill>
+            <a:blip r:embed="rId8"/>
+            <a:stretch>
+              <a:fillRect/>
+            </a:stretch>
+          </a:blipFill>
+        </p:spPr>
       </p:sp>
     </p:spTree>
   </p:cSld>
@@ -6779,13 +6788,14 @@
 </file>
 
 <file path=ppt/slides/slide8.xml><?xml version="1.0" encoding="utf-8"?>
-<p:sld xmlns:p="http://schemas.openxmlformats.org/presentationml/2006/main" xmlns:a="http://schemas.openxmlformats.org/drawingml/2006/main" xmlns:r="http://schemas.openxmlformats.org/officeDocument/2006/relationships">
+<p:sld xmlns:a="http://schemas.openxmlformats.org/drawingml/2006/main" xmlns:r="http://schemas.openxmlformats.org/officeDocument/2006/relationships" xmlns:p="http://schemas.openxmlformats.org/presentationml/2006/main">
   <p:cSld>
     <p:bg>
       <p:bgPr>
         <a:solidFill>
           <a:srgbClr val="FEF6F3"/>
         </a:solidFill>
+        <a:effectLst/>
       </p:bgPr>
     </p:bg>
     <p:spTree>
@@ -6804,12 +6814,12 @@
       </p:grpSpPr>
       <p:sp>
         <p:nvSpPr>
-          <p:cNvPr name="TextBox 2" id="2"/>
-          <p:cNvSpPr txBox="true"/>
-          <p:nvPr/>
-        </p:nvSpPr>
-        <p:spPr>
-          <a:xfrm rot="0">
+          <p:cNvPr id="2" name="TextBox 2"/>
+          <p:cNvSpPr txBox="1"/>
+          <p:nvPr/>
+        </p:nvSpPr>
+        <p:spPr>
+          <a:xfrm>
             <a:off x="5871030" y="4767275"/>
             <a:ext cx="6545941" cy="895324"/>
           </a:xfrm>
@@ -6818,7 +6828,7 @@
           </a:prstGeom>
         </p:spPr>
         <p:txBody>
-          <a:bodyPr anchor="t" rtlCol="false" tIns="0" lIns="0" bIns="0" rIns="0">
+          <a:bodyPr lIns="0" tIns="0" rIns="0" bIns="0" rtlCol="0" anchor="t">
             <a:spAutoFit/>
           </a:bodyPr>
           <a:lstStyle/>
@@ -6845,12 +6855,12 @@
       </p:sp>
       <p:sp>
         <p:nvSpPr>
-          <p:cNvPr name="Freeform 3" id="3"/>
+          <p:cNvPr id="3" name="Freeform 3"/>
           <p:cNvSpPr/>
           <p:nvPr/>
         </p:nvSpPr>
         <p:spPr>
-          <a:xfrm flipH="false" flipV="false" rot="0">
+          <a:xfrm>
             <a:off x="-122667" y="8153273"/>
             <a:ext cx="3095439" cy="2515748"/>
           </a:xfrm>
@@ -6859,9 +6869,9 @@
             <a:gdLst/>
             <a:ahLst/>
             <a:cxnLst/>
-            <a:rect r="r" b="b" t="t" l="l"/>
+            <a:rect l="l" t="t" r="r" b="b"/>
             <a:pathLst>
-              <a:path h="2515748" w="3095439">
+              <a:path w="3095439" h="2515748">
                 <a:moveTo>
                   <a:pt x="0" y="0"/>
                 </a:moveTo>
@@ -6882,7 +6892,59 @@
             </a:pathLst>
           </a:custGeom>
           <a:blipFill>
-            <a:blip r:embed="rId2">
+            <a:blip>
+              <a:extLst>
+                <a:ext uri="{96DAC541-7B7A-43D3-8B79-37D633B846F1}">
+                  <asvg:svgBlip xmlns:asvg="http://schemas.microsoft.com/office/drawing/2016/SVG/main" r:embed="rId2"/>
+                </a:ext>
+              </a:extLst>
+            </a:blip>
+            <a:stretch>
+              <a:fillRect/>
+            </a:stretch>
+          </a:blipFill>
+        </p:spPr>
+      </p:sp>
+      <p:sp>
+        <p:nvSpPr>
+          <p:cNvPr id="4" name="Freeform 4"/>
+          <p:cNvSpPr/>
+          <p:nvPr/>
+        </p:nvSpPr>
+        <p:spPr>
+          <a:xfrm>
+            <a:off x="15602321" y="5553825"/>
+            <a:ext cx="6085715" cy="5198895"/>
+          </a:xfrm>
+          <a:custGeom>
+            <a:avLst/>
+            <a:gdLst/>
+            <a:ahLst/>
+            <a:cxnLst/>
+            <a:rect l="l" t="t" r="r" b="b"/>
+            <a:pathLst>
+              <a:path w="6085715" h="5198895">
+                <a:moveTo>
+                  <a:pt x="0" y="0"/>
+                </a:moveTo>
+                <a:lnTo>
+                  <a:pt x="6085715" y="0"/>
+                </a:lnTo>
+                <a:lnTo>
+                  <a:pt x="6085715" y="5198895"/>
+                </a:lnTo>
+                <a:lnTo>
+                  <a:pt x="0" y="5198895"/>
+                </a:lnTo>
+                <a:lnTo>
+                  <a:pt x="0" y="0"/>
+                </a:lnTo>
+                <a:close/>
+              </a:path>
+            </a:pathLst>
+          </a:custGeom>
+          <a:blipFill>
+            <a:blip>
               <a:extLst>
                 <a:ext uri="{96DAC541-7B7A-43D3-8B79-37D633B846F1}">
                   <asvg:svgBlip xmlns:asvg="http://schemas.microsoft.com/office/drawing/2016/SVG/main" r:embed="rId3"/>
@@ -6890,41 +6952,41 @@
               </a:extLst>
             </a:blip>
             <a:stretch>
-              <a:fillRect l="0" t="0" r="0" b="0"/>
+              <a:fillRect/>
             </a:stretch>
           </a:blipFill>
         </p:spPr>
       </p:sp>
       <p:sp>
         <p:nvSpPr>
-          <p:cNvPr name="Freeform 4" id="4"/>
+          <p:cNvPr id="5" name="Freeform 5"/>
           <p:cNvSpPr/>
           <p:nvPr/>
         </p:nvSpPr>
         <p:spPr>
-          <a:xfrm flipH="false" flipV="false" rot="0">
-            <a:off x="15602321" y="5553825"/>
-            <a:ext cx="6085715" cy="5198895"/>
+          <a:xfrm>
+            <a:off x="13451132" y="-1965167"/>
+            <a:ext cx="8842062" cy="4179884"/>
           </a:xfrm>
           <a:custGeom>
             <a:avLst/>
             <a:gdLst/>
             <a:ahLst/>
             <a:cxnLst/>
-            <a:rect r="r" b="b" t="t" l="l"/>
+            <a:rect l="l" t="t" r="r" b="b"/>
             <a:pathLst>
-              <a:path h="5198895" w="6085715">
+              <a:path w="8842062" h="4179884">
                 <a:moveTo>
                   <a:pt x="0" y="0"/>
                 </a:moveTo>
                 <a:lnTo>
-                  <a:pt x="6085715" y="0"/>
-                </a:lnTo>
-                <a:lnTo>
-                  <a:pt x="6085715" y="5198895"/>
-                </a:lnTo>
-                <a:lnTo>
-                  <a:pt x="0" y="5198895"/>
+                  <a:pt x="8842061" y="0"/>
+                </a:lnTo>
+                <a:lnTo>
+                  <a:pt x="8842061" y="4179883"/>
+                </a:lnTo>
+                <a:lnTo>
+                  <a:pt x="0" y="4179883"/>
                 </a:lnTo>
                 <a:lnTo>
                   <a:pt x="0" y="0"/>
@@ -6934,7 +6996,60 @@
             </a:pathLst>
           </a:custGeom>
           <a:blipFill>
-            <a:blip r:embed="rId4">
+            <a:blip>
+              <a:extLst>
+                <a:ext uri="{96DAC541-7B7A-43D3-8B79-37D633B846F1}">
+                  <asvg:svgBlip xmlns:asvg="http://schemas.microsoft.com/office/drawing/2016/SVG/main" r:embed="rId4"/>
+                </a:ext>
+              </a:extLst>
+            </a:blip>
+            <a:stretch>
+              <a:fillRect/>
+            </a:stretch>
+          </a:blipFill>
+        </p:spPr>
+      </p:sp>
+      <p:sp>
+        <p:nvSpPr>
+          <p:cNvPr id="6" name="Freeform 6"/>
+          <p:cNvSpPr/>
+          <p:nvPr/>
+        </p:nvSpPr>
+        <p:spPr>
+          <a:xfrm rot="6309934">
+            <a:off x="4327607" y="7256293"/>
+            <a:ext cx="2444779" cy="4309706"/>
+          </a:xfrm>
+          <a:custGeom>
+            <a:avLst/>
+            <a:gdLst/>
+            <a:ahLst/>
+            <a:cxnLst/>
+            <a:rect l="l" t="t" r="r" b="b"/>
+            <a:pathLst>
+              <a:path w="2444779" h="4309706">
+                <a:moveTo>
+                  <a:pt x="0" y="0"/>
+                </a:moveTo>
+                <a:lnTo>
+                  <a:pt x="2444778" y="0"/>
+                </a:lnTo>
+                <a:lnTo>
+                  <a:pt x="2444778" y="4309707"/>
+                </a:lnTo>
+                <a:lnTo>
+                  <a:pt x="0" y="4309707"/>
+                </a:lnTo>
+                <a:lnTo>
+                  <a:pt x="0" y="0"/>
+                </a:lnTo>
+                <a:close/>
+              </a:path>
+            </a:pathLst>
+          </a:custGeom>
+          <a:blipFill>
+            <a:blip>
+              <a:alphaModFix amt="38000"/>
               <a:extLst>
                 <a:ext uri="{96DAC541-7B7A-43D3-8B79-37D633B846F1}">
                   <asvg:svgBlip xmlns:asvg="http://schemas.microsoft.com/office/drawing/2016/SVG/main" r:embed="rId5"/>
@@ -6942,41 +7057,41 @@
               </a:extLst>
             </a:blip>
             <a:stretch>
-              <a:fillRect l="0" t="0" r="0" b="0"/>
+              <a:fillRect/>
             </a:stretch>
           </a:blipFill>
         </p:spPr>
       </p:sp>
       <p:sp>
         <p:nvSpPr>
-          <p:cNvPr name="Freeform 5" id="5"/>
+          <p:cNvPr id="7" name="Freeform 7"/>
           <p:cNvSpPr/>
           <p:nvPr/>
         </p:nvSpPr>
         <p:spPr>
-          <a:xfrm flipH="false" flipV="false" rot="0">
-            <a:off x="13451132" y="-1965167"/>
-            <a:ext cx="8842062" cy="4179884"/>
+          <a:xfrm>
+            <a:off x="-3387417" y="3875858"/>
+            <a:ext cx="6774834" cy="3985579"/>
           </a:xfrm>
           <a:custGeom>
             <a:avLst/>
             <a:gdLst/>
             <a:ahLst/>
             <a:cxnLst/>
-            <a:rect r="r" b="b" t="t" l="l"/>
+            <a:rect l="l" t="t" r="r" b="b"/>
             <a:pathLst>
-              <a:path h="4179884" w="8842062">
+              <a:path w="6774834" h="3985579">
                 <a:moveTo>
                   <a:pt x="0" y="0"/>
                 </a:moveTo>
                 <a:lnTo>
-                  <a:pt x="8842061" y="0"/>
-                </a:lnTo>
-                <a:lnTo>
-                  <a:pt x="8842061" y="4179883"/>
-                </a:lnTo>
-                <a:lnTo>
-                  <a:pt x="0" y="4179883"/>
+                  <a:pt x="6774834" y="0"/>
+                </a:lnTo>
+                <a:lnTo>
+                  <a:pt x="6774834" y="3985579"/>
+                </a:lnTo>
+                <a:lnTo>
+                  <a:pt x="0" y="3985579"/>
                 </a:lnTo>
                 <a:lnTo>
                   <a:pt x="0" y="0"/>
@@ -6986,7 +7101,53 @@
             </a:pathLst>
           </a:custGeom>
           <a:blipFill>
-            <a:blip r:embed="rId6">
+            <a:blip r:embed="rId6"/>
+            <a:stretch>
+              <a:fillRect/>
+            </a:stretch>
+          </a:blipFill>
+        </p:spPr>
+      </p:sp>
+      <p:sp>
+        <p:nvSpPr>
+          <p:cNvPr id="8" name="Freeform 8"/>
+          <p:cNvSpPr/>
+          <p:nvPr/>
+        </p:nvSpPr>
+        <p:spPr>
+          <a:xfrm rot="-2157287">
+            <a:off x="11099364" y="7934387"/>
+            <a:ext cx="6584800" cy="7103695"/>
+          </a:xfrm>
+          <a:custGeom>
+            <a:avLst/>
+            <a:gdLst/>
+            <a:ahLst/>
+            <a:cxnLst/>
+            <a:rect l="l" t="t" r="r" b="b"/>
+            <a:pathLst>
+              <a:path w="6584800" h="7103695">
+                <a:moveTo>
+                  <a:pt x="0" y="0"/>
+                </a:moveTo>
+                <a:lnTo>
+                  <a:pt x="6584800" y="0"/>
+                </a:lnTo>
+                <a:lnTo>
+                  <a:pt x="6584800" y="7103695"/>
+                </a:lnTo>
+                <a:lnTo>
+                  <a:pt x="0" y="7103695"/>
+                </a:lnTo>
+                <a:lnTo>
+                  <a:pt x="0" y="0"/>
+                </a:lnTo>
+                <a:close/>
+              </a:path>
+            </a:pathLst>
+          </a:custGeom>
+          <a:blipFill>
+            <a:blip>
               <a:extLst>
                 <a:ext uri="{96DAC541-7B7A-43D3-8B79-37D633B846F1}">
                   <asvg:svgBlip xmlns:asvg="http://schemas.microsoft.com/office/drawing/2016/SVG/main" r:embed="rId7"/>
@@ -6994,20 +7155,20 @@
               </a:extLst>
             </a:blip>
             <a:stretch>
-              <a:fillRect l="0" t="0" r="0" b="0"/>
+              <a:fillRect/>
             </a:stretch>
           </a:blipFill>
         </p:spPr>
       </p:sp>
       <p:sp>
         <p:nvSpPr>
-          <p:cNvPr name="Freeform 6" id="6"/>
+          <p:cNvPr id="9" name="Freeform 9"/>
           <p:cNvSpPr/>
           <p:nvPr/>
         </p:nvSpPr>
         <p:spPr>
-          <a:xfrm flipH="false" flipV="false" rot="6309934">
-            <a:off x="4327607" y="7256293"/>
+          <a:xfrm rot="-3055627">
+            <a:off x="12099560" y="-984956"/>
             <a:ext cx="2444779" cy="4309706"/>
           </a:xfrm>
           <a:custGeom>
@@ -7015,17 +7176,17 @@
             <a:gdLst/>
             <a:ahLst/>
             <a:cxnLst/>
-            <a:rect r="r" b="b" t="t" l="l"/>
+            <a:rect l="l" t="t" r="r" b="b"/>
             <a:pathLst>
-              <a:path h="4309706" w="2444779">
+              <a:path w="2444779" h="4309706">
                 <a:moveTo>
                   <a:pt x="0" y="0"/>
                 </a:moveTo>
                 <a:lnTo>
-                  <a:pt x="2444778" y="0"/>
-                </a:lnTo>
-                <a:lnTo>
-                  <a:pt x="2444778" y="4309707"/>
+                  <a:pt x="2444779" y="0"/>
+                </a:lnTo>
+                <a:lnTo>
+                  <a:pt x="2444779" y="4309707"/>
                 </a:lnTo>
                 <a:lnTo>
                   <a:pt x="0" y="4309707"/>
@@ -7038,50 +7199,50 @@
             </a:pathLst>
           </a:custGeom>
           <a:blipFill>
-            <a:blip r:embed="rId8">
+            <a:blip>
               <a:alphaModFix amt="38000"/>
               <a:extLst>
                 <a:ext uri="{96DAC541-7B7A-43D3-8B79-37D633B846F1}">
-                  <asvg:svgBlip xmlns:asvg="http://schemas.microsoft.com/office/drawing/2016/SVG/main" r:embed="rId9"/>
+                  <asvg:svgBlip xmlns:asvg="http://schemas.microsoft.com/office/drawing/2016/SVG/main" r:embed="rId5"/>
                 </a:ext>
               </a:extLst>
             </a:blip>
             <a:stretch>
-              <a:fillRect l="0" t="0" r="0" b="0"/>
+              <a:fillRect/>
             </a:stretch>
           </a:blipFill>
         </p:spPr>
       </p:sp>
       <p:sp>
         <p:nvSpPr>
-          <p:cNvPr name="Freeform 7" id="7"/>
+          <p:cNvPr id="10" name="Freeform 10"/>
           <p:cNvSpPr/>
           <p:nvPr/>
         </p:nvSpPr>
         <p:spPr>
-          <a:xfrm flipH="false" flipV="false" rot="0">
-            <a:off x="-3387417" y="3875858"/>
-            <a:ext cx="6774834" cy="3985579"/>
+          <a:xfrm rot="-3055627">
+            <a:off x="-693009" y="-1412593"/>
+            <a:ext cx="2444779" cy="4309706"/>
           </a:xfrm>
           <a:custGeom>
             <a:avLst/>
             <a:gdLst/>
             <a:ahLst/>
             <a:cxnLst/>
-            <a:rect r="r" b="b" t="t" l="l"/>
+            <a:rect l="l" t="t" r="r" b="b"/>
             <a:pathLst>
-              <a:path h="3985579" w="6774834">
+              <a:path w="2444779" h="4309706">
                 <a:moveTo>
                   <a:pt x="0" y="0"/>
                 </a:moveTo>
                 <a:lnTo>
-                  <a:pt x="6774834" y="0"/>
-                </a:lnTo>
-                <a:lnTo>
-                  <a:pt x="6774834" y="3985579"/>
-                </a:lnTo>
-                <a:lnTo>
-                  <a:pt x="0" y="3985579"/>
+                  <a:pt x="2444779" y="0"/>
+                </a:lnTo>
+                <a:lnTo>
+                  <a:pt x="2444779" y="4309707"/>
+                </a:lnTo>
+                <a:lnTo>
+                  <a:pt x="0" y="4309707"/>
                 </a:lnTo>
                 <a:lnTo>
                   <a:pt x="0" y="0"/>
@@ -7091,167 +7252,16 @@
             </a:pathLst>
           </a:custGeom>
           <a:blipFill>
-            <a:blip r:embed="rId10"/>
-            <a:stretch>
-              <a:fillRect l="0" t="0" r="0" b="0"/>
-            </a:stretch>
-          </a:blipFill>
-        </p:spPr>
-      </p:sp>
-      <p:sp>
-        <p:nvSpPr>
-          <p:cNvPr name="Freeform 8" id="8"/>
-          <p:cNvSpPr/>
-          <p:nvPr/>
-        </p:nvSpPr>
-        <p:spPr>
-          <a:xfrm flipH="false" flipV="false" rot="-2157287">
-            <a:off x="11099364" y="7934387"/>
-            <a:ext cx="6584800" cy="7103695"/>
-          </a:xfrm>
-          <a:custGeom>
-            <a:avLst/>
-            <a:gdLst/>
-            <a:ahLst/>
-            <a:cxnLst/>
-            <a:rect r="r" b="b" t="t" l="l"/>
-            <a:pathLst>
-              <a:path h="7103695" w="6584800">
-                <a:moveTo>
-                  <a:pt x="0" y="0"/>
-                </a:moveTo>
-                <a:lnTo>
-                  <a:pt x="6584800" y="0"/>
-                </a:lnTo>
-                <a:lnTo>
-                  <a:pt x="6584800" y="7103695"/>
-                </a:lnTo>
-                <a:lnTo>
-                  <a:pt x="0" y="7103695"/>
-                </a:lnTo>
-                <a:lnTo>
-                  <a:pt x="0" y="0"/>
-                </a:lnTo>
-                <a:close/>
-              </a:path>
-            </a:pathLst>
-          </a:custGeom>
-          <a:blipFill>
-            <a:blip r:embed="rId11">
+            <a:blip>
+              <a:alphaModFix amt="38000"/>
               <a:extLst>
                 <a:ext uri="{96DAC541-7B7A-43D3-8B79-37D633B846F1}">
-                  <asvg:svgBlip xmlns:asvg="http://schemas.microsoft.com/office/drawing/2016/SVG/main" r:embed="rId12"/>
+                  <asvg:svgBlip xmlns:asvg="http://schemas.microsoft.com/office/drawing/2016/SVG/main" r:embed="rId5"/>
                 </a:ext>
               </a:extLst>
             </a:blip>
             <a:stretch>
-              <a:fillRect l="0" t="0" r="0" b="0"/>
-            </a:stretch>
-          </a:blipFill>
-        </p:spPr>
-      </p:sp>
-      <p:sp>
-        <p:nvSpPr>
-          <p:cNvPr name="Freeform 9" id="9"/>
-          <p:cNvSpPr/>
-          <p:nvPr/>
-        </p:nvSpPr>
-        <p:spPr>
-          <a:xfrm flipH="false" flipV="false" rot="-3055627">
-            <a:off x="12099560" y="-984956"/>
-            <a:ext cx="2444779" cy="4309706"/>
-          </a:xfrm>
-          <a:custGeom>
-            <a:avLst/>
-            <a:gdLst/>
-            <a:ahLst/>
-            <a:cxnLst/>
-            <a:rect r="r" b="b" t="t" l="l"/>
-            <a:pathLst>
-              <a:path h="4309706" w="2444779">
-                <a:moveTo>
-                  <a:pt x="0" y="0"/>
-                </a:moveTo>
-                <a:lnTo>
-                  <a:pt x="2444779" y="0"/>
-                </a:lnTo>
-                <a:lnTo>
-                  <a:pt x="2444779" y="4309707"/>
-                </a:lnTo>
-                <a:lnTo>
-                  <a:pt x="0" y="4309707"/>
-                </a:lnTo>
-                <a:lnTo>
-                  <a:pt x="0" y="0"/>
-                </a:lnTo>
-                <a:close/>
-              </a:path>
-            </a:pathLst>
-          </a:custGeom>
-          <a:blipFill>
-            <a:blip r:embed="rId8">
-              <a:alphaModFix amt="38000"/>
-              <a:extLst>
-                <a:ext uri="{96DAC541-7B7A-43D3-8B79-37D633B846F1}">
-                  <asvg:svgBlip xmlns:asvg="http://schemas.microsoft.com/office/drawing/2016/SVG/main" r:embed="rId9"/>
-                </a:ext>
-              </a:extLst>
-            </a:blip>
-            <a:stretch>
-              <a:fillRect l="0" t="0" r="0" b="0"/>
-            </a:stretch>
-          </a:blipFill>
-        </p:spPr>
-      </p:sp>
-      <p:sp>
-        <p:nvSpPr>
-          <p:cNvPr name="Freeform 10" id="10"/>
-          <p:cNvSpPr/>
-          <p:nvPr/>
-        </p:nvSpPr>
-        <p:spPr>
-          <a:xfrm flipH="false" flipV="false" rot="-3055627">
-            <a:off x="-693009" y="-1412593"/>
-            <a:ext cx="2444779" cy="4309706"/>
-          </a:xfrm>
-          <a:custGeom>
-            <a:avLst/>
-            <a:gdLst/>
-            <a:ahLst/>
-            <a:cxnLst/>
-            <a:rect r="r" b="b" t="t" l="l"/>
-            <a:pathLst>
-              <a:path h="4309706" w="2444779">
-                <a:moveTo>
-                  <a:pt x="0" y="0"/>
-                </a:moveTo>
-                <a:lnTo>
-                  <a:pt x="2444779" y="0"/>
-                </a:lnTo>
-                <a:lnTo>
-                  <a:pt x="2444779" y="4309707"/>
-                </a:lnTo>
-                <a:lnTo>
-                  <a:pt x="0" y="4309707"/>
-                </a:lnTo>
-                <a:lnTo>
-                  <a:pt x="0" y="0"/>
-                </a:lnTo>
-                <a:close/>
-              </a:path>
-            </a:pathLst>
-          </a:custGeom>
-          <a:blipFill>
-            <a:blip r:embed="rId8">
-              <a:alphaModFix amt="38000"/>
-              <a:extLst>
-                <a:ext uri="{96DAC541-7B7A-43D3-8B79-37D633B846F1}">
-                  <asvg:svgBlip xmlns:asvg="http://schemas.microsoft.com/office/drawing/2016/SVG/main" r:embed="rId9"/>
-                </a:ext>
-              </a:extLst>
-            </a:blip>
-            <a:stretch>
-              <a:fillRect l="0" t="0" r="0" b="0"/>
+              <a:fillRect/>
             </a:stretch>
           </a:blipFill>
         </p:spPr>
@@ -7265,13 +7275,14 @@
 </file>
 
 <file path=ppt/slides/slide9.xml><?xml version="1.0" encoding="utf-8"?>
-<p:sld xmlns:p="http://schemas.openxmlformats.org/presentationml/2006/main" xmlns:a="http://schemas.openxmlformats.org/drawingml/2006/main" xmlns:r="http://schemas.openxmlformats.org/officeDocument/2006/relationships">
+<p:sld xmlns:a="http://schemas.openxmlformats.org/drawingml/2006/main" xmlns:r="http://schemas.openxmlformats.org/officeDocument/2006/relationships" xmlns:p="http://schemas.openxmlformats.org/presentationml/2006/main">
   <p:cSld>
     <p:bg>
       <p:bgPr>
         <a:solidFill>
           <a:srgbClr val="FEF6F3"/>
         </a:solidFill>
+        <a:effectLst/>
       </p:bgPr>
     </p:bg>
     <p:spTree>
@@ -7290,12 +7301,12 @@
       </p:grpSpPr>
       <p:sp>
         <p:nvSpPr>
-          <p:cNvPr name="Freeform 2" id="2"/>
+          <p:cNvPr id="2" name="Freeform 2"/>
           <p:cNvSpPr/>
           <p:nvPr/>
         </p:nvSpPr>
         <p:spPr>
-          <a:xfrm flipH="false" flipV="false" rot="0">
+          <a:xfrm>
             <a:off x="-1591031" y="3162706"/>
             <a:ext cx="5647563" cy="8229600"/>
           </a:xfrm>
@@ -7304,9 +7315,9 @@
             <a:gdLst/>
             <a:ahLst/>
             <a:cxnLst/>
-            <a:rect r="r" b="b" t="t" l="l"/>
+            <a:rect l="l" t="t" r="r" b="b"/>
             <a:pathLst>
-              <a:path h="8229600" w="5647563">
+              <a:path w="5647563" h="8229600">
                 <a:moveTo>
                   <a:pt x="0" y="0"/>
                 </a:moveTo>
@@ -7329,19 +7340,19 @@
           <a:blipFill>
             <a:blip r:embed="rId2"/>
             <a:stretch>
-              <a:fillRect l="0" t="0" r="0" b="0"/>
+              <a:fillRect/>
             </a:stretch>
           </a:blipFill>
         </p:spPr>
       </p:sp>
       <p:sp>
         <p:nvSpPr>
-          <p:cNvPr name="TextBox 3" id="3"/>
-          <p:cNvSpPr txBox="true"/>
-          <p:nvPr/>
-        </p:nvSpPr>
-        <p:spPr>
-          <a:xfrm rot="0">
+          <p:cNvPr id="3" name="TextBox 3"/>
+          <p:cNvSpPr txBox="1"/>
+          <p:nvPr/>
+        </p:nvSpPr>
+        <p:spPr>
+          <a:xfrm>
             <a:off x="3346374" y="4086119"/>
             <a:ext cx="11595253" cy="2344052"/>
           </a:xfrm>
@@ -7350,7 +7361,7 @@
           </a:prstGeom>
         </p:spPr>
         <p:txBody>
-          <a:bodyPr anchor="t" rtlCol="false" tIns="0" lIns="0" bIns="0" rIns="0">
+          <a:bodyPr lIns="0" tIns="0" rIns="0" bIns="0" rtlCol="0" anchor="t">
             <a:spAutoFit/>
           </a:bodyPr>
           <a:lstStyle/>
@@ -7377,12 +7388,12 @@
       </p:sp>
       <p:sp>
         <p:nvSpPr>
-          <p:cNvPr name="Freeform 4" id="4"/>
+          <p:cNvPr id="4" name="Freeform 4"/>
           <p:cNvSpPr/>
           <p:nvPr/>
         </p:nvSpPr>
         <p:spPr>
-          <a:xfrm flipH="false" flipV="false" rot="0">
+          <a:xfrm>
             <a:off x="7570193" y="8939973"/>
             <a:ext cx="7315200" cy="3458095"/>
           </a:xfrm>
@@ -7391,9 +7402,9 @@
             <a:gdLst/>
             <a:ahLst/>
             <a:cxnLst/>
-            <a:rect r="r" b="b" t="t" l="l"/>
+            <a:rect l="l" t="t" r="r" b="b"/>
             <a:pathLst>
-              <a:path h="3458095" w="7315200">
+              <a:path w="7315200" h="3458095">
                 <a:moveTo>
                   <a:pt x="0" y="0"/>
                 </a:moveTo>
@@ -7414,8 +7425,60 @@
             </a:pathLst>
           </a:custGeom>
           <a:blipFill>
-            <a:blip r:embed="rId3">
+            <a:blip>
               <a:alphaModFix amt="37000"/>
+              <a:extLst>
+                <a:ext uri="{96DAC541-7B7A-43D3-8B79-37D633B846F1}">
+                  <asvg:svgBlip xmlns:asvg="http://schemas.microsoft.com/office/drawing/2016/SVG/main" r:embed="rId3"/>
+                </a:ext>
+              </a:extLst>
+            </a:blip>
+            <a:stretch>
+              <a:fillRect/>
+            </a:stretch>
+          </a:blipFill>
+        </p:spPr>
+      </p:sp>
+      <p:sp>
+        <p:nvSpPr>
+          <p:cNvPr id="5" name="Freeform 5"/>
+          <p:cNvSpPr/>
+          <p:nvPr/>
+        </p:nvSpPr>
+        <p:spPr>
+          <a:xfrm>
+            <a:off x="13966900" y="5423594"/>
+            <a:ext cx="6584800" cy="7103695"/>
+          </a:xfrm>
+          <a:custGeom>
+            <a:avLst/>
+            <a:gdLst/>
+            <a:ahLst/>
+            <a:cxnLst/>
+            <a:rect l="l" t="t" r="r" b="b"/>
+            <a:pathLst>
+              <a:path w="6584800" h="7103695">
+                <a:moveTo>
+                  <a:pt x="0" y="0"/>
+                </a:moveTo>
+                <a:lnTo>
+                  <a:pt x="6584800" y="0"/>
+                </a:lnTo>
+                <a:lnTo>
+                  <a:pt x="6584800" y="7103695"/>
+                </a:lnTo>
+                <a:lnTo>
+                  <a:pt x="0" y="7103695"/>
+                </a:lnTo>
+                <a:lnTo>
+                  <a:pt x="0" y="0"/>
+                </a:lnTo>
+                <a:close/>
+              </a:path>
+            </a:pathLst>
+          </a:custGeom>
+          <a:blipFill>
+            <a:blip>
               <a:extLst>
                 <a:ext uri="{96DAC541-7B7A-43D3-8B79-37D633B846F1}">
                   <asvg:svgBlip xmlns:asvg="http://schemas.microsoft.com/office/drawing/2016/SVG/main" r:embed="rId4"/>
@@ -7423,41 +7486,41 @@
               </a:extLst>
             </a:blip>
             <a:stretch>
-              <a:fillRect l="0" t="0" r="0" b="0"/>
+              <a:fillRect/>
             </a:stretch>
           </a:blipFill>
         </p:spPr>
       </p:sp>
       <p:sp>
         <p:nvSpPr>
-          <p:cNvPr name="Freeform 5" id="5"/>
+          <p:cNvPr id="6" name="Freeform 6"/>
           <p:cNvSpPr/>
           <p:nvPr/>
         </p:nvSpPr>
         <p:spPr>
-          <a:xfrm flipH="false" flipV="false" rot="0">
-            <a:off x="13966900" y="5423594"/>
-            <a:ext cx="6584800" cy="7103695"/>
+          <a:xfrm>
+            <a:off x="-122667" y="6554220"/>
+            <a:ext cx="5062953" cy="4114800"/>
           </a:xfrm>
           <a:custGeom>
             <a:avLst/>
             <a:gdLst/>
             <a:ahLst/>
             <a:cxnLst/>
-            <a:rect r="r" b="b" t="t" l="l"/>
+            <a:rect l="l" t="t" r="r" b="b"/>
             <a:pathLst>
-              <a:path h="7103695" w="6584800">
+              <a:path w="5062953" h="4114800">
                 <a:moveTo>
                   <a:pt x="0" y="0"/>
                 </a:moveTo>
                 <a:lnTo>
-                  <a:pt x="6584800" y="0"/>
-                </a:lnTo>
-                <a:lnTo>
-                  <a:pt x="6584800" y="7103695"/>
-                </a:lnTo>
-                <a:lnTo>
-                  <a:pt x="0" y="7103695"/>
+                  <a:pt x="5062953" y="0"/>
+                </a:lnTo>
+                <a:lnTo>
+                  <a:pt x="5062953" y="4114800"/>
+                </a:lnTo>
+                <a:lnTo>
+                  <a:pt x="0" y="4114800"/>
                 </a:lnTo>
                 <a:lnTo>
                   <a:pt x="0" y="0"/>
@@ -7467,49 +7530,49 @@
             </a:pathLst>
           </a:custGeom>
           <a:blipFill>
-            <a:blip r:embed="rId5">
+            <a:blip>
               <a:extLst>
                 <a:ext uri="{96DAC541-7B7A-43D3-8B79-37D633B846F1}">
-                  <asvg:svgBlip xmlns:asvg="http://schemas.microsoft.com/office/drawing/2016/SVG/main" r:embed="rId6"/>
+                  <asvg:svgBlip xmlns:asvg="http://schemas.microsoft.com/office/drawing/2016/SVG/main" r:embed="rId5"/>
                 </a:ext>
               </a:extLst>
             </a:blip>
             <a:stretch>
-              <a:fillRect l="0" t="0" r="0" b="0"/>
+              <a:fillRect/>
             </a:stretch>
           </a:blipFill>
         </p:spPr>
       </p:sp>
       <p:sp>
         <p:nvSpPr>
-          <p:cNvPr name="Freeform 6" id="6"/>
+          <p:cNvPr id="7" name="Freeform 7"/>
           <p:cNvSpPr/>
           <p:nvPr/>
         </p:nvSpPr>
         <p:spPr>
-          <a:xfrm flipH="false" flipV="false" rot="0">
-            <a:off x="-122667" y="6554220"/>
-            <a:ext cx="5062953" cy="4114800"/>
+          <a:xfrm rot="-3516996">
+            <a:off x="14320434" y="-2372404"/>
+            <a:ext cx="6669405" cy="8229600"/>
           </a:xfrm>
           <a:custGeom>
             <a:avLst/>
             <a:gdLst/>
             <a:ahLst/>
             <a:cxnLst/>
-            <a:rect r="r" b="b" t="t" l="l"/>
+            <a:rect l="l" t="t" r="r" b="b"/>
             <a:pathLst>
-              <a:path h="4114800" w="5062953">
+              <a:path w="6669405" h="8229600">
                 <a:moveTo>
                   <a:pt x="0" y="0"/>
                 </a:moveTo>
                 <a:lnTo>
-                  <a:pt x="5062953" y="0"/>
-                </a:lnTo>
-                <a:lnTo>
-                  <a:pt x="5062953" y="4114800"/>
-                </a:lnTo>
-                <a:lnTo>
-                  <a:pt x="0" y="4114800"/>
+                  <a:pt x="6669405" y="0"/>
+                </a:lnTo>
+                <a:lnTo>
+                  <a:pt x="6669405" y="8229600"/>
+                </a:lnTo>
+                <a:lnTo>
+                  <a:pt x="0" y="8229600"/>
                 </a:lnTo>
                 <a:lnTo>
                   <a:pt x="0" y="0"/>
@@ -7519,7 +7582,106 @@
             </a:pathLst>
           </a:custGeom>
           <a:blipFill>
-            <a:blip r:embed="rId7">
+            <a:blip r:embed="rId6"/>
+            <a:stretch>
+              <a:fillRect/>
+            </a:stretch>
+          </a:blipFill>
+        </p:spPr>
+      </p:sp>
+      <p:sp>
+        <p:nvSpPr>
+          <p:cNvPr id="8" name="Freeform 8"/>
+          <p:cNvSpPr/>
+          <p:nvPr/>
+        </p:nvSpPr>
+        <p:spPr>
+          <a:xfrm>
+            <a:off x="3234023" y="7277506"/>
+            <a:ext cx="4816697" cy="4114800"/>
+          </a:xfrm>
+          <a:custGeom>
+            <a:avLst/>
+            <a:gdLst/>
+            <a:ahLst/>
+            <a:cxnLst/>
+            <a:rect l="l" t="t" r="r" b="b"/>
+            <a:pathLst>
+              <a:path w="4816697" h="4114800">
+                <a:moveTo>
+                  <a:pt x="0" y="0"/>
+                </a:moveTo>
+                <a:lnTo>
+                  <a:pt x="4816697" y="0"/>
+                </a:lnTo>
+                <a:lnTo>
+                  <a:pt x="4816697" y="4114800"/>
+                </a:lnTo>
+                <a:lnTo>
+                  <a:pt x="0" y="4114800"/>
+                </a:lnTo>
+                <a:lnTo>
+                  <a:pt x="0" y="0"/>
+                </a:lnTo>
+                <a:close/>
+              </a:path>
+            </a:pathLst>
+          </a:custGeom>
+          <a:blipFill>
+            <a:blip>
+              <a:extLst>
+                <a:ext uri="{96DAC541-7B7A-43D3-8B79-37D633B846F1}">
+                  <asvg:svgBlip xmlns:asvg="http://schemas.microsoft.com/office/drawing/2016/SVG/main" r:embed="rId7"/>
+                </a:ext>
+              </a:extLst>
+            </a:blip>
+            <a:stretch>
+              <a:fillRect/>
+            </a:stretch>
+          </a:blipFill>
+        </p:spPr>
+      </p:sp>
+      <p:sp>
+        <p:nvSpPr>
+          <p:cNvPr id="9" name="Freeform 9"/>
+          <p:cNvSpPr/>
+          <p:nvPr/>
+        </p:nvSpPr>
+        <p:spPr>
+          <a:xfrm rot="6309934">
+            <a:off x="7417961" y="-2077549"/>
+            <a:ext cx="2687667" cy="4737875"/>
+          </a:xfrm>
+          <a:custGeom>
+            <a:avLst/>
+            <a:gdLst/>
+            <a:ahLst/>
+            <a:cxnLst/>
+            <a:rect l="l" t="t" r="r" b="b"/>
+            <a:pathLst>
+              <a:path w="2687667" h="4737875">
+                <a:moveTo>
+                  <a:pt x="0" y="0"/>
+                </a:moveTo>
+                <a:lnTo>
+                  <a:pt x="2687667" y="0"/>
+                </a:lnTo>
+                <a:lnTo>
+                  <a:pt x="2687667" y="4737875"/>
+                </a:lnTo>
+                <a:lnTo>
+                  <a:pt x="0" y="4737875"/>
+                </a:lnTo>
+                <a:lnTo>
+                  <a:pt x="0" y="0"/>
+                </a:lnTo>
+                <a:close/>
+              </a:path>
+            </a:pathLst>
+          </a:custGeom>
+          <a:blipFill>
+            <a:blip>
+              <a:alphaModFix amt="38000"/>
               <a:extLst>
                 <a:ext uri="{96DAC541-7B7A-43D3-8B79-37D633B846F1}">
                   <asvg:svgBlip xmlns:asvg="http://schemas.microsoft.com/office/drawing/2016/SVG/main" r:embed="rId8"/>
@@ -7527,41 +7689,41 @@
               </a:extLst>
             </a:blip>
             <a:stretch>
-              <a:fillRect l="0" t="0" r="0" b="0"/>
+              <a:fillRect/>
             </a:stretch>
           </a:blipFill>
         </p:spPr>
       </p:sp>
       <p:sp>
         <p:nvSpPr>
-          <p:cNvPr name="Freeform 7" id="7"/>
+          <p:cNvPr id="10" name="Freeform 10"/>
           <p:cNvSpPr/>
           <p:nvPr/>
         </p:nvSpPr>
         <p:spPr>
-          <a:xfrm flipH="false" flipV="false" rot="-3516996">
-            <a:off x="14320434" y="-2372404"/>
-            <a:ext cx="6669405" cy="8229600"/>
+          <a:xfrm>
+            <a:off x="-1591031" y="-1137320"/>
+            <a:ext cx="6774834" cy="3985579"/>
           </a:xfrm>
           <a:custGeom>
             <a:avLst/>
             <a:gdLst/>
             <a:ahLst/>
             <a:cxnLst/>
-            <a:rect r="r" b="b" t="t" l="l"/>
+            <a:rect l="l" t="t" r="r" b="b"/>
             <a:pathLst>
-              <a:path h="8229600" w="6669405">
+              <a:path w="6774834" h="3985579">
                 <a:moveTo>
                   <a:pt x="0" y="0"/>
                 </a:moveTo>
                 <a:lnTo>
-                  <a:pt x="6669405" y="0"/>
-                </a:lnTo>
-                <a:lnTo>
-                  <a:pt x="6669405" y="8229600"/>
-                </a:lnTo>
-                <a:lnTo>
-                  <a:pt x="0" y="8229600"/>
+                  <a:pt x="6774834" y="0"/>
+                </a:lnTo>
+                <a:lnTo>
+                  <a:pt x="6774834" y="3985579"/>
+                </a:lnTo>
+                <a:lnTo>
+                  <a:pt x="0" y="3985579"/>
                 </a:lnTo>
                 <a:lnTo>
                   <a:pt x="0" y="0"/>
@@ -7573,158 +7735,7 @@
           <a:blipFill>
             <a:blip r:embed="rId9"/>
             <a:stretch>
-              <a:fillRect l="0" t="0" r="0" b="0"/>
-            </a:stretch>
-          </a:blipFill>
-        </p:spPr>
-      </p:sp>
-      <p:sp>
-        <p:nvSpPr>
-          <p:cNvPr name="Freeform 8" id="8"/>
-          <p:cNvSpPr/>
-          <p:nvPr/>
-        </p:nvSpPr>
-        <p:spPr>
-          <a:xfrm flipH="false" flipV="false" rot="0">
-            <a:off x="3234023" y="7277506"/>
-            <a:ext cx="4816697" cy="4114800"/>
-          </a:xfrm>
-          <a:custGeom>
-            <a:avLst/>
-            <a:gdLst/>
-            <a:ahLst/>
-            <a:cxnLst/>
-            <a:rect r="r" b="b" t="t" l="l"/>
-            <a:pathLst>
-              <a:path h="4114800" w="4816697">
-                <a:moveTo>
-                  <a:pt x="0" y="0"/>
-                </a:moveTo>
-                <a:lnTo>
-                  <a:pt x="4816697" y="0"/>
-                </a:lnTo>
-                <a:lnTo>
-                  <a:pt x="4816697" y="4114800"/>
-                </a:lnTo>
-                <a:lnTo>
-                  <a:pt x="0" y="4114800"/>
-                </a:lnTo>
-                <a:lnTo>
-                  <a:pt x="0" y="0"/>
-                </a:lnTo>
-                <a:close/>
-              </a:path>
-            </a:pathLst>
-          </a:custGeom>
-          <a:blipFill>
-            <a:blip r:embed="rId10">
-              <a:extLst>
-                <a:ext uri="{96DAC541-7B7A-43D3-8B79-37D633B846F1}">
-                  <asvg:svgBlip xmlns:asvg="http://schemas.microsoft.com/office/drawing/2016/SVG/main" r:embed="rId11"/>
-                </a:ext>
-              </a:extLst>
-            </a:blip>
-            <a:stretch>
-              <a:fillRect l="0" t="0" r="0" b="0"/>
-            </a:stretch>
-          </a:blipFill>
-        </p:spPr>
-      </p:sp>
-      <p:sp>
-        <p:nvSpPr>
-          <p:cNvPr name="Freeform 9" id="9"/>
-          <p:cNvSpPr/>
-          <p:nvPr/>
-        </p:nvSpPr>
-        <p:spPr>
-          <a:xfrm flipH="false" flipV="false" rot="6309934">
-            <a:off x="7417961" y="-2077549"/>
-            <a:ext cx="2687667" cy="4737875"/>
-          </a:xfrm>
-          <a:custGeom>
-            <a:avLst/>
-            <a:gdLst/>
-            <a:ahLst/>
-            <a:cxnLst/>
-            <a:rect r="r" b="b" t="t" l="l"/>
-            <a:pathLst>
-              <a:path h="4737875" w="2687667">
-                <a:moveTo>
-                  <a:pt x="0" y="0"/>
-                </a:moveTo>
-                <a:lnTo>
-                  <a:pt x="2687667" y="0"/>
-                </a:lnTo>
-                <a:lnTo>
-                  <a:pt x="2687667" y="4737875"/>
-                </a:lnTo>
-                <a:lnTo>
-                  <a:pt x="0" y="4737875"/>
-                </a:lnTo>
-                <a:lnTo>
-                  <a:pt x="0" y="0"/>
-                </a:lnTo>
-                <a:close/>
-              </a:path>
-            </a:pathLst>
-          </a:custGeom>
-          <a:blipFill>
-            <a:blip r:embed="rId12">
-              <a:alphaModFix amt="38000"/>
-              <a:extLst>
-                <a:ext uri="{96DAC541-7B7A-43D3-8B79-37D633B846F1}">
-                  <asvg:svgBlip xmlns:asvg="http://schemas.microsoft.com/office/drawing/2016/SVG/main" r:embed="rId13"/>
-                </a:ext>
-              </a:extLst>
-            </a:blip>
-            <a:stretch>
-              <a:fillRect l="0" t="0" r="0" b="0"/>
-            </a:stretch>
-          </a:blipFill>
-        </p:spPr>
-      </p:sp>
-      <p:sp>
-        <p:nvSpPr>
-          <p:cNvPr name="Freeform 10" id="10"/>
-          <p:cNvSpPr/>
-          <p:nvPr/>
-        </p:nvSpPr>
-        <p:spPr>
-          <a:xfrm flipH="false" flipV="false" rot="0">
-            <a:off x="-1591031" y="-1137320"/>
-            <a:ext cx="6774834" cy="3985579"/>
-          </a:xfrm>
-          <a:custGeom>
-            <a:avLst/>
-            <a:gdLst/>
-            <a:ahLst/>
-            <a:cxnLst/>
-            <a:rect r="r" b="b" t="t" l="l"/>
-            <a:pathLst>
-              <a:path h="3985579" w="6774834">
-                <a:moveTo>
-                  <a:pt x="0" y="0"/>
-                </a:moveTo>
-                <a:lnTo>
-                  <a:pt x="6774834" y="0"/>
-                </a:lnTo>
-                <a:lnTo>
-                  <a:pt x="6774834" y="3985579"/>
-                </a:lnTo>
-                <a:lnTo>
-                  <a:pt x="0" y="3985579"/>
-                </a:lnTo>
-                <a:lnTo>
-                  <a:pt x="0" y="0"/>
-                </a:lnTo>
-                <a:close/>
-              </a:path>
-            </a:pathLst>
-          </a:custGeom>
-          <a:blipFill>
-            <a:blip r:embed="rId14"/>
-            <a:stretch>
-              <a:fillRect l="0" t="0" r="0" b="0"/>
+              <a:fillRect/>
             </a:stretch>
           </a:blipFill>
         </p:spPr>

--- a/Presentation/FUNGICIDE EXPLORATION.pptx
+++ b/Presentation/FUNGICIDE EXPLORATION.pptx
@@ -25,11 +25,14 @@
     <p:embeddedFont>
       <p:font typeface="DM Sans" pitchFamily="2" charset="77"/>
       <p:regular r:id="rId12"/>
+      <p:bold r:id="rId13"/>
+      <p:italic r:id="rId14"/>
+      <p:boldItalic r:id="rId15"/>
     </p:embeddedFont>
     <p:embeddedFont>
       <p:font typeface="DM Sans Italics" pitchFamily="2" charset="77"/>
-      <p:regular r:id="rId13"/>
-      <p:italic r:id="rId14"/>
+      <p:regular r:id="rId16"/>
+      <p:italic r:id="rId17"/>
     </p:embeddedFont>
   </p:embeddedFontLst>
   <p:defaultTextStyle>
@@ -3646,7 +3649,7 @@
               </a:lnSpc>
             </a:pPr>
             <a:r>
-              <a:rPr lang="en-US" sz="6846">
+              <a:rPr lang="en-US" sz="6846" dirty="0">
                 <a:solidFill>
                   <a:srgbClr val="3F771E"/>
                 </a:solidFill>
@@ -3655,7 +3658,7 @@
                 <a:cs typeface="Chau Philomene"/>
                 <a:sym typeface="Chau Philomene"/>
               </a:rPr>
-              <a:t>Our Team</a:t>
+              <a:t>Our Group</a:t>
             </a:r>
           </a:p>
         </p:txBody>
